--- a/presentaciones/Presentacion_Avances_Modernizacion_Digital_DGAC_Agenda.pptx
+++ b/presentaciones/Presentacion_Avances_Modernizacion_Digital_DGAC_Agenda.pptx
@@ -9,9 +9,9 @@
     <p:sldId id="257" r:id="rId3"/>
     <p:sldId id="258" r:id="rId4"/>
     <p:sldId id="259" r:id="rId5"/>
-    <p:sldId id="260" r:id="rId6"/>
+    <p:sldId id="262" r:id="rId6"/>
     <p:sldId id="261" r:id="rId7"/>
-    <p:sldId id="262" r:id="rId8"/>
+    <p:sldId id="260" r:id="rId8"/>
     <p:sldId id="263" r:id="rId9"/>
     <p:sldId id="264" r:id="rId10"/>
     <p:sldId id="265" r:id="rId11"/>
@@ -113,6 +113,11 @@
       </a:defRPr>
     </a:lvl9pPr>
   </p:defaultTextStyle>
+  <p:extLst>
+    <p:ext uri="{EFAFB233-063F-42B5-8137-9DF3F51BA10A}">
+      <p15:sldGuideLst xmlns:p15="http://schemas.microsoft.com/office/powerpoint/2012/main"/>
+    </p:ext>
+  </p:extLst>
 </p:presentation>
 </file>
 
@@ -265,7 +270,7 @@
           <a:p>
             <a:fld id="{7FE15B9F-6AF2-4D7A-8C18-B4909A4375D8}" type="datetimeFigureOut">
               <a:rPr lang="es-GT" smtClean="0"/>
-              <a:t>15/07/2026</a:t>
+              <a:t>18/08/2026</a:t>
             </a:fld>
             <a:endParaRPr lang="es-GT"/>
           </a:p>
@@ -465,7 +470,7 @@
           <a:p>
             <a:fld id="{7FE15B9F-6AF2-4D7A-8C18-B4909A4375D8}" type="datetimeFigureOut">
               <a:rPr lang="es-GT" smtClean="0"/>
-              <a:t>15/07/2026</a:t>
+              <a:t>18/08/2026</a:t>
             </a:fld>
             <a:endParaRPr lang="es-GT"/>
           </a:p>
@@ -675,7 +680,7 @@
           <a:p>
             <a:fld id="{7FE15B9F-6AF2-4D7A-8C18-B4909A4375D8}" type="datetimeFigureOut">
               <a:rPr lang="es-GT" smtClean="0"/>
-              <a:t>15/07/2026</a:t>
+              <a:t>18/08/2026</a:t>
             </a:fld>
             <a:endParaRPr lang="es-GT"/>
           </a:p>
@@ -875,7 +880,7 @@
           <a:p>
             <a:fld id="{7FE15B9F-6AF2-4D7A-8C18-B4909A4375D8}" type="datetimeFigureOut">
               <a:rPr lang="es-GT" smtClean="0"/>
-              <a:t>15/07/2026</a:t>
+              <a:t>18/08/2026</a:t>
             </a:fld>
             <a:endParaRPr lang="es-GT"/>
           </a:p>
@@ -1151,7 +1156,7 @@
           <a:p>
             <a:fld id="{7FE15B9F-6AF2-4D7A-8C18-B4909A4375D8}" type="datetimeFigureOut">
               <a:rPr lang="es-GT" smtClean="0"/>
-              <a:t>15/07/2026</a:t>
+              <a:t>18/08/2026</a:t>
             </a:fld>
             <a:endParaRPr lang="es-GT"/>
           </a:p>
@@ -1419,7 +1424,7 @@
           <a:p>
             <a:fld id="{7FE15B9F-6AF2-4D7A-8C18-B4909A4375D8}" type="datetimeFigureOut">
               <a:rPr lang="es-GT" smtClean="0"/>
-              <a:t>15/07/2026</a:t>
+              <a:t>18/08/2026</a:t>
             </a:fld>
             <a:endParaRPr lang="es-GT"/>
           </a:p>
@@ -1834,7 +1839,7 @@
           <a:p>
             <a:fld id="{7FE15B9F-6AF2-4D7A-8C18-B4909A4375D8}" type="datetimeFigureOut">
               <a:rPr lang="es-GT" smtClean="0"/>
-              <a:t>15/07/2026</a:t>
+              <a:t>18/08/2026</a:t>
             </a:fld>
             <a:endParaRPr lang="es-GT"/>
           </a:p>
@@ -1976,7 +1981,7 @@
           <a:p>
             <a:fld id="{7FE15B9F-6AF2-4D7A-8C18-B4909A4375D8}" type="datetimeFigureOut">
               <a:rPr lang="es-GT" smtClean="0"/>
-              <a:t>15/07/2026</a:t>
+              <a:t>18/08/2026</a:t>
             </a:fld>
             <a:endParaRPr lang="es-GT"/>
           </a:p>
@@ -2089,7 +2094,7 @@
           <a:p>
             <a:fld id="{7FE15B9F-6AF2-4D7A-8C18-B4909A4375D8}" type="datetimeFigureOut">
               <a:rPr lang="es-GT" smtClean="0"/>
-              <a:t>15/07/2026</a:t>
+              <a:t>18/08/2026</a:t>
             </a:fld>
             <a:endParaRPr lang="es-GT"/>
           </a:p>
@@ -2402,7 +2407,7 @@
           <a:p>
             <a:fld id="{7FE15B9F-6AF2-4D7A-8C18-B4909A4375D8}" type="datetimeFigureOut">
               <a:rPr lang="es-GT" smtClean="0"/>
-              <a:t>15/07/2026</a:t>
+              <a:t>18/08/2026</a:t>
             </a:fld>
             <a:endParaRPr lang="es-GT"/>
           </a:p>
@@ -2691,7 +2696,7 @@
           <a:p>
             <a:fld id="{7FE15B9F-6AF2-4D7A-8C18-B4909A4375D8}" type="datetimeFigureOut">
               <a:rPr lang="es-GT" smtClean="0"/>
-              <a:t>15/07/2026</a:t>
+              <a:t>18/08/2026</a:t>
             </a:fld>
             <a:endParaRPr lang="es-GT"/>
           </a:p>
@@ -2934,7 +2939,7 @@
           <a:p>
             <a:fld id="{7FE15B9F-6AF2-4D7A-8C18-B4909A4375D8}" type="datetimeFigureOut">
               <a:rPr lang="es-GT" smtClean="0"/>
-              <a:t>15/07/2026</a:t>
+              <a:t>18/08/2026</a:t>
             </a:fld>
             <a:endParaRPr lang="es-GT"/>
           </a:p>
@@ -4013,7 +4018,7 @@
           <a:lstStyle/>
           <a:p>
             <a:r>
-              <a:rPr lang="es-ES" sz="2900" b="1">
+              <a:rPr lang="es-ES" sz="2900" b="1" dirty="0">
                 <a:solidFill>
                   <a:srgbClr val="001F44"/>
                 </a:solidFill>
@@ -4021,7 +4026,7 @@
               </a:rPr>
               <a:t>HOJA DE RUTA Y BENEFICIOS ESPERADOS</a:t>
             </a:r>
-            <a:endParaRPr lang="es-GT" sz="2900" b="1">
+            <a:endParaRPr lang="es-GT" sz="2900" b="1" dirty="0">
               <a:solidFill>
                 <a:srgbClr val="001F44"/>
               </a:solidFill>
@@ -5221,7 +5226,7 @@
           <a:lstStyle/>
           <a:p>
             <a:r>
-              <a:rPr lang="es-ES" sz="1400">
+              <a:rPr lang="es-ES" sz="1400" dirty="0">
                 <a:solidFill>
                   <a:srgbClr val="002D5A"/>
                 </a:solidFill>
@@ -5232,7 +5237,7 @@
           </a:p>
           <a:p>
             <a:r>
-              <a:rPr lang="es-ES" sz="1400">
+              <a:rPr lang="es-ES" sz="1400" dirty="0">
                 <a:solidFill>
                   <a:srgbClr val="002D5A"/>
                 </a:solidFill>
@@ -5243,7 +5248,7 @@
           </a:p>
           <a:p>
             <a:r>
-              <a:rPr lang="es-ES" sz="1400">
+              <a:rPr lang="es-ES" sz="1400" dirty="0">
                 <a:solidFill>
                   <a:srgbClr val="002D5A"/>
                 </a:solidFill>
@@ -5254,7 +5259,7 @@
           </a:p>
           <a:p>
             <a:r>
-              <a:rPr lang="es-ES" sz="1400">
+              <a:rPr lang="es-ES" sz="1400" dirty="0">
                 <a:solidFill>
                   <a:srgbClr val="002D5A"/>
                 </a:solidFill>
@@ -5265,7 +5270,7 @@
           </a:p>
           <a:p>
             <a:r>
-              <a:rPr lang="es-ES" sz="1400">
+              <a:rPr lang="es-ES" sz="1400" dirty="0">
                 <a:solidFill>
                   <a:srgbClr val="002D5A"/>
                 </a:solidFill>
@@ -5276,7 +5281,7 @@
           </a:p>
           <a:p>
             <a:r>
-              <a:rPr lang="es-ES" sz="1400">
+              <a:rPr lang="es-ES" sz="1400" dirty="0">
                 <a:solidFill>
                   <a:srgbClr val="002D5A"/>
                 </a:solidFill>
@@ -5284,7 +5289,7 @@
               </a:rPr>
               <a:t>• Atención en línea para usuarios nacionales e internacionales.</a:t>
             </a:r>
-            <a:endParaRPr lang="es-GT" sz="1400">
+            <a:endParaRPr lang="es-GT" sz="1400" dirty="0">
               <a:solidFill>
                 <a:srgbClr val="002D5A"/>
               </a:solidFill>
@@ -7206,7 +7211,7 @@
           <a:p>
             <a:pPr algn="ctr"/>
             <a:r>
-              <a:rPr lang="es-GT" sz="1600" b="1">
+              <a:rPr lang="es-GT" sz="1600" b="1" dirty="0">
                 <a:solidFill>
                   <a:srgbClr val="FFFFFF"/>
                 </a:solidFill>
@@ -7217,42 +7222,6 @@
           </a:p>
         </p:txBody>
       </p:sp>
-      <p:pic>
-        <p:nvPicPr>
-          <p:cNvPr id="10" name="Imagen 9">
-            <a:extLst>
-              <a:ext uri="{FF2B5EF4-FFF2-40B4-BE49-F238E27FC236}">
-                <a16:creationId xmlns:a16="http://schemas.microsoft.com/office/drawing/2014/main" id="{219A8655-BC93-1470-09FE-D8F0633D122B}"/>
-              </a:ext>
-            </a:extLst>
-          </p:cNvPr>
-          <p:cNvPicPr>
-            <a:picLocks/>
-          </p:cNvPicPr>
-          <p:nvPr/>
-        </p:nvPicPr>
-        <p:blipFill>
-          <a:blip r:embed="rId3">
-            <a:extLst>
-              <a:ext uri="{28A0092B-C50C-407E-A947-70E740481C1C}">
-                <a14:useLocalDpi xmlns:a14="http://schemas.microsoft.com/office/drawing/2010/main" val="0"/>
-              </a:ext>
-            </a:extLst>
-          </a:blip>
-          <a:stretch>
-            <a:fillRect/>
-          </a:stretch>
-        </p:blipFill>
-        <p:spPr>
-          <a:xfrm>
-            <a:off x="1016000" y="2222500"/>
-            <a:ext cx="6604000" cy="4191000"/>
-          </a:xfrm>
-          <a:prstGeom prst="rect">
-            <a:avLst/>
-          </a:prstGeom>
-        </p:spPr>
-      </p:pic>
       <p:sp>
         <p:nvSpPr>
           <p:cNvPr id="11" name="Rectángulo: esquinas redondeadas 10">
@@ -7267,7 +7236,7 @@
         </p:nvSpPr>
         <p:spPr>
           <a:xfrm>
-            <a:off x="8382000" y="2222500"/>
+            <a:off x="8236344" y="3071312"/>
             <a:ext cx="4889500" cy="1524000"/>
           </a:xfrm>
           <a:prstGeom prst="roundRect">
@@ -7321,7 +7290,7 @@
         </p:nvSpPr>
         <p:spPr>
           <a:xfrm>
-            <a:off x="8382000" y="2222500"/>
+            <a:off x="8370705" y="3071312"/>
             <a:ext cx="88900" cy="1524000"/>
           </a:xfrm>
           <a:prstGeom prst="rect">
@@ -7389,7 +7358,7 @@
         </p:nvSpPr>
         <p:spPr>
           <a:xfrm>
-            <a:off x="8661400" y="2451100"/>
+            <a:off x="8629650" y="3358347"/>
             <a:ext cx="4381500" cy="261610"/>
           </a:xfrm>
           <a:prstGeom prst="rect">
@@ -7404,7 +7373,7 @@
           <a:lstStyle/>
           <a:p>
             <a:r>
-              <a:rPr lang="es-GT" sz="1700" b="1">
+              <a:rPr lang="es-GT" sz="1700" b="1" dirty="0">
                 <a:solidFill>
                   <a:srgbClr val="001F44"/>
                 </a:solidFill>
@@ -7429,7 +7398,7 @@
         </p:nvSpPr>
         <p:spPr>
           <a:xfrm>
-            <a:off x="8661400" y="2921000"/>
+            <a:off x="8648700" y="3833312"/>
             <a:ext cx="4356100" cy="646331"/>
           </a:xfrm>
           <a:prstGeom prst="rect">
@@ -7444,7 +7413,7 @@
           <a:lstStyle/>
           <a:p>
             <a:r>
-              <a:rPr lang="es-ES" sz="1400">
+              <a:rPr lang="es-ES" sz="1400" dirty="0">
                 <a:solidFill>
                   <a:srgbClr val="002D5A"/>
                 </a:solidFill>
@@ -7452,215 +7421,7 @@
               </a:rPr>
               <a:t>Migración de información a la nueva página web institucional, en cumplimiento de requerimientos de Gobierno Abierto y Electrónico -GAE-.</a:t>
             </a:r>
-            <a:endParaRPr lang="es-GT" sz="1400">
-              <a:solidFill>
-                <a:srgbClr val="002D5A"/>
-              </a:solidFill>
-              <a:latin typeface="Aptos" panose="020B0004020202020204" pitchFamily="34" charset="0"/>
-            </a:endParaRPr>
-          </a:p>
-        </p:txBody>
-      </p:sp>
-      <p:sp>
-        <p:nvSpPr>
-          <p:cNvPr id="15" name="Rectángulo: esquinas redondeadas 14">
-            <a:extLst>
-              <a:ext uri="{FF2B5EF4-FFF2-40B4-BE49-F238E27FC236}">
-                <a16:creationId xmlns:a16="http://schemas.microsoft.com/office/drawing/2014/main" id="{E6FCCA67-4D6E-AFF2-2054-42B365DE572B}"/>
-              </a:ext>
-            </a:extLst>
-          </p:cNvPr>
-          <p:cNvSpPr/>
-          <p:nvPr/>
-        </p:nvSpPr>
-        <p:spPr>
-          <a:xfrm>
-            <a:off x="8382000" y="4127500"/>
-            <a:ext cx="4889500" cy="1651000"/>
-          </a:xfrm>
-          <a:prstGeom prst="roundRect">
-            <a:avLst/>
-          </a:prstGeom>
-          <a:solidFill>
-            <a:srgbClr val="FFFFFF"/>
-          </a:solidFill>
-          <a:ln w="15875">
-            <a:solidFill>
-              <a:srgbClr val="BFD8F2"/>
-            </a:solidFill>
-          </a:ln>
-        </p:spPr>
-        <p:style>
-          <a:lnRef idx="2">
-            <a:schemeClr val="accent1">
-              <a:shade val="15000"/>
-            </a:schemeClr>
-          </a:lnRef>
-          <a:fillRef idx="1">
-            <a:schemeClr val="accent1"/>
-          </a:fillRef>
-          <a:effectRef idx="0">
-            <a:schemeClr val="accent1"/>
-          </a:effectRef>
-          <a:fontRef idx="minor">
-            <a:schemeClr val="lt1"/>
-          </a:fontRef>
-        </p:style>
-        <p:txBody>
-          <a:bodyPr rtlCol="0" anchor="ctr"/>
-          <a:lstStyle/>
-          <a:p>
-            <a:pPr algn="ctr"/>
-            <a:endParaRPr lang="es-GT"/>
-          </a:p>
-        </p:txBody>
-      </p:sp>
-      <p:sp>
-        <p:nvSpPr>
-          <p:cNvPr id="16" name="Rectángulo 15">
-            <a:extLst>
-              <a:ext uri="{FF2B5EF4-FFF2-40B4-BE49-F238E27FC236}">
-                <a16:creationId xmlns:a16="http://schemas.microsoft.com/office/drawing/2014/main" id="{FA7791ED-82D6-C6C7-D25D-4B4E8B7949DF}"/>
-              </a:ext>
-            </a:extLst>
-          </p:cNvPr>
-          <p:cNvSpPr/>
-          <p:nvPr/>
-        </p:nvSpPr>
-        <p:spPr>
-          <a:xfrm>
-            <a:off x="8382000" y="4127500"/>
-            <a:ext cx="88900" cy="1651000"/>
-          </a:xfrm>
-          <a:prstGeom prst="rect">
-            <a:avLst/>
-          </a:prstGeom>
-          <a:solidFill>
-            <a:srgbClr val="F5B400"/>
-          </a:solidFill>
-          <a:ln w="19050" cap="flat" cmpd="sng" algn="ctr">
-            <a:noFill/>
-            <a:prstDash val="solid"/>
-            <a:miter lim="800000"/>
-          </a:ln>
-          <a:effectLst/>
-          <a:extLst>
-            <a:ext uri="{91240B29-F687-4F45-9708-019B960494DF}">
-              <a14:hiddenLine xmlns:a14="http://schemas.microsoft.com/office/drawing/2010/main" w="19050" cap="flat" cmpd="sng" algn="ctr">
-                <a:solidFill>
-                  <a:schemeClr val="accent1">
-                    <a:shade val="15000"/>
-                  </a:schemeClr>
-                </a:solidFill>
-                <a:prstDash val="solid"/>
-                <a:miter lim="800000"/>
-              </a14:hiddenLine>
-            </a:ext>
-          </a:extLst>
-        </p:spPr>
-        <p:style>
-          <a:lnRef idx="2">
-            <a:schemeClr val="accent1">
-              <a:shade val="15000"/>
-            </a:schemeClr>
-          </a:lnRef>
-          <a:fillRef idx="1">
-            <a:schemeClr val="accent1"/>
-          </a:fillRef>
-          <a:effectRef idx="0">
-            <a:schemeClr val="accent1"/>
-          </a:effectRef>
-          <a:fontRef idx="minor">
-            <a:schemeClr val="lt1"/>
-          </a:fontRef>
-        </p:style>
-        <p:txBody>
-          <a:bodyPr rtlCol="0" anchor="ctr"/>
-          <a:lstStyle/>
-          <a:p>
-            <a:pPr algn="ctr"/>
-            <a:endParaRPr lang="es-GT"/>
-          </a:p>
-        </p:txBody>
-      </p:sp>
-      <p:sp>
-        <p:nvSpPr>
-          <p:cNvPr id="17" name="CuadroTexto 16">
-            <a:extLst>
-              <a:ext uri="{FF2B5EF4-FFF2-40B4-BE49-F238E27FC236}">
-                <a16:creationId xmlns:a16="http://schemas.microsoft.com/office/drawing/2014/main" id="{2A78A827-C976-F1E4-B77D-CF43B25AC7EC}"/>
-              </a:ext>
-            </a:extLst>
-          </p:cNvPr>
-          <p:cNvSpPr txBox="1"/>
-          <p:nvPr/>
-        </p:nvSpPr>
-        <p:spPr>
-          <a:xfrm>
-            <a:off x="8661400" y="4356100"/>
-            <a:ext cx="4381500" cy="261610"/>
-          </a:xfrm>
-          <a:prstGeom prst="rect">
-            <a:avLst/>
-          </a:prstGeom>
-          <a:noFill/>
-        </p:spPr>
-        <p:txBody>
-          <a:bodyPr vert="horz" lIns="0" tIns="0" rIns="0" bIns="0" rtlCol="0">
-            <a:spAutoFit/>
-          </a:bodyPr>
-          <a:lstStyle/>
-          <a:p>
-            <a:r>
-              <a:rPr lang="es-GT" sz="1700" b="1">
-                <a:solidFill>
-                  <a:srgbClr val="001F44"/>
-                </a:solidFill>
-                <a:latin typeface="Aptos" panose="020B0004020202020204" pitchFamily="34" charset="0"/>
-              </a:rPr>
-              <a:t>Pendiente</a:t>
-            </a:r>
-          </a:p>
-        </p:txBody>
-      </p:sp>
-      <p:sp>
-        <p:nvSpPr>
-          <p:cNvPr id="18" name="CuadroTexto 17">
-            <a:extLst>
-              <a:ext uri="{FF2B5EF4-FFF2-40B4-BE49-F238E27FC236}">
-                <a16:creationId xmlns:a16="http://schemas.microsoft.com/office/drawing/2014/main" id="{F79E0629-25A4-151C-ED16-B7659F3E71A0}"/>
-              </a:ext>
-            </a:extLst>
-          </p:cNvPr>
-          <p:cNvSpPr txBox="1"/>
-          <p:nvPr/>
-        </p:nvSpPr>
-        <p:spPr>
-          <a:xfrm>
-            <a:off x="8661400" y="4826000"/>
-            <a:ext cx="4356100" cy="646331"/>
-          </a:xfrm>
-          <a:prstGeom prst="rect">
-            <a:avLst/>
-          </a:prstGeom>
-          <a:noFill/>
-        </p:spPr>
-        <p:txBody>
-          <a:bodyPr vert="horz" lIns="0" tIns="0" rIns="0" bIns="0" rtlCol="0">
-            <a:spAutoFit/>
-          </a:bodyPr>
-          <a:lstStyle/>
-          <a:p>
-            <a:r>
-              <a:rPr lang="es-ES" sz="1400">
-                <a:solidFill>
-                  <a:srgbClr val="002D5A"/>
-                </a:solidFill>
-                <a:latin typeface="Aptos" panose="020B0004020202020204" pitchFamily="34" charset="0"/>
-              </a:rPr>
-              <a:t>Reordenamiento, actualización y validación de la información publicada con unidades y departamentos responsables.</a:t>
-            </a:r>
-            <a:endParaRPr lang="es-GT" sz="1400">
+            <a:endParaRPr lang="es-GT" sz="1400" dirty="0">
               <a:solidFill>
                 <a:srgbClr val="002D5A"/>
               </a:solidFill>
@@ -8102,6 +7863,36 @@
           </a:p>
         </p:txBody>
       </p:sp>
+      <p:pic>
+        <p:nvPicPr>
+          <p:cNvPr id="9" name="Imagen 8">
+            <a:extLst>
+              <a:ext uri="{FF2B5EF4-FFF2-40B4-BE49-F238E27FC236}">
+                <a16:creationId xmlns:a16="http://schemas.microsoft.com/office/drawing/2014/main" id="{87A7DFDC-A94A-B3FA-A4AD-031A0B23E9B1}"/>
+              </a:ext>
+            </a:extLst>
+          </p:cNvPr>
+          <p:cNvPicPr>
+            <a:picLocks noChangeAspect="1"/>
+          </p:cNvPicPr>
+          <p:nvPr/>
+        </p:nvPicPr>
+        <p:blipFill>
+          <a:blip r:embed="rId3"/>
+          <a:stretch>
+            <a:fillRect/>
+          </a:stretch>
+        </p:blipFill>
+        <p:spPr>
+          <a:xfrm>
+            <a:off x="236643" y="2106424"/>
+            <a:ext cx="7885007" cy="4175341"/>
+          </a:xfrm>
+          <a:prstGeom prst="rect">
+            <a:avLst/>
+          </a:prstGeom>
+        </p:spPr>
+      </p:pic>
     </p:spTree>
     <p:extLst>
       <p:ext uri="{BB962C8B-B14F-4D97-AF65-F5344CB8AC3E}">
@@ -8959,13 +8750,13 @@
           <a:p>
             <a:pPr algn="ctr"/>
             <a:r>
-              <a:rPr lang="es-GT" sz="3000" b="1">
+              <a:rPr lang="es-GT" sz="3000" b="1" dirty="0">
                 <a:solidFill>
                   <a:srgbClr val="001F44"/>
                 </a:solidFill>
                 <a:latin typeface="Aptos" panose="020B0004020202020204" pitchFamily="34" charset="0"/>
               </a:rPr>
-              <a:t>33%</a:t>
+              <a:t>54%</a:t>
             </a:r>
           </a:p>
         </p:txBody>
@@ -9188,7 +8979,7 @@
         <p:spPr>
           <a:xfrm>
             <a:off x="7391400" y="2921000"/>
-            <a:ext cx="3276600" cy="1077218"/>
+            <a:ext cx="3276600" cy="646331"/>
           </a:xfrm>
           <a:prstGeom prst="rect">
             <a:avLst/>
@@ -9202,64 +8993,36 @@
           <a:lstStyle/>
           <a:p>
             <a:r>
-              <a:rPr lang="es-ES" sz="1400">
+              <a:rPr lang="es-ES" sz="1400" dirty="0">
                 <a:solidFill>
                   <a:srgbClr val="002D5A"/>
                 </a:solidFill>
                 <a:latin typeface="Aptos" panose="020B0004020202020204" pitchFamily="34" charset="0"/>
               </a:rPr>
-              <a:t>5 trámites al 83%</a:t>
-            </a:r>
-          </a:p>
-          <a:p>
-            <a:r>
-              <a:rPr lang="es-ES" sz="1400">
+              <a:t>5 trámites al 100%  </a:t>
+            </a:r>
+          </a:p>
+          <a:p>
+            <a:r>
+              <a:rPr lang="es-ES" sz="1400" dirty="0">
                 <a:solidFill>
                   <a:srgbClr val="002D5A"/>
                 </a:solidFill>
                 <a:latin typeface="Aptos" panose="020B0004020202020204" pitchFamily="34" charset="0"/>
               </a:rPr>
-              <a:t>4 trámites al 29%</a:t>
-            </a:r>
-          </a:p>
-          <a:p>
-            <a:r>
-              <a:rPr lang="es-ES" sz="1400">
+              <a:t>8 trámites al 50% </a:t>
+            </a:r>
+          </a:p>
+          <a:p>
+            <a:r>
+              <a:rPr lang="es-ES" sz="1400" dirty="0">
                 <a:solidFill>
                   <a:srgbClr val="002D5A"/>
                 </a:solidFill>
                 <a:latin typeface="Aptos" panose="020B0004020202020204" pitchFamily="34" charset="0"/>
               </a:rPr>
-              <a:t>1 trámite al 14%</a:t>
-            </a:r>
-          </a:p>
-          <a:p>
-            <a:r>
-              <a:rPr lang="es-ES" sz="1400">
-                <a:solidFill>
-                  <a:srgbClr val="002D5A"/>
-                </a:solidFill>
-                <a:latin typeface="Aptos" panose="020B0004020202020204" pitchFamily="34" charset="0"/>
-              </a:rPr>
-              <a:t>3 trámites al 8%</a:t>
-            </a:r>
-          </a:p>
-          <a:p>
-            <a:r>
-              <a:rPr lang="es-ES" sz="1400">
-                <a:solidFill>
-                  <a:srgbClr val="002D5A"/>
-                </a:solidFill>
-                <a:latin typeface="Aptos" panose="020B0004020202020204" pitchFamily="34" charset="0"/>
-              </a:rPr>
-              <a:t>4 trámites al 0%</a:t>
-            </a:r>
-            <a:endParaRPr lang="es-GT" sz="1400">
-              <a:solidFill>
-                <a:srgbClr val="002D5A"/>
-              </a:solidFill>
-              <a:latin typeface="Aptos" panose="020B0004020202020204" pitchFamily="34" charset="0"/>
-            </a:endParaRPr>
+              <a:t>4 trámite al 14%</a:t>
+            </a:r>
           </a:p>
         </p:txBody>
       </p:sp>
@@ -9440,7 +9203,7 @@
         <p:spPr>
           <a:xfrm>
             <a:off x="11709400" y="2921000"/>
-            <a:ext cx="3276600" cy="646331"/>
+            <a:ext cx="3276600" cy="861774"/>
           </a:xfrm>
           <a:prstGeom prst="rect">
             <a:avLst/>
@@ -9454,15 +9217,15 @@
           <a:lstStyle/>
           <a:p>
             <a:r>
-              <a:rPr lang="es-ES" sz="1400">
+              <a:rPr lang="es-ES" sz="1400" dirty="0">
                 <a:solidFill>
                   <a:srgbClr val="002D5A"/>
                 </a:solidFill>
                 <a:latin typeface="Aptos" panose="020B0004020202020204" pitchFamily="34" charset="0"/>
               </a:rPr>
-              <a:t>El primer grupo ya completó análisis, desarrollo, pruebas e implementación; quedan capacitación y lanzamiento.</a:t>
-            </a:r>
-            <a:endParaRPr lang="es-GT" sz="1400">
+              <a:t>El primer grupo ya completó análisis, desarrollo, pruebas, implementación capacitación; preparados para el lanzamiento.</a:t>
+            </a:r>
+            <a:endParaRPr lang="es-GT" sz="1400" dirty="0">
               <a:solidFill>
                 <a:srgbClr val="002D5A"/>
               </a:solidFill>
@@ -9500,13 +9263,13 @@
           <a:lstStyle/>
           <a:p>
             <a:r>
-              <a:rPr lang="es-GT" sz="1500" b="1">
+              <a:rPr lang="es-GT" sz="1500" b="1" dirty="0">
                 <a:solidFill>
                   <a:srgbClr val="001F44"/>
                 </a:solidFill>
                 <a:latin typeface="Aptos" panose="020B0004020202020204" pitchFamily="34" charset="0"/>
               </a:rPr>
-              <a:t>83%</a:t>
+              <a:t>100%</a:t>
             </a:r>
           </a:p>
         </p:txBody>
@@ -9594,7 +9357,7 @@
         <p:spPr>
           <a:xfrm>
             <a:off x="7874000" y="5461000"/>
-            <a:ext cx="4533900" cy="254000"/>
+            <a:ext cx="5461000" cy="230832"/>
           </a:xfrm>
           <a:prstGeom prst="roundRect">
             <a:avLst/>
@@ -9716,13 +9479,13 @@
           <a:lstStyle/>
           <a:p>
             <a:r>
-              <a:rPr lang="es-GT" sz="1500" b="1">
+              <a:rPr lang="es-GT" sz="1500" b="1" dirty="0">
                 <a:solidFill>
                   <a:srgbClr val="001F44"/>
                 </a:solidFill>
                 <a:latin typeface="Aptos" panose="020B0004020202020204" pitchFamily="34" charset="0"/>
               </a:rPr>
-              <a:t>29%</a:t>
+              <a:t>50%</a:t>
             </a:r>
           </a:p>
         </p:txBody>
@@ -9810,7 +9573,7 @@
         <p:spPr>
           <a:xfrm>
             <a:off x="7874000" y="6350000"/>
-            <a:ext cx="1587500" cy="254000"/>
+            <a:ext cx="3048000" cy="254000"/>
           </a:xfrm>
           <a:prstGeom prst="roundRect">
             <a:avLst/>
@@ -9892,13 +9655,13 @@
           <a:lstStyle/>
           <a:p>
             <a:r>
-              <a:rPr lang="es-GT" sz="1400">
+              <a:rPr lang="es-GT" sz="1400" dirty="0">
                 <a:solidFill>
                   <a:srgbClr val="002D5A"/>
                 </a:solidFill>
                 <a:latin typeface="Aptos" panose="020B0004020202020204" pitchFamily="34" charset="0"/>
               </a:rPr>
-              <a:t>4 trámites</a:t>
+              <a:t>8 trámites</a:t>
             </a:r>
           </a:p>
         </p:txBody>
@@ -10108,229 +9871,13 @@
           <a:lstStyle/>
           <a:p>
             <a:r>
-              <a:rPr lang="es-GT" sz="1400">
+              <a:rPr lang="es-GT" sz="1400" dirty="0">
                 <a:solidFill>
                   <a:srgbClr val="002D5A"/>
                 </a:solidFill>
                 <a:latin typeface="Aptos" panose="020B0004020202020204" pitchFamily="34" charset="0"/>
               </a:rPr>
-              <a:t>1 trámites</a:t>
-            </a:r>
-          </a:p>
-        </p:txBody>
-      </p:sp>
-      <p:sp>
-        <p:nvSpPr>
-          <p:cNvPr id="39" name="CuadroTexto 38">
-            <a:extLst>
-              <a:ext uri="{FF2B5EF4-FFF2-40B4-BE49-F238E27FC236}">
-                <a16:creationId xmlns:a16="http://schemas.microsoft.com/office/drawing/2014/main" id="{C127883D-E993-1D12-3665-64D8C6D6DF60}"/>
-              </a:ext>
-            </a:extLst>
-          </p:cNvPr>
-          <p:cNvSpPr txBox="1"/>
-          <p:nvPr/>
-        </p:nvSpPr>
-        <p:spPr>
-          <a:xfrm>
-            <a:off x="7112000" y="8102600"/>
-            <a:ext cx="635000" cy="230832"/>
-          </a:xfrm>
-          <a:prstGeom prst="rect">
-            <a:avLst/>
-          </a:prstGeom>
-          <a:noFill/>
-        </p:spPr>
-        <p:txBody>
-          <a:bodyPr vert="horz" lIns="0" tIns="0" rIns="0" bIns="0" rtlCol="0">
-            <a:spAutoFit/>
-          </a:bodyPr>
-          <a:lstStyle/>
-          <a:p>
-            <a:r>
-              <a:rPr lang="es-GT" sz="1500" b="1">
-                <a:solidFill>
-                  <a:srgbClr val="001F44"/>
-                </a:solidFill>
-                <a:latin typeface="Aptos" panose="020B0004020202020204" pitchFamily="34" charset="0"/>
-              </a:rPr>
-              <a:t>8%</a:t>
-            </a:r>
-          </a:p>
-        </p:txBody>
-      </p:sp>
-      <p:sp>
-        <p:nvSpPr>
-          <p:cNvPr id="40" name="Rectángulo: esquinas redondeadas 39">
-            <a:extLst>
-              <a:ext uri="{FF2B5EF4-FFF2-40B4-BE49-F238E27FC236}">
-                <a16:creationId xmlns:a16="http://schemas.microsoft.com/office/drawing/2014/main" id="{44A88DD5-6E01-9AFB-4428-5C7BF2D96A8F}"/>
-              </a:ext>
-            </a:extLst>
-          </p:cNvPr>
-          <p:cNvSpPr/>
-          <p:nvPr/>
-        </p:nvSpPr>
-        <p:spPr>
-          <a:xfrm>
-            <a:off x="7874000" y="8128000"/>
-            <a:ext cx="5461000" cy="254000"/>
-          </a:xfrm>
-          <a:prstGeom prst="roundRect">
-            <a:avLst/>
-          </a:prstGeom>
-          <a:solidFill>
-            <a:srgbClr val="E4EDF6"/>
-          </a:solidFill>
-          <a:ln w="19050" cap="flat" cmpd="sng" algn="ctr">
-            <a:noFill/>
-            <a:prstDash val="solid"/>
-            <a:miter lim="800000"/>
-          </a:ln>
-          <a:effectLst/>
-          <a:extLst>
-            <a:ext uri="{91240B29-F687-4F45-9708-019B960494DF}">
-              <a14:hiddenLine xmlns:a14="http://schemas.microsoft.com/office/drawing/2010/main" w="19050" cap="flat" cmpd="sng" algn="ctr">
-                <a:solidFill>
-                  <a:schemeClr val="accent1">
-                    <a:shade val="15000"/>
-                  </a:schemeClr>
-                </a:solidFill>
-                <a:prstDash val="solid"/>
-                <a:miter lim="800000"/>
-              </a14:hiddenLine>
-            </a:ext>
-          </a:extLst>
-        </p:spPr>
-        <p:style>
-          <a:lnRef idx="2">
-            <a:schemeClr val="accent1">
-              <a:shade val="15000"/>
-            </a:schemeClr>
-          </a:lnRef>
-          <a:fillRef idx="1">
-            <a:schemeClr val="accent1"/>
-          </a:fillRef>
-          <a:effectRef idx="0">
-            <a:schemeClr val="accent1"/>
-          </a:effectRef>
-          <a:fontRef idx="minor">
-            <a:schemeClr val="lt1"/>
-          </a:fontRef>
-        </p:style>
-        <p:txBody>
-          <a:bodyPr rtlCol="0" anchor="ctr"/>
-          <a:lstStyle/>
-          <a:p>
-            <a:pPr algn="ctr"/>
-            <a:endParaRPr lang="es-GT"/>
-          </a:p>
-        </p:txBody>
-      </p:sp>
-      <p:sp>
-        <p:nvSpPr>
-          <p:cNvPr id="41" name="Rectángulo: esquinas redondeadas 40">
-            <a:extLst>
-              <a:ext uri="{FF2B5EF4-FFF2-40B4-BE49-F238E27FC236}">
-                <a16:creationId xmlns:a16="http://schemas.microsoft.com/office/drawing/2014/main" id="{A728C620-6910-6855-B26A-82AD6A7DA2AC}"/>
-              </a:ext>
-            </a:extLst>
-          </p:cNvPr>
-          <p:cNvSpPr/>
-          <p:nvPr/>
-        </p:nvSpPr>
-        <p:spPr>
-          <a:xfrm>
-            <a:off x="7874000" y="8128000"/>
-            <a:ext cx="431800" cy="254000"/>
-          </a:xfrm>
-          <a:prstGeom prst="roundRect">
-            <a:avLst/>
-          </a:prstGeom>
-          <a:solidFill>
-            <a:srgbClr val="EB7D00"/>
-          </a:solidFill>
-          <a:ln w="19050" cap="flat" cmpd="sng" algn="ctr">
-            <a:noFill/>
-            <a:prstDash val="solid"/>
-            <a:miter lim="800000"/>
-          </a:ln>
-          <a:effectLst/>
-          <a:extLst>
-            <a:ext uri="{91240B29-F687-4F45-9708-019B960494DF}">
-              <a14:hiddenLine xmlns:a14="http://schemas.microsoft.com/office/drawing/2010/main" w="19050" cap="flat" cmpd="sng" algn="ctr">
-                <a:solidFill>
-                  <a:schemeClr val="accent1">
-                    <a:shade val="15000"/>
-                  </a:schemeClr>
-                </a:solidFill>
-                <a:prstDash val="solid"/>
-                <a:miter lim="800000"/>
-              </a14:hiddenLine>
-            </a:ext>
-          </a:extLst>
-        </p:spPr>
-        <p:style>
-          <a:lnRef idx="2">
-            <a:schemeClr val="accent1">
-              <a:shade val="15000"/>
-            </a:schemeClr>
-          </a:lnRef>
-          <a:fillRef idx="1">
-            <a:schemeClr val="accent1"/>
-          </a:fillRef>
-          <a:effectRef idx="0">
-            <a:schemeClr val="accent1"/>
-          </a:effectRef>
-          <a:fontRef idx="minor">
-            <a:schemeClr val="lt1"/>
-          </a:fontRef>
-        </p:style>
-        <p:txBody>
-          <a:bodyPr rtlCol="0" anchor="ctr"/>
-          <a:lstStyle/>
-          <a:p>
-            <a:pPr algn="ctr"/>
-            <a:endParaRPr lang="es-GT"/>
-          </a:p>
-        </p:txBody>
-      </p:sp>
-      <p:sp>
-        <p:nvSpPr>
-          <p:cNvPr id="42" name="CuadroTexto 41">
-            <a:extLst>
-              <a:ext uri="{FF2B5EF4-FFF2-40B4-BE49-F238E27FC236}">
-                <a16:creationId xmlns:a16="http://schemas.microsoft.com/office/drawing/2014/main" id="{3F0C69E1-8582-83BF-3276-6C5B4E45D3B9}"/>
-              </a:ext>
-            </a:extLst>
-          </p:cNvPr>
-          <p:cNvSpPr txBox="1"/>
-          <p:nvPr/>
-        </p:nvSpPr>
-        <p:spPr>
-          <a:xfrm>
-            <a:off x="13589000" y="8102600"/>
-            <a:ext cx="1270000" cy="215444"/>
-          </a:xfrm>
-          <a:prstGeom prst="rect">
-            <a:avLst/>
-          </a:prstGeom>
-          <a:noFill/>
-        </p:spPr>
-        <p:txBody>
-          <a:bodyPr vert="horz" lIns="0" tIns="0" rIns="0" bIns="0" rtlCol="0">
-            <a:spAutoFit/>
-          </a:bodyPr>
-          <a:lstStyle/>
-          <a:p>
-            <a:r>
-              <a:rPr lang="es-GT" sz="1400">
-                <a:solidFill>
-                  <a:srgbClr val="002D5A"/>
-                </a:solidFill>
-                <a:latin typeface="Aptos" panose="020B0004020202020204" pitchFamily="34" charset="0"/>
-              </a:rPr>
-              <a:t>3 trámites</a:t>
+              <a:t>4 trámites</a:t>
             </a:r>
           </a:p>
         </p:txBody>
@@ -10755,7 +10302,7 @@
           <p:cNvPr id="2" name="Rectángulo 1">
             <a:extLst>
               <a:ext uri="{FF2B5EF4-FFF2-40B4-BE49-F238E27FC236}">
-                <a16:creationId xmlns:a16="http://schemas.microsoft.com/office/drawing/2014/main" id="{1753EE6A-0C57-258A-B02F-BCD4D98B4320}"/>
+                <a16:creationId xmlns:a16="http://schemas.microsoft.com/office/drawing/2014/main" id="{6118D6DF-8B46-39A8-4EC4-C06CBCA1765F}"/>
               </a:ext>
             </a:extLst>
           </p:cNvPr>
@@ -10823,7 +10370,7 @@
           <p:cNvPr id="4" name="Imagen 3">
             <a:extLst>
               <a:ext uri="{FF2B5EF4-FFF2-40B4-BE49-F238E27FC236}">
-                <a16:creationId xmlns:a16="http://schemas.microsoft.com/office/drawing/2014/main" id="{E80E242A-2290-9CB8-C177-197717E3D303}"/>
+                <a16:creationId xmlns:a16="http://schemas.microsoft.com/office/drawing/2014/main" id="{7A5B7740-510F-F885-FBF9-1BDD0D8324DC}"/>
               </a:ext>
             </a:extLst>
           </p:cNvPr>
@@ -10859,7 +10406,7 @@
           <p:cNvPr id="5" name="CuadroTexto 4">
             <a:extLst>
               <a:ext uri="{FF2B5EF4-FFF2-40B4-BE49-F238E27FC236}">
-                <a16:creationId xmlns:a16="http://schemas.microsoft.com/office/drawing/2014/main" id="{54659114-9E44-D376-560A-AFA921BC7998}"/>
+                <a16:creationId xmlns:a16="http://schemas.microsoft.com/office/drawing/2014/main" id="{7ED22369-F739-2280-5176-BC9E40ED0B3B}"/>
               </a:ext>
             </a:extLst>
           </p:cNvPr>
@@ -10889,7 +10436,7 @@
                 </a:solidFill>
                 <a:latin typeface="Aptos" panose="020B0004020202020204" pitchFamily="34" charset="0"/>
               </a:rPr>
-              <a:t>TRÁMITES CON MAYOR AVANCE</a:t>
+              <a:t>TRÁMITES EN ANÁLISIS</a:t>
             </a:r>
           </a:p>
         </p:txBody>
@@ -10899,7 +10446,7 @@
           <p:cNvPr id="6" name="Rectángulo 5">
             <a:extLst>
               <a:ext uri="{FF2B5EF4-FFF2-40B4-BE49-F238E27FC236}">
-                <a16:creationId xmlns:a16="http://schemas.microsoft.com/office/drawing/2014/main" id="{D0FB0BE4-DEBE-FE99-86E4-342B4D03D3CF}"/>
+                <a16:creationId xmlns:a16="http://schemas.microsoft.com/office/drawing/2014/main" id="{B197FD60-5E14-B5FE-B10A-74A21C14DEA5}"/>
               </a:ext>
             </a:extLst>
           </p:cNvPr>
@@ -10967,7 +10514,7 @@
           <p:cNvPr id="7" name="Rectángulo 6">
             <a:extLst>
               <a:ext uri="{FF2B5EF4-FFF2-40B4-BE49-F238E27FC236}">
-                <a16:creationId xmlns:a16="http://schemas.microsoft.com/office/drawing/2014/main" id="{C93DDED1-9CDF-5CF1-F427-41512A89B4B2}"/>
+                <a16:creationId xmlns:a16="http://schemas.microsoft.com/office/drawing/2014/main" id="{18D422FD-7F8E-065C-635F-F70853EA540D}"/>
               </a:ext>
             </a:extLst>
           </p:cNvPr>
@@ -11035,7 +10582,7 @@
           <p:cNvPr id="8" name="CuadroTexto 7">
             <a:extLst>
               <a:ext uri="{FF2B5EF4-FFF2-40B4-BE49-F238E27FC236}">
-                <a16:creationId xmlns:a16="http://schemas.microsoft.com/office/drawing/2014/main" id="{B471A2FD-0B14-18D4-8DBC-B84918AF5E14}"/>
+                <a16:creationId xmlns:a16="http://schemas.microsoft.com/office/drawing/2014/main" id="{05DBF217-6889-6C3A-EFAA-389EB082B844}"/>
               </a:ext>
             </a:extLst>
           </p:cNvPr>
@@ -11060,7 +10607,7 @@
           <a:p>
             <a:pPr algn="ctr"/>
             <a:r>
-              <a:rPr lang="es-GT" sz="1600" b="1">
+              <a:rPr lang="es-GT" sz="1600" b="1" dirty="0">
                 <a:solidFill>
                   <a:srgbClr val="FFFFFF"/>
                 </a:solidFill>
@@ -11076,7 +10623,7 @@
           <p:cNvPr id="9" name="Rectángulo: esquinas redondeadas 8">
             <a:extLst>
               <a:ext uri="{FF2B5EF4-FFF2-40B4-BE49-F238E27FC236}">
-                <a16:creationId xmlns:a16="http://schemas.microsoft.com/office/drawing/2014/main" id="{C78006CA-7403-8102-6E0F-355B4CD7A121}"/>
+                <a16:creationId xmlns:a16="http://schemas.microsoft.com/office/drawing/2014/main" id="{DA57646B-7544-AC58-7B7F-93C9C26CAA68}"/>
               </a:ext>
             </a:extLst>
           </p:cNvPr>
@@ -11086,13 +10633,13 @@
         <p:spPr>
           <a:xfrm>
             <a:off x="1016000" y="2095500"/>
-            <a:ext cx="2921000" cy="381000"/>
+            <a:ext cx="2032000" cy="381000"/>
           </a:xfrm>
           <a:prstGeom prst="roundRect">
             <a:avLst/>
           </a:prstGeom>
           <a:solidFill>
-            <a:srgbClr val="34A853"/>
+            <a:srgbClr val="EB7D00"/>
           </a:solidFill>
           <a:ln w="19050" cap="flat" cmpd="sng" algn="ctr">
             <a:noFill/>
@@ -11144,7 +10691,7 @@
           <p:cNvPr id="10" name="CuadroTexto 9">
             <a:extLst>
               <a:ext uri="{FF2B5EF4-FFF2-40B4-BE49-F238E27FC236}">
-                <a16:creationId xmlns:a16="http://schemas.microsoft.com/office/drawing/2014/main" id="{A928F894-BFAB-CC2D-0562-733723A2A775}"/>
+                <a16:creationId xmlns:a16="http://schemas.microsoft.com/office/drawing/2014/main" id="{C47C5792-9AF1-E511-6C62-27B92B6B3B3B}"/>
               </a:ext>
             </a:extLst>
           </p:cNvPr>
@@ -11154,7 +10701,7 @@
         <p:spPr>
           <a:xfrm>
             <a:off x="1117600" y="2184400"/>
-            <a:ext cx="2717800" cy="169277"/>
+            <a:ext cx="1828800" cy="169277"/>
           </a:xfrm>
           <a:prstGeom prst="rect">
             <a:avLst/>
@@ -11169,13 +10716,13 @@
           <a:p>
             <a:pPr algn="ctr"/>
             <a:r>
-              <a:rPr lang="es-GT" sz="1100" b="1">
+              <a:rPr lang="es-GT" sz="1100" b="1" dirty="0">
                 <a:solidFill>
                   <a:srgbClr val="FFFFFF"/>
                 </a:solidFill>
                 <a:latin typeface="Aptos" panose="020B0004020202020204" pitchFamily="34" charset="0"/>
               </a:rPr>
-              <a:t>83% DE AVANCE ACUMULADO</a:t>
+              <a:t>14%  DE AVANCE</a:t>
             </a:r>
           </a:p>
         </p:txBody>
@@ -11185,7 +10732,7 @@
           <p:cNvPr id="11" name="Rectángulo: esquinas redondeadas 10">
             <a:extLst>
               <a:ext uri="{FF2B5EF4-FFF2-40B4-BE49-F238E27FC236}">
-                <a16:creationId xmlns:a16="http://schemas.microsoft.com/office/drawing/2014/main" id="{718850EE-C23D-89E4-0B8C-006E7BCD44F8}"/>
+                <a16:creationId xmlns:a16="http://schemas.microsoft.com/office/drawing/2014/main" id="{C50F484C-ED3D-72A1-3754-FF264C31A997}"/>
               </a:ext>
             </a:extLst>
           </p:cNvPr>
@@ -11194,7 +10741,7 @@
         </p:nvSpPr>
         <p:spPr>
           <a:xfrm>
-            <a:off x="1143000" y="3175000"/>
+            <a:off x="1117600" y="3175000"/>
             <a:ext cx="2159000" cy="2159000"/>
           </a:xfrm>
           <a:prstGeom prst="roundRect">
@@ -11239,7 +10786,7 @@
           <p:cNvPr id="12" name="Elipse 11">
             <a:extLst>
               <a:ext uri="{FF2B5EF4-FFF2-40B4-BE49-F238E27FC236}">
-                <a16:creationId xmlns:a16="http://schemas.microsoft.com/office/drawing/2014/main" id="{88B72342-6BC7-0CDA-FB07-EA28C4BA4B4A}"/>
+                <a16:creationId xmlns:a16="http://schemas.microsoft.com/office/drawing/2014/main" id="{D85299EE-4DB6-CA7C-37B9-9001D2D51D86}"/>
               </a:ext>
             </a:extLst>
           </p:cNvPr>
@@ -11248,14 +10795,14 @@
         </p:nvSpPr>
         <p:spPr>
           <a:xfrm>
-            <a:off x="1422400" y="3454400"/>
+            <a:off x="1397000" y="3454400"/>
             <a:ext cx="1600200" cy="1600200"/>
           </a:xfrm>
           <a:prstGeom prst="ellipse">
             <a:avLst/>
           </a:prstGeom>
           <a:solidFill>
-            <a:srgbClr val="34A853"/>
+            <a:srgbClr val="EB7D00"/>
           </a:solidFill>
           <a:ln w="19050" cap="flat" cmpd="sng" algn="ctr">
             <a:noFill/>
@@ -11307,7 +10854,7 @@
           <p:cNvPr id="13" name="Elipse 12">
             <a:extLst>
               <a:ext uri="{FF2B5EF4-FFF2-40B4-BE49-F238E27FC236}">
-                <a16:creationId xmlns:a16="http://schemas.microsoft.com/office/drawing/2014/main" id="{1965DCF6-DB62-160F-74EB-8A557D58B27A}"/>
+                <a16:creationId xmlns:a16="http://schemas.microsoft.com/office/drawing/2014/main" id="{A548A331-62EE-F731-3CF0-4127C3DE79DF}"/>
               </a:ext>
             </a:extLst>
           </p:cNvPr>
@@ -11316,7 +10863,7 @@
         </p:nvSpPr>
         <p:spPr>
           <a:xfrm>
-            <a:off x="1701800" y="3733800"/>
+            <a:off x="1676400" y="3733800"/>
             <a:ext cx="1041400" cy="1041400"/>
           </a:xfrm>
           <a:prstGeom prst="ellipse">
@@ -11375,7 +10922,7 @@
           <p:cNvPr id="14" name="CuadroTexto 13">
             <a:extLst>
               <a:ext uri="{FF2B5EF4-FFF2-40B4-BE49-F238E27FC236}">
-                <a16:creationId xmlns:a16="http://schemas.microsoft.com/office/drawing/2014/main" id="{BACC2D2D-03E2-9454-429E-A01E350EA7FF}"/>
+                <a16:creationId xmlns:a16="http://schemas.microsoft.com/office/drawing/2014/main" id="{4F1FD0DD-E87A-C00C-ACB1-E9288682A687}"/>
               </a:ext>
             </a:extLst>
           </p:cNvPr>
@@ -11384,7 +10931,7 @@
         </p:nvSpPr>
         <p:spPr>
           <a:xfrm>
-            <a:off x="1524000" y="3835400"/>
+            <a:off x="1498600" y="3835400"/>
             <a:ext cx="1397000" cy="461665"/>
           </a:xfrm>
           <a:prstGeom prst="rect">
@@ -11400,13 +10947,13 @@
           <a:p>
             <a:pPr algn="ctr"/>
             <a:r>
-              <a:rPr lang="es-GT" sz="3000" b="1">
+              <a:rPr lang="es-GT" sz="3000" b="1" dirty="0">
                 <a:solidFill>
                   <a:srgbClr val="001F44"/>
                 </a:solidFill>
                 <a:latin typeface="Aptos" panose="020B0004020202020204" pitchFamily="34" charset="0"/>
               </a:rPr>
-              <a:t>5</a:t>
+              <a:t>4</a:t>
             </a:r>
           </a:p>
         </p:txBody>
@@ -11416,7 +10963,7 @@
           <p:cNvPr id="15" name="CuadroTexto 14">
             <a:extLst>
               <a:ext uri="{FF2B5EF4-FFF2-40B4-BE49-F238E27FC236}">
-                <a16:creationId xmlns:a16="http://schemas.microsoft.com/office/drawing/2014/main" id="{C12F0FA4-FE44-46C3-7BA4-A573CFA327C1}"/>
+                <a16:creationId xmlns:a16="http://schemas.microsoft.com/office/drawing/2014/main" id="{173170F5-A2C4-271B-9EC7-89DCF4FABF99}"/>
               </a:ext>
             </a:extLst>
           </p:cNvPr>
@@ -11425,7 +10972,7 @@
         </p:nvSpPr>
         <p:spPr>
           <a:xfrm>
-            <a:off x="1460500" y="4445000"/>
+            <a:off x="1435100" y="4445000"/>
             <a:ext cx="1524000" cy="184666"/>
           </a:xfrm>
           <a:prstGeom prst="rect">
@@ -11457,7 +11004,7 @@
           <p:cNvPr id="16" name="Rectángulo: esquinas redondeadas 15">
             <a:extLst>
               <a:ext uri="{FF2B5EF4-FFF2-40B4-BE49-F238E27FC236}">
-                <a16:creationId xmlns:a16="http://schemas.microsoft.com/office/drawing/2014/main" id="{2C8D1785-6573-5916-1CD8-27390B5E147B}"/>
+                <a16:creationId xmlns:a16="http://schemas.microsoft.com/office/drawing/2014/main" id="{8987C367-66FC-B56C-2A54-60D4F10480AD}"/>
               </a:ext>
             </a:extLst>
           </p:cNvPr>
@@ -11466,8 +11013,8 @@
         </p:nvSpPr>
         <p:spPr>
           <a:xfrm>
-            <a:off x="4826000" y="2349500"/>
-            <a:ext cx="8890000" cy="635000"/>
+            <a:off x="4826000" y="2794000"/>
+            <a:ext cx="9398000" cy="711200"/>
           </a:xfrm>
           <a:prstGeom prst="roundRect">
             <a:avLst/>
@@ -11511,7 +11058,7 @@
           <p:cNvPr id="17" name="Rectángulo: esquinas redondeadas 16">
             <a:extLst>
               <a:ext uri="{FF2B5EF4-FFF2-40B4-BE49-F238E27FC236}">
-                <a16:creationId xmlns:a16="http://schemas.microsoft.com/office/drawing/2014/main" id="{06742A57-2C92-B6EC-4C9B-A611FC0248BC}"/>
+                <a16:creationId xmlns:a16="http://schemas.microsoft.com/office/drawing/2014/main" id="{F76ABDD1-B931-BDB7-6041-6CE24D3565B3}"/>
               </a:ext>
             </a:extLst>
           </p:cNvPr>
@@ -11520,14 +11067,14 @@
         </p:nvSpPr>
         <p:spPr>
           <a:xfrm>
-            <a:off x="4953000" y="2438400"/>
+            <a:off x="4953000" y="2882900"/>
             <a:ext cx="381000" cy="381000"/>
           </a:xfrm>
           <a:prstGeom prst="roundRect">
             <a:avLst/>
           </a:prstGeom>
           <a:solidFill>
-            <a:srgbClr val="34A853"/>
+            <a:srgbClr val="EB7D00"/>
           </a:solidFill>
           <a:ln w="19050" cap="flat" cmpd="sng" algn="ctr">
             <a:noFill/>
@@ -11579,7 +11126,7 @@
           <p:cNvPr id="18" name="CuadroTexto 17">
             <a:extLst>
               <a:ext uri="{FF2B5EF4-FFF2-40B4-BE49-F238E27FC236}">
-                <a16:creationId xmlns:a16="http://schemas.microsoft.com/office/drawing/2014/main" id="{ED22A1D9-147D-AF0D-9797-8127249FBDB2}"/>
+                <a16:creationId xmlns:a16="http://schemas.microsoft.com/office/drawing/2014/main" id="{887495D7-7D5F-3AD4-3704-B199D4E68C19}"/>
               </a:ext>
             </a:extLst>
           </p:cNvPr>
@@ -11588,7 +11135,7 @@
         </p:nvSpPr>
         <p:spPr>
           <a:xfrm>
-            <a:off x="5029200" y="2501900"/>
+            <a:off x="5029200" y="2946400"/>
             <a:ext cx="228600" cy="169277"/>
           </a:xfrm>
           <a:prstGeom prst="rect">
@@ -11610,7 +11157,7 @@
                 </a:solidFill>
                 <a:latin typeface="Aptos" panose="020B0004020202020204" pitchFamily="34" charset="0"/>
               </a:rPr>
-              <a:t>1</a:t>
+              <a:t>11</a:t>
             </a:r>
           </a:p>
         </p:txBody>
@@ -11620,7 +11167,7 @@
           <p:cNvPr id="19" name="CuadroTexto 18">
             <a:extLst>
               <a:ext uri="{FF2B5EF4-FFF2-40B4-BE49-F238E27FC236}">
-                <a16:creationId xmlns:a16="http://schemas.microsoft.com/office/drawing/2014/main" id="{13ADB364-BA2D-B94C-C73A-0CF240BC89E2}"/>
+                <a16:creationId xmlns:a16="http://schemas.microsoft.com/office/drawing/2014/main" id="{D8897177-01BF-63E2-137C-9F0F69F5AE37}"/>
               </a:ext>
             </a:extLst>
           </p:cNvPr>
@@ -11629,8 +11176,8 @@
         </p:nvSpPr>
         <p:spPr>
           <a:xfrm>
-            <a:off x="5511800" y="2438400"/>
-            <a:ext cx="8051800" cy="184666"/>
+            <a:off x="5511800" y="2882900"/>
+            <a:ext cx="8559800" cy="184666"/>
           </a:xfrm>
           <a:prstGeom prst="rect">
             <a:avLst/>
@@ -11644,14 +11191,20 @@
           <a:lstStyle/>
           <a:p>
             <a:r>
-              <a:rPr lang="es-GT" sz="1200">
+              <a:rPr lang="es-ES" sz="1200">
                 <a:solidFill>
                   <a:srgbClr val="002D5A"/>
                 </a:solidFill>
                 <a:latin typeface="Aptos" panose="020B0004020202020204" pitchFamily="34" charset="0"/>
               </a:rPr>
-              <a:t>Reserva, prórroga o cesión de matrícula</a:t>
-            </a:r>
+              <a:t>Autorización de Altura Máxima Permisible</a:t>
+            </a:r>
+            <a:endParaRPr lang="es-GT" sz="1200">
+              <a:solidFill>
+                <a:srgbClr val="002D5A"/>
+              </a:solidFill>
+              <a:latin typeface="Aptos" panose="020B0004020202020204" pitchFamily="34" charset="0"/>
+            </a:endParaRPr>
           </a:p>
         </p:txBody>
       </p:sp>
@@ -11660,7 +11213,7 @@
           <p:cNvPr id="20" name="Rectángulo: esquinas redondeadas 19">
             <a:extLst>
               <a:ext uri="{FF2B5EF4-FFF2-40B4-BE49-F238E27FC236}">
-                <a16:creationId xmlns:a16="http://schemas.microsoft.com/office/drawing/2014/main" id="{8F367CDE-88D8-17FD-6655-935B66164F44}"/>
+                <a16:creationId xmlns:a16="http://schemas.microsoft.com/office/drawing/2014/main" id="{A33E449E-6F87-ED2D-AC7A-AD453AF62FE9}"/>
               </a:ext>
             </a:extLst>
           </p:cNvPr>
@@ -11669,8 +11222,8 @@
         </p:nvSpPr>
         <p:spPr>
           <a:xfrm>
-            <a:off x="4826000" y="3060700"/>
-            <a:ext cx="8890000" cy="635000"/>
+            <a:off x="4826000" y="3581400"/>
+            <a:ext cx="9398000" cy="711200"/>
           </a:xfrm>
           <a:prstGeom prst="roundRect">
             <a:avLst/>
@@ -11714,7 +11267,7 @@
           <p:cNvPr id="21" name="Rectángulo: esquinas redondeadas 20">
             <a:extLst>
               <a:ext uri="{FF2B5EF4-FFF2-40B4-BE49-F238E27FC236}">
-                <a16:creationId xmlns:a16="http://schemas.microsoft.com/office/drawing/2014/main" id="{945D6453-677D-1907-5C21-68AE10540B68}"/>
+                <a16:creationId xmlns:a16="http://schemas.microsoft.com/office/drawing/2014/main" id="{9B861EC1-281B-7FE6-349A-F68B8E8C6C09}"/>
               </a:ext>
             </a:extLst>
           </p:cNvPr>
@@ -11723,14 +11276,14 @@
         </p:nvSpPr>
         <p:spPr>
           <a:xfrm>
-            <a:off x="4953000" y="3149600"/>
+            <a:off x="4953000" y="3670300"/>
             <a:ext cx="381000" cy="381000"/>
           </a:xfrm>
           <a:prstGeom prst="roundRect">
             <a:avLst/>
           </a:prstGeom>
           <a:solidFill>
-            <a:srgbClr val="34A853"/>
+            <a:srgbClr val="EB7D00"/>
           </a:solidFill>
           <a:ln w="19050" cap="flat" cmpd="sng" algn="ctr">
             <a:noFill/>
@@ -11782,7 +11335,7 @@
           <p:cNvPr id="22" name="CuadroTexto 21">
             <a:extLst>
               <a:ext uri="{FF2B5EF4-FFF2-40B4-BE49-F238E27FC236}">
-                <a16:creationId xmlns:a16="http://schemas.microsoft.com/office/drawing/2014/main" id="{E8CD330D-66BC-A091-7873-1F6DE67575EB}"/>
+                <a16:creationId xmlns:a16="http://schemas.microsoft.com/office/drawing/2014/main" id="{1812A334-8E04-4550-6A64-B562699668CA}"/>
               </a:ext>
             </a:extLst>
           </p:cNvPr>
@@ -11791,7 +11344,7 @@
         </p:nvSpPr>
         <p:spPr>
           <a:xfrm>
-            <a:off x="5029200" y="3213100"/>
+            <a:off x="5029200" y="3733800"/>
             <a:ext cx="228600" cy="169277"/>
           </a:xfrm>
           <a:prstGeom prst="rect">
@@ -11813,7 +11366,7 @@
                 </a:solidFill>
                 <a:latin typeface="Aptos" panose="020B0004020202020204" pitchFamily="34" charset="0"/>
               </a:rPr>
-              <a:t>2</a:t>
+              <a:t>12</a:t>
             </a:r>
           </a:p>
         </p:txBody>
@@ -11823,7 +11376,7 @@
           <p:cNvPr id="23" name="CuadroTexto 22">
             <a:extLst>
               <a:ext uri="{FF2B5EF4-FFF2-40B4-BE49-F238E27FC236}">
-                <a16:creationId xmlns:a16="http://schemas.microsoft.com/office/drawing/2014/main" id="{48029598-65A0-F0B4-5FB1-5628AFC02842}"/>
+                <a16:creationId xmlns:a16="http://schemas.microsoft.com/office/drawing/2014/main" id="{1726ACDB-A4C6-5609-1B98-FEB1D243EC00}"/>
               </a:ext>
             </a:extLst>
           </p:cNvPr>
@@ -11832,8 +11385,8 @@
         </p:nvSpPr>
         <p:spPr>
           <a:xfrm>
-            <a:off x="5511800" y="3149600"/>
-            <a:ext cx="8051800" cy="184666"/>
+            <a:off x="5511800" y="3670300"/>
+            <a:ext cx="8559800" cy="184666"/>
           </a:xfrm>
           <a:prstGeom prst="rect">
             <a:avLst/>
@@ -11847,14 +11400,20 @@
           <a:lstStyle/>
           <a:p>
             <a:r>
-              <a:rPr lang="es-GT" sz="1200">
+              <a:rPr lang="es-ES" sz="1200">
                 <a:solidFill>
                   <a:srgbClr val="002D5A"/>
                 </a:solidFill>
                 <a:latin typeface="Aptos" panose="020B0004020202020204" pitchFamily="34" charset="0"/>
               </a:rPr>
-              <a:t>Reserva de Distintivo</a:t>
-            </a:r>
+              <a:t>Construcción/Operación/Modificación de Pista</a:t>
+            </a:r>
+            <a:endParaRPr lang="es-GT" sz="1200">
+              <a:solidFill>
+                <a:srgbClr val="002D5A"/>
+              </a:solidFill>
+              <a:latin typeface="Aptos" panose="020B0004020202020204" pitchFamily="34" charset="0"/>
+            </a:endParaRPr>
           </a:p>
         </p:txBody>
       </p:sp>
@@ -11863,7 +11422,7 @@
           <p:cNvPr id="24" name="Rectángulo: esquinas redondeadas 23">
             <a:extLst>
               <a:ext uri="{FF2B5EF4-FFF2-40B4-BE49-F238E27FC236}">
-                <a16:creationId xmlns:a16="http://schemas.microsoft.com/office/drawing/2014/main" id="{A3AE2709-8531-A073-2A7B-76444D916C2E}"/>
+                <a16:creationId xmlns:a16="http://schemas.microsoft.com/office/drawing/2014/main" id="{2300EADB-D83D-1716-7159-5D7CB5B3B0E4}"/>
               </a:ext>
             </a:extLst>
           </p:cNvPr>
@@ -11872,8 +11431,8 @@
         </p:nvSpPr>
         <p:spPr>
           <a:xfrm>
-            <a:off x="4826000" y="3771900"/>
-            <a:ext cx="8890000" cy="635000"/>
+            <a:off x="4826000" y="4368800"/>
+            <a:ext cx="9398000" cy="711200"/>
           </a:xfrm>
           <a:prstGeom prst="roundRect">
             <a:avLst/>
@@ -11917,7 +11476,7 @@
           <p:cNvPr id="25" name="Rectángulo: esquinas redondeadas 24">
             <a:extLst>
               <a:ext uri="{FF2B5EF4-FFF2-40B4-BE49-F238E27FC236}">
-                <a16:creationId xmlns:a16="http://schemas.microsoft.com/office/drawing/2014/main" id="{8BB4AA5B-2166-E479-4BD9-ED282E01DF9E}"/>
+                <a16:creationId xmlns:a16="http://schemas.microsoft.com/office/drawing/2014/main" id="{F9B3766C-2294-CE3E-CE92-3ED34ABF1255}"/>
               </a:ext>
             </a:extLst>
           </p:cNvPr>
@@ -11926,14 +11485,14 @@
         </p:nvSpPr>
         <p:spPr>
           <a:xfrm>
-            <a:off x="4953000" y="3860800"/>
+            <a:off x="4953000" y="4457700"/>
             <a:ext cx="381000" cy="381000"/>
           </a:xfrm>
           <a:prstGeom prst="roundRect">
             <a:avLst/>
           </a:prstGeom>
           <a:solidFill>
-            <a:srgbClr val="34A853"/>
+            <a:srgbClr val="EB7D00"/>
           </a:solidFill>
           <a:ln w="19050" cap="flat" cmpd="sng" algn="ctr">
             <a:noFill/>
@@ -11985,7 +11544,7 @@
           <p:cNvPr id="26" name="CuadroTexto 25">
             <a:extLst>
               <a:ext uri="{FF2B5EF4-FFF2-40B4-BE49-F238E27FC236}">
-                <a16:creationId xmlns:a16="http://schemas.microsoft.com/office/drawing/2014/main" id="{26B08019-0FB6-5C8E-5018-81534716DD4C}"/>
+                <a16:creationId xmlns:a16="http://schemas.microsoft.com/office/drawing/2014/main" id="{EB99F3FD-10F3-7744-9623-F7CD53616B48}"/>
               </a:ext>
             </a:extLst>
           </p:cNvPr>
@@ -11994,7 +11553,7 @@
         </p:nvSpPr>
         <p:spPr>
           <a:xfrm>
-            <a:off x="5029200" y="3924300"/>
+            <a:off x="5029200" y="4521200"/>
             <a:ext cx="228600" cy="169277"/>
           </a:xfrm>
           <a:prstGeom prst="rect">
@@ -12016,7 +11575,7 @@
                 </a:solidFill>
                 <a:latin typeface="Aptos" panose="020B0004020202020204" pitchFamily="34" charset="0"/>
               </a:rPr>
-              <a:t>3</a:t>
+              <a:t>13</a:t>
             </a:r>
           </a:p>
         </p:txBody>
@@ -12026,7 +11585,7 @@
           <p:cNvPr id="27" name="CuadroTexto 26">
             <a:extLst>
               <a:ext uri="{FF2B5EF4-FFF2-40B4-BE49-F238E27FC236}">
-                <a16:creationId xmlns:a16="http://schemas.microsoft.com/office/drawing/2014/main" id="{98862E4E-C3B0-E8CF-E13E-8325E8DA99FE}"/>
+                <a16:creationId xmlns:a16="http://schemas.microsoft.com/office/drawing/2014/main" id="{FC637689-891E-FD5F-64B1-182256951D85}"/>
               </a:ext>
             </a:extLst>
           </p:cNvPr>
@@ -12035,8 +11594,8 @@
         </p:nvSpPr>
         <p:spPr>
           <a:xfrm>
-            <a:off x="5511800" y="3860800"/>
-            <a:ext cx="8051800" cy="184666"/>
+            <a:off x="5511800" y="4457700"/>
+            <a:ext cx="8559800" cy="184666"/>
           </a:xfrm>
           <a:prstGeom prst="rect">
             <a:avLst/>
@@ -12050,14 +11609,20 @@
           <a:lstStyle/>
           <a:p>
             <a:r>
-              <a:rPr lang="es-GT" sz="1200">
+              <a:rPr lang="es-ES" sz="1200">
                 <a:solidFill>
                   <a:srgbClr val="002D5A"/>
                 </a:solidFill>
                 <a:latin typeface="Aptos" panose="020B0004020202020204" pitchFamily="34" charset="0"/>
               </a:rPr>
-              <a:t>Certificación</a:t>
-            </a:r>
+              <a:t>Construcción/Operación/Modificación de Helipuerto</a:t>
+            </a:r>
+            <a:endParaRPr lang="es-GT" sz="1200">
+              <a:solidFill>
+                <a:srgbClr val="002D5A"/>
+              </a:solidFill>
+              <a:latin typeface="Aptos" panose="020B0004020202020204" pitchFamily="34" charset="0"/>
+            </a:endParaRPr>
           </a:p>
         </p:txBody>
       </p:sp>
@@ -12066,7 +11631,7 @@
           <p:cNvPr id="28" name="Rectángulo: esquinas redondeadas 27">
             <a:extLst>
               <a:ext uri="{FF2B5EF4-FFF2-40B4-BE49-F238E27FC236}">
-                <a16:creationId xmlns:a16="http://schemas.microsoft.com/office/drawing/2014/main" id="{1426CC89-F484-464B-C95A-442CD7A2196A}"/>
+                <a16:creationId xmlns:a16="http://schemas.microsoft.com/office/drawing/2014/main" id="{7086B247-FF29-CE34-6FA6-7EFDE76486B9}"/>
               </a:ext>
             </a:extLst>
           </p:cNvPr>
@@ -12075,8 +11640,8 @@
         </p:nvSpPr>
         <p:spPr>
           <a:xfrm>
-            <a:off x="4826000" y="4483100"/>
-            <a:ext cx="8890000" cy="635000"/>
+            <a:off x="1142999" y="6896100"/>
+            <a:ext cx="13397593" cy="1096377"/>
           </a:xfrm>
           <a:prstGeom prst="roundRect">
             <a:avLst/>
@@ -12117,10 +11682,10 @@
       </p:sp>
       <p:sp>
         <p:nvSpPr>
-          <p:cNvPr id="29" name="Rectángulo: esquinas redondeadas 28">
-            <a:extLst>
-              <a:ext uri="{FF2B5EF4-FFF2-40B4-BE49-F238E27FC236}">
-                <a16:creationId xmlns:a16="http://schemas.microsoft.com/office/drawing/2014/main" id="{2A16F0ED-3E0D-8602-53AB-AB58CADCD1F4}"/>
+          <p:cNvPr id="29" name="Rectángulo 28">
+            <a:extLst>
+              <a:ext uri="{FF2B5EF4-FFF2-40B4-BE49-F238E27FC236}">
+                <a16:creationId xmlns:a16="http://schemas.microsoft.com/office/drawing/2014/main" id="{909F7ACB-F644-01F4-FC89-87240C0B5BB2}"/>
               </a:ext>
             </a:extLst>
           </p:cNvPr>
@@ -12129,14 +11694,14 @@
         </p:nvSpPr>
         <p:spPr>
           <a:xfrm>
-            <a:off x="4953000" y="4572000"/>
-            <a:ext cx="381000" cy="381000"/>
-          </a:xfrm>
-          <a:prstGeom prst="roundRect">
+            <a:off x="1143000" y="6896100"/>
+            <a:ext cx="65314" cy="1028700"/>
+          </a:xfrm>
+          <a:prstGeom prst="rect">
             <a:avLst/>
           </a:prstGeom>
           <a:solidFill>
-            <a:srgbClr val="34A853"/>
+            <a:srgbClr val="EB7D00"/>
           </a:solidFill>
           <a:ln w="19050" cap="flat" cmpd="sng" algn="ctr">
             <a:noFill/>
@@ -12188,7 +11753,7 @@
           <p:cNvPr id="30" name="CuadroTexto 29">
             <a:extLst>
               <a:ext uri="{FF2B5EF4-FFF2-40B4-BE49-F238E27FC236}">
-                <a16:creationId xmlns:a16="http://schemas.microsoft.com/office/drawing/2014/main" id="{FCD9AA13-63DC-1FD9-6852-4679FCC5C068}"/>
+                <a16:creationId xmlns:a16="http://schemas.microsoft.com/office/drawing/2014/main" id="{96A05745-A4FA-1EDC-9A4A-ABF8D7127276}"/>
               </a:ext>
             </a:extLst>
           </p:cNvPr>
@@ -12197,8 +11762,8 @@
         </p:nvSpPr>
         <p:spPr>
           <a:xfrm>
-            <a:off x="5029200" y="4635500"/>
-            <a:ext cx="228600" cy="169277"/>
+            <a:off x="1422400" y="7124700"/>
+            <a:ext cx="8890000" cy="261610"/>
           </a:xfrm>
           <a:prstGeom prst="rect">
             <a:avLst/>
@@ -12211,15 +11776,14 @@
           </a:bodyPr>
           <a:lstStyle/>
           <a:p>
-            <a:pPr algn="ctr"/>
-            <a:r>
-              <a:rPr lang="es-GT" sz="1100" b="1">
-                <a:solidFill>
-                  <a:srgbClr val="FFFFFF"/>
+            <a:r>
+              <a:rPr lang="es-GT" sz="1700" b="1">
+                <a:solidFill>
+                  <a:srgbClr val="001F44"/>
                 </a:solidFill>
                 <a:latin typeface="Aptos" panose="020B0004020202020204" pitchFamily="34" charset="0"/>
               </a:rPr>
-              <a:t>4</a:t>
+              <a:t>Estado actual</a:t>
             </a:r>
           </a:p>
         </p:txBody>
@@ -12229,7 +11793,7 @@
           <p:cNvPr id="31" name="CuadroTexto 30">
             <a:extLst>
               <a:ext uri="{FF2B5EF4-FFF2-40B4-BE49-F238E27FC236}">
-                <a16:creationId xmlns:a16="http://schemas.microsoft.com/office/drawing/2014/main" id="{F35F6F99-5F4F-8AEC-22BA-17819A1AA8EF}"/>
+                <a16:creationId xmlns:a16="http://schemas.microsoft.com/office/drawing/2014/main" id="{A866C896-1F26-3F90-336D-F64DE38740A3}"/>
               </a:ext>
             </a:extLst>
           </p:cNvPr>
@@ -12238,8 +11802,8 @@
         </p:nvSpPr>
         <p:spPr>
           <a:xfrm>
-            <a:off x="5511800" y="4572000"/>
-            <a:ext cx="8051800" cy="184666"/>
+            <a:off x="1422400" y="7594600"/>
+            <a:ext cx="12742636" cy="215444"/>
           </a:xfrm>
           <a:prstGeom prst="rect">
             <a:avLst/>
@@ -12247,21 +11811,21 @@
           <a:noFill/>
         </p:spPr>
         <p:txBody>
-          <a:bodyPr vert="horz" lIns="0" tIns="0" rIns="0" bIns="0" rtlCol="0">
+          <a:bodyPr vert="horz" wrap="square" lIns="0" tIns="0" rIns="0" bIns="0" rtlCol="0">
             <a:spAutoFit/>
           </a:bodyPr>
           <a:lstStyle/>
           <a:p>
             <a:r>
-              <a:rPr lang="es-ES" sz="1200">
+              <a:rPr lang="es-ES" sz="1400" dirty="0">
                 <a:solidFill>
                   <a:srgbClr val="002D5A"/>
                 </a:solidFill>
                 <a:latin typeface="Aptos" panose="020B0004020202020204" pitchFamily="34" charset="0"/>
               </a:rPr>
-              <a:t>Contraseña de pago de otros rubros</a:t>
-            </a:r>
-            <a:endParaRPr lang="es-GT" sz="1200">
+              <a:t>Los trámites de infraestructura se encuentran en análisis de requerimientos. Codificación, pruebas, implementación, capacitación y lanzamiento aún no han iniciado.</a:t>
+            </a:r>
+            <a:endParaRPr lang="es-GT" sz="1400" dirty="0">
               <a:solidFill>
                 <a:srgbClr val="002D5A"/>
               </a:solidFill>
@@ -12272,1323 +11836,10 @@
       </p:sp>
       <p:sp>
         <p:nvSpPr>
-          <p:cNvPr id="32" name="Rectángulo: esquinas redondeadas 31">
-            <a:extLst>
-              <a:ext uri="{FF2B5EF4-FFF2-40B4-BE49-F238E27FC236}">
-                <a16:creationId xmlns:a16="http://schemas.microsoft.com/office/drawing/2014/main" id="{3C43C90B-46F5-5B47-9306-3C3757ACFF8A}"/>
-              </a:ext>
-            </a:extLst>
-          </p:cNvPr>
-          <p:cNvSpPr/>
-          <p:nvPr/>
-        </p:nvSpPr>
-        <p:spPr>
-          <a:xfrm>
-            <a:off x="4826000" y="5194300"/>
-            <a:ext cx="8890000" cy="635000"/>
-          </a:xfrm>
-          <a:prstGeom prst="roundRect">
-            <a:avLst/>
-          </a:prstGeom>
-          <a:solidFill>
-            <a:srgbClr val="FFFFFF"/>
-          </a:solidFill>
-          <a:ln w="15875">
-            <a:solidFill>
-              <a:srgbClr val="BFD8F2"/>
-            </a:solidFill>
-          </a:ln>
-        </p:spPr>
-        <p:style>
-          <a:lnRef idx="2">
-            <a:schemeClr val="accent1">
-              <a:shade val="15000"/>
-            </a:schemeClr>
-          </a:lnRef>
-          <a:fillRef idx="1">
-            <a:schemeClr val="accent1"/>
-          </a:fillRef>
-          <a:effectRef idx="0">
-            <a:schemeClr val="accent1"/>
-          </a:effectRef>
-          <a:fontRef idx="minor">
-            <a:schemeClr val="lt1"/>
-          </a:fontRef>
-        </p:style>
-        <p:txBody>
-          <a:bodyPr rtlCol="0" anchor="ctr"/>
-          <a:lstStyle/>
-          <a:p>
-            <a:pPr algn="ctr"/>
-            <a:endParaRPr lang="es-GT"/>
-          </a:p>
-        </p:txBody>
-      </p:sp>
-      <p:sp>
-        <p:nvSpPr>
-          <p:cNvPr id="33" name="Rectángulo: esquinas redondeadas 32">
-            <a:extLst>
-              <a:ext uri="{FF2B5EF4-FFF2-40B4-BE49-F238E27FC236}">
-                <a16:creationId xmlns:a16="http://schemas.microsoft.com/office/drawing/2014/main" id="{2CF4A84F-C113-241A-567E-0CE7264F2E97}"/>
-              </a:ext>
-            </a:extLst>
-          </p:cNvPr>
-          <p:cNvSpPr/>
-          <p:nvPr/>
-        </p:nvSpPr>
-        <p:spPr>
-          <a:xfrm>
-            <a:off x="4953000" y="5283200"/>
-            <a:ext cx="381000" cy="381000"/>
-          </a:xfrm>
-          <a:prstGeom prst="roundRect">
-            <a:avLst/>
-          </a:prstGeom>
-          <a:solidFill>
-            <a:srgbClr val="34A853"/>
-          </a:solidFill>
-          <a:ln w="19050" cap="flat" cmpd="sng" algn="ctr">
-            <a:noFill/>
-            <a:prstDash val="solid"/>
-            <a:miter lim="800000"/>
-          </a:ln>
-          <a:effectLst/>
-          <a:extLst>
-            <a:ext uri="{91240B29-F687-4F45-9708-019B960494DF}">
-              <a14:hiddenLine xmlns:a14="http://schemas.microsoft.com/office/drawing/2010/main" w="19050" cap="flat" cmpd="sng" algn="ctr">
-                <a:solidFill>
-                  <a:schemeClr val="accent1">
-                    <a:shade val="15000"/>
-                  </a:schemeClr>
-                </a:solidFill>
-                <a:prstDash val="solid"/>
-                <a:miter lim="800000"/>
-              </a14:hiddenLine>
-            </a:ext>
-          </a:extLst>
-        </p:spPr>
-        <p:style>
-          <a:lnRef idx="2">
-            <a:schemeClr val="accent1">
-              <a:shade val="15000"/>
-            </a:schemeClr>
-          </a:lnRef>
-          <a:fillRef idx="1">
-            <a:schemeClr val="accent1"/>
-          </a:fillRef>
-          <a:effectRef idx="0">
-            <a:schemeClr val="accent1"/>
-          </a:effectRef>
-          <a:fontRef idx="minor">
-            <a:schemeClr val="lt1"/>
-          </a:fontRef>
-        </p:style>
-        <p:txBody>
-          <a:bodyPr rtlCol="0" anchor="ctr"/>
-          <a:lstStyle/>
-          <a:p>
-            <a:pPr algn="ctr"/>
-            <a:endParaRPr lang="es-GT"/>
-          </a:p>
-        </p:txBody>
-      </p:sp>
-      <p:sp>
-        <p:nvSpPr>
-          <p:cNvPr id="34" name="CuadroTexto 33">
-            <a:extLst>
-              <a:ext uri="{FF2B5EF4-FFF2-40B4-BE49-F238E27FC236}">
-                <a16:creationId xmlns:a16="http://schemas.microsoft.com/office/drawing/2014/main" id="{EC6A85F6-C3DB-EE7E-BB48-9AD1AF0AA84B}"/>
-              </a:ext>
-            </a:extLst>
-          </p:cNvPr>
-          <p:cNvSpPr txBox="1"/>
-          <p:nvPr/>
-        </p:nvSpPr>
-        <p:spPr>
-          <a:xfrm>
-            <a:off x="5029200" y="5346700"/>
-            <a:ext cx="228600" cy="169277"/>
-          </a:xfrm>
-          <a:prstGeom prst="rect">
-            <a:avLst/>
-          </a:prstGeom>
-          <a:noFill/>
-        </p:spPr>
-        <p:txBody>
-          <a:bodyPr vert="horz" lIns="0" tIns="0" rIns="0" bIns="0" rtlCol="0">
-            <a:spAutoFit/>
-          </a:bodyPr>
-          <a:lstStyle/>
-          <a:p>
-            <a:pPr algn="ctr"/>
-            <a:r>
-              <a:rPr lang="es-GT" sz="1100" b="1">
-                <a:solidFill>
-                  <a:srgbClr val="FFFFFF"/>
-                </a:solidFill>
-                <a:latin typeface="Aptos" panose="020B0004020202020204" pitchFamily="34" charset="0"/>
-              </a:rPr>
-              <a:t>5</a:t>
-            </a:r>
-          </a:p>
-        </p:txBody>
-      </p:sp>
-      <p:sp>
-        <p:nvSpPr>
-          <p:cNvPr id="35" name="CuadroTexto 34">
-            <a:extLst>
-              <a:ext uri="{FF2B5EF4-FFF2-40B4-BE49-F238E27FC236}">
-                <a16:creationId xmlns:a16="http://schemas.microsoft.com/office/drawing/2014/main" id="{0F3C51B1-CD81-1E75-E9D0-A47CBD89FD96}"/>
-              </a:ext>
-            </a:extLst>
-          </p:cNvPr>
-          <p:cNvSpPr txBox="1"/>
-          <p:nvPr/>
-        </p:nvSpPr>
-        <p:spPr>
-          <a:xfrm>
-            <a:off x="5511800" y="5283200"/>
-            <a:ext cx="8051800" cy="184666"/>
-          </a:xfrm>
-          <a:prstGeom prst="rect">
-            <a:avLst/>
-          </a:prstGeom>
-          <a:noFill/>
-        </p:spPr>
-        <p:txBody>
-          <a:bodyPr vert="horz" lIns="0" tIns="0" rIns="0" bIns="0" rtlCol="0">
-            <a:spAutoFit/>
-          </a:bodyPr>
-          <a:lstStyle/>
-          <a:p>
-            <a:r>
-              <a:rPr lang="es-GT" sz="1200">
-                <a:solidFill>
-                  <a:srgbClr val="002D5A"/>
-                </a:solidFill>
-                <a:latin typeface="Aptos" panose="020B0004020202020204" pitchFamily="34" charset="0"/>
-              </a:rPr>
-              <a:t>Solvencia financiera</a:t>
-            </a:r>
-          </a:p>
-        </p:txBody>
-      </p:sp>
-      <p:sp>
-        <p:nvSpPr>
-          <p:cNvPr id="36" name="Elipse 35">
-            <a:extLst>
-              <a:ext uri="{FF2B5EF4-FFF2-40B4-BE49-F238E27FC236}">
-                <a16:creationId xmlns:a16="http://schemas.microsoft.com/office/drawing/2014/main" id="{6C521214-1EBB-8C58-C8BB-FF722FB79C55}"/>
-              </a:ext>
-            </a:extLst>
-          </p:cNvPr>
-          <p:cNvSpPr/>
-          <p:nvPr/>
-        </p:nvSpPr>
-        <p:spPr>
-          <a:xfrm>
-            <a:off x="1841500" y="6540500"/>
-            <a:ext cx="660400" cy="660400"/>
-          </a:xfrm>
-          <a:prstGeom prst="ellipse">
-            <a:avLst/>
-          </a:prstGeom>
-          <a:solidFill>
-            <a:srgbClr val="34A853"/>
-          </a:solidFill>
-          <a:ln w="19050" cap="flat" cmpd="sng" algn="ctr">
-            <a:noFill/>
-            <a:prstDash val="solid"/>
-            <a:miter lim="800000"/>
-          </a:ln>
-          <a:effectLst/>
-          <a:extLst>
-            <a:ext uri="{91240B29-F687-4F45-9708-019B960494DF}">
-              <a14:hiddenLine xmlns:a14="http://schemas.microsoft.com/office/drawing/2010/main" w="19050" cap="flat" cmpd="sng" algn="ctr">
-                <a:solidFill>
-                  <a:schemeClr val="accent1">
-                    <a:shade val="15000"/>
-                  </a:schemeClr>
-                </a:solidFill>
-                <a:prstDash val="solid"/>
-                <a:miter lim="800000"/>
-              </a14:hiddenLine>
-            </a:ext>
-          </a:extLst>
-        </p:spPr>
-        <p:style>
-          <a:lnRef idx="2">
-            <a:schemeClr val="accent1">
-              <a:shade val="15000"/>
-            </a:schemeClr>
-          </a:lnRef>
-          <a:fillRef idx="1">
-            <a:schemeClr val="accent1"/>
-          </a:fillRef>
-          <a:effectRef idx="0">
-            <a:schemeClr val="accent1"/>
-          </a:effectRef>
-          <a:fontRef idx="minor">
-            <a:schemeClr val="lt1"/>
-          </a:fontRef>
-        </p:style>
-        <p:txBody>
-          <a:bodyPr rtlCol="0" anchor="ctr"/>
-          <a:lstStyle/>
-          <a:p>
-            <a:pPr algn="ctr"/>
-            <a:endParaRPr lang="es-GT"/>
-          </a:p>
-        </p:txBody>
-      </p:sp>
-      <p:sp>
-        <p:nvSpPr>
-          <p:cNvPr id="37" name="CuadroTexto 36">
-            <a:extLst>
-              <a:ext uri="{FF2B5EF4-FFF2-40B4-BE49-F238E27FC236}">
-                <a16:creationId xmlns:a16="http://schemas.microsoft.com/office/drawing/2014/main" id="{0DCCAA3E-FC07-FE18-CE82-50BADADD2941}"/>
-              </a:ext>
-            </a:extLst>
-          </p:cNvPr>
-          <p:cNvSpPr txBox="1"/>
-          <p:nvPr/>
-        </p:nvSpPr>
-        <p:spPr>
-          <a:xfrm>
-            <a:off x="2006600" y="6642100"/>
-            <a:ext cx="330200" cy="369332"/>
-          </a:xfrm>
-          <a:prstGeom prst="rect">
-            <a:avLst/>
-          </a:prstGeom>
-          <a:noFill/>
-        </p:spPr>
-        <p:txBody>
-          <a:bodyPr vert="horz" lIns="0" tIns="0" rIns="0" bIns="0" rtlCol="0">
-            <a:spAutoFit/>
-          </a:bodyPr>
-          <a:lstStyle/>
-          <a:p>
-            <a:pPr algn="ctr"/>
-            <a:r>
-              <a:rPr lang="es-GT" sz="2400" b="1">
-                <a:solidFill>
-                  <a:srgbClr val="FFFFFF"/>
-                </a:solidFill>
-                <a:latin typeface="Aptos" panose="020B0004020202020204" pitchFamily="34" charset="0"/>
-              </a:rPr>
-              <a:t>✓</a:t>
-            </a:r>
-          </a:p>
-        </p:txBody>
-      </p:sp>
-      <p:sp>
-        <p:nvSpPr>
-          <p:cNvPr id="38" name="CuadroTexto 37">
-            <a:extLst>
-              <a:ext uri="{FF2B5EF4-FFF2-40B4-BE49-F238E27FC236}">
-                <a16:creationId xmlns:a16="http://schemas.microsoft.com/office/drawing/2014/main" id="{C0F8E4F0-48D7-9467-0FDD-E2FBE4AB59CB}"/>
-              </a:ext>
-            </a:extLst>
-          </p:cNvPr>
-          <p:cNvSpPr txBox="1"/>
-          <p:nvPr/>
-        </p:nvSpPr>
-        <p:spPr>
-          <a:xfrm>
-            <a:off x="1587500" y="7302500"/>
-            <a:ext cx="1168400" cy="153888"/>
-          </a:xfrm>
-          <a:prstGeom prst="rect">
-            <a:avLst/>
-          </a:prstGeom>
-          <a:noFill/>
-        </p:spPr>
-        <p:txBody>
-          <a:bodyPr vert="horz" lIns="0" tIns="0" rIns="0" bIns="0" rtlCol="0">
-            <a:spAutoFit/>
-          </a:bodyPr>
-          <a:lstStyle/>
-          <a:p>
-            <a:pPr algn="ctr"/>
-            <a:r>
-              <a:rPr lang="es-GT" sz="1000">
-                <a:solidFill>
-                  <a:srgbClr val="002D5A"/>
-                </a:solidFill>
-                <a:latin typeface="Aptos" panose="020B0004020202020204" pitchFamily="34" charset="0"/>
-              </a:rPr>
-              <a:t>Análisis finalizado</a:t>
-            </a:r>
-          </a:p>
-        </p:txBody>
-      </p:sp>
-      <p:cxnSp>
-        <p:nvCxnSpPr>
-          <p:cNvPr id="39" name="Conector recto 38">
-            <a:extLst>
-              <a:ext uri="{FF2B5EF4-FFF2-40B4-BE49-F238E27FC236}">
-                <a16:creationId xmlns:a16="http://schemas.microsoft.com/office/drawing/2014/main" id="{B9FDA448-C800-58E1-CE6F-F8E9B4F8DF6A}"/>
-              </a:ext>
-            </a:extLst>
-          </p:cNvPr>
-          <p:cNvCxnSpPr/>
-          <p:nvPr/>
-        </p:nvCxnSpPr>
-        <p:spPr>
-          <a:xfrm>
-            <a:off x="2603500" y="6870700"/>
-            <a:ext cx="1016000" cy="0"/>
-          </a:xfrm>
-          <a:prstGeom prst="line">
-            <a:avLst/>
-          </a:prstGeom>
-          <a:ln w="25400">
-            <a:solidFill>
-              <a:srgbClr val="BFD8F2"/>
-            </a:solidFill>
-            <a:tailEnd type="arrow"/>
-          </a:ln>
-        </p:spPr>
-        <p:style>
-          <a:lnRef idx="2">
-            <a:schemeClr val="accent1"/>
-          </a:lnRef>
-          <a:fillRef idx="0">
-            <a:schemeClr val="accent1"/>
-          </a:fillRef>
-          <a:effectRef idx="1">
-            <a:schemeClr val="accent1"/>
-          </a:effectRef>
-          <a:fontRef idx="minor">
-            <a:schemeClr val="tx1"/>
-          </a:fontRef>
-        </p:style>
-      </p:cxnSp>
-      <p:sp>
-        <p:nvSpPr>
-          <p:cNvPr id="40" name="Elipse 39">
-            <a:extLst>
-              <a:ext uri="{FF2B5EF4-FFF2-40B4-BE49-F238E27FC236}">
-                <a16:creationId xmlns:a16="http://schemas.microsoft.com/office/drawing/2014/main" id="{A2C64A50-2DAE-9E17-45BF-B6404FA72826}"/>
-              </a:ext>
-            </a:extLst>
-          </p:cNvPr>
-          <p:cNvSpPr/>
-          <p:nvPr/>
-        </p:nvSpPr>
-        <p:spPr>
-          <a:xfrm>
-            <a:off x="3810000" y="6540500"/>
-            <a:ext cx="660400" cy="660400"/>
-          </a:xfrm>
-          <a:prstGeom prst="ellipse">
-            <a:avLst/>
-          </a:prstGeom>
-          <a:solidFill>
-            <a:srgbClr val="34A853"/>
-          </a:solidFill>
-          <a:ln w="19050" cap="flat" cmpd="sng" algn="ctr">
-            <a:noFill/>
-            <a:prstDash val="solid"/>
-            <a:miter lim="800000"/>
-          </a:ln>
-          <a:effectLst/>
-          <a:extLst>
-            <a:ext uri="{91240B29-F687-4F45-9708-019B960494DF}">
-              <a14:hiddenLine xmlns:a14="http://schemas.microsoft.com/office/drawing/2010/main" w="19050" cap="flat" cmpd="sng" algn="ctr">
-                <a:solidFill>
-                  <a:schemeClr val="accent1">
-                    <a:shade val="15000"/>
-                  </a:schemeClr>
-                </a:solidFill>
-                <a:prstDash val="solid"/>
-                <a:miter lim="800000"/>
-              </a14:hiddenLine>
-            </a:ext>
-          </a:extLst>
-        </p:spPr>
-        <p:style>
-          <a:lnRef idx="2">
-            <a:schemeClr val="accent1">
-              <a:shade val="15000"/>
-            </a:schemeClr>
-          </a:lnRef>
-          <a:fillRef idx="1">
-            <a:schemeClr val="accent1"/>
-          </a:fillRef>
-          <a:effectRef idx="0">
-            <a:schemeClr val="accent1"/>
-          </a:effectRef>
-          <a:fontRef idx="minor">
-            <a:schemeClr val="lt1"/>
-          </a:fontRef>
-        </p:style>
-        <p:txBody>
-          <a:bodyPr rtlCol="0" anchor="ctr"/>
-          <a:lstStyle/>
-          <a:p>
-            <a:pPr algn="ctr"/>
-            <a:endParaRPr lang="es-GT"/>
-          </a:p>
-        </p:txBody>
-      </p:sp>
-      <p:sp>
-        <p:nvSpPr>
-          <p:cNvPr id="41" name="CuadroTexto 40">
-            <a:extLst>
-              <a:ext uri="{FF2B5EF4-FFF2-40B4-BE49-F238E27FC236}">
-                <a16:creationId xmlns:a16="http://schemas.microsoft.com/office/drawing/2014/main" id="{0D887198-1FF2-059F-C793-3A8C92A2A346}"/>
-              </a:ext>
-            </a:extLst>
-          </p:cNvPr>
-          <p:cNvSpPr txBox="1"/>
-          <p:nvPr/>
-        </p:nvSpPr>
-        <p:spPr>
-          <a:xfrm>
-            <a:off x="3975100" y="6642100"/>
-            <a:ext cx="330200" cy="369332"/>
-          </a:xfrm>
-          <a:prstGeom prst="rect">
-            <a:avLst/>
-          </a:prstGeom>
-          <a:noFill/>
-        </p:spPr>
-        <p:txBody>
-          <a:bodyPr vert="horz" lIns="0" tIns="0" rIns="0" bIns="0" rtlCol="0">
-            <a:spAutoFit/>
-          </a:bodyPr>
-          <a:lstStyle/>
-          <a:p>
-            <a:pPr algn="ctr"/>
-            <a:r>
-              <a:rPr lang="es-GT" sz="2400" b="1">
-                <a:solidFill>
-                  <a:srgbClr val="FFFFFF"/>
-                </a:solidFill>
-                <a:latin typeface="Aptos" panose="020B0004020202020204" pitchFamily="34" charset="0"/>
-              </a:rPr>
-              <a:t>✓</a:t>
-            </a:r>
-          </a:p>
-        </p:txBody>
-      </p:sp>
-      <p:sp>
-        <p:nvSpPr>
-          <p:cNvPr id="42" name="CuadroTexto 41">
-            <a:extLst>
-              <a:ext uri="{FF2B5EF4-FFF2-40B4-BE49-F238E27FC236}">
-                <a16:creationId xmlns:a16="http://schemas.microsoft.com/office/drawing/2014/main" id="{B81C4E9E-D320-57DD-C09A-5D3F9C76D992}"/>
-              </a:ext>
-            </a:extLst>
-          </p:cNvPr>
-          <p:cNvSpPr txBox="1"/>
-          <p:nvPr/>
-        </p:nvSpPr>
-        <p:spPr>
-          <a:xfrm>
-            <a:off x="3556000" y="7302500"/>
-            <a:ext cx="1168400" cy="153888"/>
-          </a:xfrm>
-          <a:prstGeom prst="rect">
-            <a:avLst/>
-          </a:prstGeom>
-          <a:noFill/>
-        </p:spPr>
-        <p:txBody>
-          <a:bodyPr vert="horz" lIns="0" tIns="0" rIns="0" bIns="0" rtlCol="0">
-            <a:spAutoFit/>
-          </a:bodyPr>
-          <a:lstStyle/>
-          <a:p>
-            <a:pPr algn="ctr"/>
-            <a:r>
-              <a:rPr lang="es-GT" sz="1000">
-                <a:solidFill>
-                  <a:srgbClr val="002D5A"/>
-                </a:solidFill>
-                <a:latin typeface="Aptos" panose="020B0004020202020204" pitchFamily="34" charset="0"/>
-              </a:rPr>
-              <a:t>Desarrollo finalizado</a:t>
-            </a:r>
-          </a:p>
-        </p:txBody>
-      </p:sp>
-      <p:cxnSp>
-        <p:nvCxnSpPr>
-          <p:cNvPr id="43" name="Conector recto 42">
-            <a:extLst>
-              <a:ext uri="{FF2B5EF4-FFF2-40B4-BE49-F238E27FC236}">
-                <a16:creationId xmlns:a16="http://schemas.microsoft.com/office/drawing/2014/main" id="{95EC6155-42D8-7643-E340-C5FF075BA49E}"/>
-              </a:ext>
-            </a:extLst>
-          </p:cNvPr>
-          <p:cNvCxnSpPr/>
-          <p:nvPr/>
-        </p:nvCxnSpPr>
-        <p:spPr>
-          <a:xfrm>
-            <a:off x="4572000" y="6870700"/>
-            <a:ext cx="1016000" cy="0"/>
-          </a:xfrm>
-          <a:prstGeom prst="line">
-            <a:avLst/>
-          </a:prstGeom>
-          <a:ln w="25400">
-            <a:solidFill>
-              <a:srgbClr val="BFD8F2"/>
-            </a:solidFill>
-            <a:tailEnd type="arrow"/>
-          </a:ln>
-        </p:spPr>
-        <p:style>
-          <a:lnRef idx="2">
-            <a:schemeClr val="accent1"/>
-          </a:lnRef>
-          <a:fillRef idx="0">
-            <a:schemeClr val="accent1"/>
-          </a:fillRef>
-          <a:effectRef idx="1">
-            <a:schemeClr val="accent1"/>
-          </a:effectRef>
-          <a:fontRef idx="minor">
-            <a:schemeClr val="tx1"/>
-          </a:fontRef>
-        </p:style>
-      </p:cxnSp>
-      <p:sp>
-        <p:nvSpPr>
-          <p:cNvPr id="44" name="Elipse 43">
-            <a:extLst>
-              <a:ext uri="{FF2B5EF4-FFF2-40B4-BE49-F238E27FC236}">
-                <a16:creationId xmlns:a16="http://schemas.microsoft.com/office/drawing/2014/main" id="{74D8CF7F-944D-EB05-9ACB-4F99CDF07EB1}"/>
-              </a:ext>
-            </a:extLst>
-          </p:cNvPr>
-          <p:cNvSpPr/>
-          <p:nvPr/>
-        </p:nvSpPr>
-        <p:spPr>
-          <a:xfrm>
-            <a:off x="5778500" y="6540500"/>
-            <a:ext cx="660400" cy="660400"/>
-          </a:xfrm>
-          <a:prstGeom prst="ellipse">
-            <a:avLst/>
-          </a:prstGeom>
-          <a:solidFill>
-            <a:srgbClr val="34A853"/>
-          </a:solidFill>
-          <a:ln w="19050" cap="flat" cmpd="sng" algn="ctr">
-            <a:noFill/>
-            <a:prstDash val="solid"/>
-            <a:miter lim="800000"/>
-          </a:ln>
-          <a:effectLst/>
-          <a:extLst>
-            <a:ext uri="{91240B29-F687-4F45-9708-019B960494DF}">
-              <a14:hiddenLine xmlns:a14="http://schemas.microsoft.com/office/drawing/2010/main" w="19050" cap="flat" cmpd="sng" algn="ctr">
-                <a:solidFill>
-                  <a:schemeClr val="accent1">
-                    <a:shade val="15000"/>
-                  </a:schemeClr>
-                </a:solidFill>
-                <a:prstDash val="solid"/>
-                <a:miter lim="800000"/>
-              </a14:hiddenLine>
-            </a:ext>
-          </a:extLst>
-        </p:spPr>
-        <p:style>
-          <a:lnRef idx="2">
-            <a:schemeClr val="accent1">
-              <a:shade val="15000"/>
-            </a:schemeClr>
-          </a:lnRef>
-          <a:fillRef idx="1">
-            <a:schemeClr val="accent1"/>
-          </a:fillRef>
-          <a:effectRef idx="0">
-            <a:schemeClr val="accent1"/>
-          </a:effectRef>
-          <a:fontRef idx="minor">
-            <a:schemeClr val="lt1"/>
-          </a:fontRef>
-        </p:style>
-        <p:txBody>
-          <a:bodyPr rtlCol="0" anchor="ctr"/>
-          <a:lstStyle/>
-          <a:p>
-            <a:pPr algn="ctr"/>
-            <a:endParaRPr lang="es-GT"/>
-          </a:p>
-        </p:txBody>
-      </p:sp>
-      <p:sp>
-        <p:nvSpPr>
-          <p:cNvPr id="45" name="CuadroTexto 44">
-            <a:extLst>
-              <a:ext uri="{FF2B5EF4-FFF2-40B4-BE49-F238E27FC236}">
-                <a16:creationId xmlns:a16="http://schemas.microsoft.com/office/drawing/2014/main" id="{6E85B5A3-EC3F-11B9-FB6C-5CAAF3580C0D}"/>
-              </a:ext>
-            </a:extLst>
-          </p:cNvPr>
-          <p:cNvSpPr txBox="1"/>
-          <p:nvPr/>
-        </p:nvSpPr>
-        <p:spPr>
-          <a:xfrm>
-            <a:off x="5943600" y="6642100"/>
-            <a:ext cx="330200" cy="369332"/>
-          </a:xfrm>
-          <a:prstGeom prst="rect">
-            <a:avLst/>
-          </a:prstGeom>
-          <a:noFill/>
-        </p:spPr>
-        <p:txBody>
-          <a:bodyPr vert="horz" lIns="0" tIns="0" rIns="0" bIns="0" rtlCol="0">
-            <a:spAutoFit/>
-          </a:bodyPr>
-          <a:lstStyle/>
-          <a:p>
-            <a:pPr algn="ctr"/>
-            <a:r>
-              <a:rPr lang="es-GT" sz="2400" b="1">
-                <a:solidFill>
-                  <a:srgbClr val="FFFFFF"/>
-                </a:solidFill>
-                <a:latin typeface="Aptos" panose="020B0004020202020204" pitchFamily="34" charset="0"/>
-              </a:rPr>
-              <a:t>✓</a:t>
-            </a:r>
-          </a:p>
-        </p:txBody>
-      </p:sp>
-      <p:sp>
-        <p:nvSpPr>
-          <p:cNvPr id="46" name="CuadroTexto 45">
-            <a:extLst>
-              <a:ext uri="{FF2B5EF4-FFF2-40B4-BE49-F238E27FC236}">
-                <a16:creationId xmlns:a16="http://schemas.microsoft.com/office/drawing/2014/main" id="{8FE83884-537A-CB7B-F7E9-1D065F231C0C}"/>
-              </a:ext>
-            </a:extLst>
-          </p:cNvPr>
-          <p:cNvSpPr txBox="1"/>
-          <p:nvPr/>
-        </p:nvSpPr>
-        <p:spPr>
-          <a:xfrm>
-            <a:off x="5524500" y="7302500"/>
-            <a:ext cx="1168400" cy="153888"/>
-          </a:xfrm>
-          <a:prstGeom prst="rect">
-            <a:avLst/>
-          </a:prstGeom>
-          <a:noFill/>
-        </p:spPr>
-        <p:txBody>
-          <a:bodyPr vert="horz" lIns="0" tIns="0" rIns="0" bIns="0" rtlCol="0">
-            <a:spAutoFit/>
-          </a:bodyPr>
-          <a:lstStyle/>
-          <a:p>
-            <a:pPr algn="ctr"/>
-            <a:r>
-              <a:rPr lang="es-GT" sz="1000">
-                <a:solidFill>
-                  <a:srgbClr val="002D5A"/>
-                </a:solidFill>
-                <a:latin typeface="Aptos" panose="020B0004020202020204" pitchFamily="34" charset="0"/>
-              </a:rPr>
-              <a:t>Pruebas finalizadas</a:t>
-            </a:r>
-          </a:p>
-        </p:txBody>
-      </p:sp>
-      <p:cxnSp>
-        <p:nvCxnSpPr>
-          <p:cNvPr id="47" name="Conector recto 46">
-            <a:extLst>
-              <a:ext uri="{FF2B5EF4-FFF2-40B4-BE49-F238E27FC236}">
-                <a16:creationId xmlns:a16="http://schemas.microsoft.com/office/drawing/2014/main" id="{7CC80C5B-CE30-F0CA-6609-9C09BD8F92C3}"/>
-              </a:ext>
-            </a:extLst>
-          </p:cNvPr>
-          <p:cNvCxnSpPr/>
-          <p:nvPr/>
-        </p:nvCxnSpPr>
-        <p:spPr>
-          <a:xfrm>
-            <a:off x="6540500" y="6870700"/>
-            <a:ext cx="1016000" cy="0"/>
-          </a:xfrm>
-          <a:prstGeom prst="line">
-            <a:avLst/>
-          </a:prstGeom>
-          <a:ln w="25400">
-            <a:solidFill>
-              <a:srgbClr val="BFD8F2"/>
-            </a:solidFill>
-            <a:tailEnd type="arrow"/>
-          </a:ln>
-        </p:spPr>
-        <p:style>
-          <a:lnRef idx="2">
-            <a:schemeClr val="accent1"/>
-          </a:lnRef>
-          <a:fillRef idx="0">
-            <a:schemeClr val="accent1"/>
-          </a:fillRef>
-          <a:effectRef idx="1">
-            <a:schemeClr val="accent1"/>
-          </a:effectRef>
-          <a:fontRef idx="minor">
-            <a:schemeClr val="tx1"/>
-          </a:fontRef>
-        </p:style>
-      </p:cxnSp>
-      <p:sp>
-        <p:nvSpPr>
-          <p:cNvPr id="48" name="Elipse 47">
-            <a:extLst>
-              <a:ext uri="{FF2B5EF4-FFF2-40B4-BE49-F238E27FC236}">
-                <a16:creationId xmlns:a16="http://schemas.microsoft.com/office/drawing/2014/main" id="{5E610E26-E265-79A7-FBCF-FC88DA7092F0}"/>
-              </a:ext>
-            </a:extLst>
-          </p:cNvPr>
-          <p:cNvSpPr/>
-          <p:nvPr/>
-        </p:nvSpPr>
-        <p:spPr>
-          <a:xfrm>
-            <a:off x="7747000" y="6540500"/>
-            <a:ext cx="660400" cy="660400"/>
-          </a:xfrm>
-          <a:prstGeom prst="ellipse">
-            <a:avLst/>
-          </a:prstGeom>
-          <a:solidFill>
-            <a:srgbClr val="34A853"/>
-          </a:solidFill>
-          <a:ln w="19050" cap="flat" cmpd="sng" algn="ctr">
-            <a:noFill/>
-            <a:prstDash val="solid"/>
-            <a:miter lim="800000"/>
-          </a:ln>
-          <a:effectLst/>
-          <a:extLst>
-            <a:ext uri="{91240B29-F687-4F45-9708-019B960494DF}">
-              <a14:hiddenLine xmlns:a14="http://schemas.microsoft.com/office/drawing/2010/main" w="19050" cap="flat" cmpd="sng" algn="ctr">
-                <a:solidFill>
-                  <a:schemeClr val="accent1">
-                    <a:shade val="15000"/>
-                  </a:schemeClr>
-                </a:solidFill>
-                <a:prstDash val="solid"/>
-                <a:miter lim="800000"/>
-              </a14:hiddenLine>
-            </a:ext>
-          </a:extLst>
-        </p:spPr>
-        <p:style>
-          <a:lnRef idx="2">
-            <a:schemeClr val="accent1">
-              <a:shade val="15000"/>
-            </a:schemeClr>
-          </a:lnRef>
-          <a:fillRef idx="1">
-            <a:schemeClr val="accent1"/>
-          </a:fillRef>
-          <a:effectRef idx="0">
-            <a:schemeClr val="accent1"/>
-          </a:effectRef>
-          <a:fontRef idx="minor">
-            <a:schemeClr val="lt1"/>
-          </a:fontRef>
-        </p:style>
-        <p:txBody>
-          <a:bodyPr rtlCol="0" anchor="ctr"/>
-          <a:lstStyle/>
-          <a:p>
-            <a:pPr algn="ctr"/>
-            <a:endParaRPr lang="es-GT"/>
-          </a:p>
-        </p:txBody>
-      </p:sp>
-      <p:sp>
-        <p:nvSpPr>
-          <p:cNvPr id="49" name="CuadroTexto 48">
-            <a:extLst>
-              <a:ext uri="{FF2B5EF4-FFF2-40B4-BE49-F238E27FC236}">
-                <a16:creationId xmlns:a16="http://schemas.microsoft.com/office/drawing/2014/main" id="{4ED4C1B1-E22D-63EF-685B-A16FCCE470F8}"/>
-              </a:ext>
-            </a:extLst>
-          </p:cNvPr>
-          <p:cNvSpPr txBox="1"/>
-          <p:nvPr/>
-        </p:nvSpPr>
-        <p:spPr>
-          <a:xfrm>
-            <a:off x="7912100" y="6642100"/>
-            <a:ext cx="330200" cy="369332"/>
-          </a:xfrm>
-          <a:prstGeom prst="rect">
-            <a:avLst/>
-          </a:prstGeom>
-          <a:noFill/>
-        </p:spPr>
-        <p:txBody>
-          <a:bodyPr vert="horz" lIns="0" tIns="0" rIns="0" bIns="0" rtlCol="0">
-            <a:spAutoFit/>
-          </a:bodyPr>
-          <a:lstStyle/>
-          <a:p>
-            <a:pPr algn="ctr"/>
-            <a:r>
-              <a:rPr lang="es-GT" sz="2400" b="1">
-                <a:solidFill>
-                  <a:srgbClr val="FFFFFF"/>
-                </a:solidFill>
-                <a:latin typeface="Aptos" panose="020B0004020202020204" pitchFamily="34" charset="0"/>
-              </a:rPr>
-              <a:t>✓</a:t>
-            </a:r>
-          </a:p>
-        </p:txBody>
-      </p:sp>
-      <p:sp>
-        <p:nvSpPr>
-          <p:cNvPr id="50" name="CuadroTexto 49">
-            <a:extLst>
-              <a:ext uri="{FF2B5EF4-FFF2-40B4-BE49-F238E27FC236}">
-                <a16:creationId xmlns:a16="http://schemas.microsoft.com/office/drawing/2014/main" id="{BB1419AB-80E1-4375-470B-B8E0C5CE3CFA}"/>
-              </a:ext>
-            </a:extLst>
-          </p:cNvPr>
-          <p:cNvSpPr txBox="1"/>
-          <p:nvPr/>
-        </p:nvSpPr>
-        <p:spPr>
-          <a:xfrm>
-            <a:off x="7493000" y="7302500"/>
-            <a:ext cx="1168400" cy="307777"/>
-          </a:xfrm>
-          <a:prstGeom prst="rect">
-            <a:avLst/>
-          </a:prstGeom>
-          <a:noFill/>
-        </p:spPr>
-        <p:txBody>
-          <a:bodyPr vert="horz" lIns="0" tIns="0" rIns="0" bIns="0" rtlCol="0">
-            <a:spAutoFit/>
-          </a:bodyPr>
-          <a:lstStyle/>
-          <a:p>
-            <a:pPr algn="ctr"/>
-            <a:r>
-              <a:rPr lang="es-GT" sz="1000">
-                <a:solidFill>
-                  <a:srgbClr val="002D5A"/>
-                </a:solidFill>
-                <a:latin typeface="Aptos" panose="020B0004020202020204" pitchFamily="34" charset="0"/>
-              </a:rPr>
-              <a:t>Implementación finalizada</a:t>
-            </a:r>
-          </a:p>
-        </p:txBody>
-      </p:sp>
-      <p:cxnSp>
-        <p:nvCxnSpPr>
-          <p:cNvPr id="51" name="Conector recto 50">
-            <a:extLst>
-              <a:ext uri="{FF2B5EF4-FFF2-40B4-BE49-F238E27FC236}">
-                <a16:creationId xmlns:a16="http://schemas.microsoft.com/office/drawing/2014/main" id="{DE5F7272-E849-4E77-2366-BFD1B52500EA}"/>
-              </a:ext>
-            </a:extLst>
-          </p:cNvPr>
-          <p:cNvCxnSpPr/>
-          <p:nvPr/>
-        </p:nvCxnSpPr>
-        <p:spPr>
-          <a:xfrm>
-            <a:off x="8509000" y="6870700"/>
-            <a:ext cx="1016000" cy="0"/>
-          </a:xfrm>
-          <a:prstGeom prst="line">
-            <a:avLst/>
-          </a:prstGeom>
-          <a:ln w="25400">
-            <a:solidFill>
-              <a:srgbClr val="BFD8F2"/>
-            </a:solidFill>
-            <a:tailEnd type="arrow"/>
-          </a:ln>
-        </p:spPr>
-        <p:style>
-          <a:lnRef idx="2">
-            <a:schemeClr val="accent1"/>
-          </a:lnRef>
-          <a:fillRef idx="0">
-            <a:schemeClr val="accent1"/>
-          </a:fillRef>
-          <a:effectRef idx="1">
-            <a:schemeClr val="accent1"/>
-          </a:effectRef>
-          <a:fontRef idx="minor">
-            <a:schemeClr val="tx1"/>
-          </a:fontRef>
-        </p:style>
-      </p:cxnSp>
-      <p:sp>
-        <p:nvSpPr>
-          <p:cNvPr id="52" name="Elipse 51">
-            <a:extLst>
-              <a:ext uri="{FF2B5EF4-FFF2-40B4-BE49-F238E27FC236}">
-                <a16:creationId xmlns:a16="http://schemas.microsoft.com/office/drawing/2014/main" id="{94BBEDCE-ED87-6068-A42E-69520E37FCEE}"/>
-              </a:ext>
-            </a:extLst>
-          </p:cNvPr>
-          <p:cNvSpPr/>
-          <p:nvPr/>
-        </p:nvSpPr>
-        <p:spPr>
-          <a:xfrm>
-            <a:off x="9715500" y="6540500"/>
-            <a:ext cx="660400" cy="660400"/>
-          </a:xfrm>
-          <a:prstGeom prst="ellipse">
-            <a:avLst/>
-          </a:prstGeom>
-          <a:solidFill>
-            <a:srgbClr val="F5B400"/>
-          </a:solidFill>
-          <a:ln w="19050" cap="flat" cmpd="sng" algn="ctr">
-            <a:noFill/>
-            <a:prstDash val="solid"/>
-            <a:miter lim="800000"/>
-          </a:ln>
-          <a:effectLst/>
-          <a:extLst>
-            <a:ext uri="{91240B29-F687-4F45-9708-019B960494DF}">
-              <a14:hiddenLine xmlns:a14="http://schemas.microsoft.com/office/drawing/2010/main" w="19050" cap="flat" cmpd="sng" algn="ctr">
-                <a:solidFill>
-                  <a:schemeClr val="accent1">
-                    <a:shade val="15000"/>
-                  </a:schemeClr>
-                </a:solidFill>
-                <a:prstDash val="solid"/>
-                <a:miter lim="800000"/>
-              </a14:hiddenLine>
-            </a:ext>
-          </a:extLst>
-        </p:spPr>
-        <p:style>
-          <a:lnRef idx="2">
-            <a:schemeClr val="accent1">
-              <a:shade val="15000"/>
-            </a:schemeClr>
-          </a:lnRef>
-          <a:fillRef idx="1">
-            <a:schemeClr val="accent1"/>
-          </a:fillRef>
-          <a:effectRef idx="0">
-            <a:schemeClr val="accent1"/>
-          </a:effectRef>
-          <a:fontRef idx="minor">
-            <a:schemeClr val="lt1"/>
-          </a:fontRef>
-        </p:style>
-        <p:txBody>
-          <a:bodyPr rtlCol="0" anchor="ctr"/>
-          <a:lstStyle/>
-          <a:p>
-            <a:pPr algn="ctr"/>
-            <a:endParaRPr lang="es-GT"/>
-          </a:p>
-        </p:txBody>
-      </p:sp>
-      <p:sp>
-        <p:nvSpPr>
-          <p:cNvPr id="53" name="CuadroTexto 52">
-            <a:extLst>
-              <a:ext uri="{FF2B5EF4-FFF2-40B4-BE49-F238E27FC236}">
-                <a16:creationId xmlns:a16="http://schemas.microsoft.com/office/drawing/2014/main" id="{4623490A-4DDD-459F-9B2C-83F8EDC415DA}"/>
-              </a:ext>
-            </a:extLst>
-          </p:cNvPr>
-          <p:cNvSpPr txBox="1"/>
-          <p:nvPr/>
-        </p:nvSpPr>
-        <p:spPr>
-          <a:xfrm>
-            <a:off x="9931400" y="6604000"/>
-            <a:ext cx="228600" cy="430887"/>
-          </a:xfrm>
-          <a:prstGeom prst="rect">
-            <a:avLst/>
-          </a:prstGeom>
-          <a:noFill/>
-        </p:spPr>
-        <p:txBody>
-          <a:bodyPr vert="horz" lIns="0" tIns="0" rIns="0" bIns="0" rtlCol="0">
-            <a:spAutoFit/>
-          </a:bodyPr>
-          <a:lstStyle/>
-          <a:p>
-            <a:pPr algn="ctr"/>
-            <a:r>
-              <a:rPr lang="es-GT" sz="2800" b="1">
-                <a:solidFill>
-                  <a:srgbClr val="FFFFFF"/>
-                </a:solidFill>
-                <a:latin typeface="Aptos" panose="020B0004020202020204" pitchFamily="34" charset="0"/>
-              </a:rPr>
-              <a:t>•</a:t>
-            </a:r>
-          </a:p>
-        </p:txBody>
-      </p:sp>
-      <p:sp>
-        <p:nvSpPr>
-          <p:cNvPr id="54" name="CuadroTexto 53">
-            <a:extLst>
-              <a:ext uri="{FF2B5EF4-FFF2-40B4-BE49-F238E27FC236}">
-                <a16:creationId xmlns:a16="http://schemas.microsoft.com/office/drawing/2014/main" id="{5E0A6326-3EFC-5CE4-9482-67787B6F5374}"/>
-              </a:ext>
-            </a:extLst>
-          </p:cNvPr>
-          <p:cNvSpPr txBox="1"/>
-          <p:nvPr/>
-        </p:nvSpPr>
-        <p:spPr>
-          <a:xfrm>
-            <a:off x="9461500" y="7302500"/>
-            <a:ext cx="1168400" cy="307777"/>
-          </a:xfrm>
-          <a:prstGeom prst="rect">
-            <a:avLst/>
-          </a:prstGeom>
-          <a:noFill/>
-        </p:spPr>
-        <p:txBody>
-          <a:bodyPr vert="horz" lIns="0" tIns="0" rIns="0" bIns="0" rtlCol="0">
-            <a:spAutoFit/>
-          </a:bodyPr>
-          <a:lstStyle/>
-          <a:p>
-            <a:pPr algn="ctr"/>
-            <a:r>
-              <a:rPr lang="es-GT" sz="1000">
-                <a:solidFill>
-                  <a:srgbClr val="002D5A"/>
-                </a:solidFill>
-                <a:latin typeface="Aptos" panose="020B0004020202020204" pitchFamily="34" charset="0"/>
-              </a:rPr>
-              <a:t>Capacitación en proceso</a:t>
-            </a:r>
-          </a:p>
-        </p:txBody>
-      </p:sp>
-      <p:cxnSp>
-        <p:nvCxnSpPr>
-          <p:cNvPr id="55" name="Conector recto 54">
-            <a:extLst>
-              <a:ext uri="{FF2B5EF4-FFF2-40B4-BE49-F238E27FC236}">
-                <a16:creationId xmlns:a16="http://schemas.microsoft.com/office/drawing/2014/main" id="{52DBA3B4-84C9-17A0-8673-F3D7BC4CE180}"/>
-              </a:ext>
-            </a:extLst>
-          </p:cNvPr>
-          <p:cNvCxnSpPr/>
-          <p:nvPr/>
-        </p:nvCxnSpPr>
-        <p:spPr>
-          <a:xfrm>
-            <a:off x="10477500" y="6870700"/>
-            <a:ext cx="1016000" cy="0"/>
-          </a:xfrm>
-          <a:prstGeom prst="line">
-            <a:avLst/>
-          </a:prstGeom>
-          <a:ln w="25400">
-            <a:solidFill>
-              <a:srgbClr val="BFD8F2"/>
-            </a:solidFill>
-            <a:tailEnd type="arrow"/>
-          </a:ln>
-        </p:spPr>
-        <p:style>
-          <a:lnRef idx="2">
-            <a:schemeClr val="accent1"/>
-          </a:lnRef>
-          <a:fillRef idx="0">
-            <a:schemeClr val="accent1"/>
-          </a:fillRef>
-          <a:effectRef idx="1">
-            <a:schemeClr val="accent1"/>
-          </a:effectRef>
-          <a:fontRef idx="minor">
-            <a:schemeClr val="tx1"/>
-          </a:fontRef>
-        </p:style>
-      </p:cxnSp>
-      <p:sp>
-        <p:nvSpPr>
-          <p:cNvPr id="56" name="Elipse 55">
-            <a:extLst>
-              <a:ext uri="{FF2B5EF4-FFF2-40B4-BE49-F238E27FC236}">
-                <a16:creationId xmlns:a16="http://schemas.microsoft.com/office/drawing/2014/main" id="{04BA0994-D398-BE9A-6A7D-2FF03B966A61}"/>
-              </a:ext>
-            </a:extLst>
-          </p:cNvPr>
-          <p:cNvSpPr/>
-          <p:nvPr/>
-        </p:nvSpPr>
-        <p:spPr>
-          <a:xfrm>
-            <a:off x="11684000" y="6540500"/>
-            <a:ext cx="660400" cy="660400"/>
-          </a:xfrm>
-          <a:prstGeom prst="ellipse">
-            <a:avLst/>
-          </a:prstGeom>
-          <a:solidFill>
-            <a:srgbClr val="F5B400"/>
-          </a:solidFill>
-          <a:ln w="19050" cap="flat" cmpd="sng" algn="ctr">
-            <a:noFill/>
-            <a:prstDash val="solid"/>
-            <a:miter lim="800000"/>
-          </a:ln>
-          <a:effectLst/>
-          <a:extLst>
-            <a:ext uri="{91240B29-F687-4F45-9708-019B960494DF}">
-              <a14:hiddenLine xmlns:a14="http://schemas.microsoft.com/office/drawing/2010/main" w="19050" cap="flat" cmpd="sng" algn="ctr">
-                <a:solidFill>
-                  <a:schemeClr val="accent1">
-                    <a:shade val="15000"/>
-                  </a:schemeClr>
-                </a:solidFill>
-                <a:prstDash val="solid"/>
-                <a:miter lim="800000"/>
-              </a14:hiddenLine>
-            </a:ext>
-          </a:extLst>
-        </p:spPr>
-        <p:style>
-          <a:lnRef idx="2">
-            <a:schemeClr val="accent1">
-              <a:shade val="15000"/>
-            </a:schemeClr>
-          </a:lnRef>
-          <a:fillRef idx="1">
-            <a:schemeClr val="accent1"/>
-          </a:fillRef>
-          <a:effectRef idx="0">
-            <a:schemeClr val="accent1"/>
-          </a:effectRef>
-          <a:fontRef idx="minor">
-            <a:schemeClr val="lt1"/>
-          </a:fontRef>
-        </p:style>
-        <p:txBody>
-          <a:bodyPr rtlCol="0" anchor="ctr"/>
-          <a:lstStyle/>
-          <a:p>
-            <a:pPr algn="ctr"/>
-            <a:endParaRPr lang="es-GT"/>
-          </a:p>
-        </p:txBody>
-      </p:sp>
-      <p:sp>
-        <p:nvSpPr>
-          <p:cNvPr id="57" name="CuadroTexto 56">
-            <a:extLst>
-              <a:ext uri="{FF2B5EF4-FFF2-40B4-BE49-F238E27FC236}">
-                <a16:creationId xmlns:a16="http://schemas.microsoft.com/office/drawing/2014/main" id="{69F8D466-712F-7F0A-BB4C-5522D885E6A3}"/>
-              </a:ext>
-            </a:extLst>
-          </p:cNvPr>
-          <p:cNvSpPr txBox="1"/>
-          <p:nvPr/>
-        </p:nvSpPr>
-        <p:spPr>
-          <a:xfrm>
-            <a:off x="11899900" y="6604000"/>
-            <a:ext cx="228600" cy="430887"/>
-          </a:xfrm>
-          <a:prstGeom prst="rect">
-            <a:avLst/>
-          </a:prstGeom>
-          <a:noFill/>
-        </p:spPr>
-        <p:txBody>
-          <a:bodyPr vert="horz" lIns="0" tIns="0" rIns="0" bIns="0" rtlCol="0">
-            <a:spAutoFit/>
-          </a:bodyPr>
-          <a:lstStyle/>
-          <a:p>
-            <a:pPr algn="ctr"/>
-            <a:r>
-              <a:rPr lang="es-GT" sz="2800" b="1">
-                <a:solidFill>
-                  <a:srgbClr val="FFFFFF"/>
-                </a:solidFill>
-                <a:latin typeface="Aptos" panose="020B0004020202020204" pitchFamily="34" charset="0"/>
-              </a:rPr>
-              <a:t>•</a:t>
-            </a:r>
-          </a:p>
-        </p:txBody>
-      </p:sp>
-      <p:sp>
-        <p:nvSpPr>
-          <p:cNvPr id="58" name="CuadroTexto 57">
-            <a:extLst>
-              <a:ext uri="{FF2B5EF4-FFF2-40B4-BE49-F238E27FC236}">
-                <a16:creationId xmlns:a16="http://schemas.microsoft.com/office/drawing/2014/main" id="{74EFD71E-1546-BE11-C0DB-2E259F7411D7}"/>
-              </a:ext>
-            </a:extLst>
-          </p:cNvPr>
-          <p:cNvSpPr txBox="1"/>
-          <p:nvPr/>
-        </p:nvSpPr>
-        <p:spPr>
-          <a:xfrm>
-            <a:off x="11430000" y="7302500"/>
-            <a:ext cx="1168400" cy="307777"/>
-          </a:xfrm>
-          <a:prstGeom prst="rect">
-            <a:avLst/>
-          </a:prstGeom>
-          <a:noFill/>
-        </p:spPr>
-        <p:txBody>
-          <a:bodyPr vert="horz" lIns="0" tIns="0" rIns="0" bIns="0" rtlCol="0">
-            <a:spAutoFit/>
-          </a:bodyPr>
-          <a:lstStyle/>
-          <a:p>
-            <a:pPr algn="ctr"/>
-            <a:r>
-              <a:rPr lang="es-GT" sz="1000">
-                <a:solidFill>
-                  <a:srgbClr val="002D5A"/>
-                </a:solidFill>
-                <a:latin typeface="Aptos" panose="020B0004020202020204" pitchFamily="34" charset="0"/>
-              </a:rPr>
-              <a:t>Lanzamiento en proceso</a:t>
-            </a:r>
-          </a:p>
-        </p:txBody>
-      </p:sp>
-      <p:sp>
-        <p:nvSpPr>
-          <p:cNvPr id="59" name="Rectángulo 58">
-            <a:extLst>
-              <a:ext uri="{FF2B5EF4-FFF2-40B4-BE49-F238E27FC236}">
-                <a16:creationId xmlns:a16="http://schemas.microsoft.com/office/drawing/2014/main" id="{FADD20BB-03EE-3931-DAE0-2A26DA7150A2}"/>
+          <p:cNvPr id="32" name="Rectángulo 31">
+            <a:extLst>
+              <a:ext uri="{FF2B5EF4-FFF2-40B4-BE49-F238E27FC236}">
+                <a16:creationId xmlns:a16="http://schemas.microsoft.com/office/drawing/2014/main" id="{49A8465A-ED4A-6F5D-3F0F-338F3312180B}"/>
               </a:ext>
             </a:extLst>
           </p:cNvPr>
@@ -13653,10 +11904,10 @@
       </p:sp>
       <p:sp>
         <p:nvSpPr>
-          <p:cNvPr id="60" name="CuadroTexto 59">
-            <a:extLst>
-              <a:ext uri="{FF2B5EF4-FFF2-40B4-BE49-F238E27FC236}">
-                <a16:creationId xmlns:a16="http://schemas.microsoft.com/office/drawing/2014/main" id="{397CC213-D255-F48F-E354-BE5D9FC7928C}"/>
+          <p:cNvPr id="33" name="CuadroTexto 32">
+            <a:extLst>
+              <a:ext uri="{FF2B5EF4-FFF2-40B4-BE49-F238E27FC236}">
+                <a16:creationId xmlns:a16="http://schemas.microsoft.com/office/drawing/2014/main" id="{4EDCB799-EE0C-C7EB-677F-6297922249B8}"/>
               </a:ext>
             </a:extLst>
           </p:cNvPr>
@@ -13699,10 +11950,10 @@
       </p:sp>
       <p:sp>
         <p:nvSpPr>
-          <p:cNvPr id="61" name="CuadroTexto 60">
-            <a:extLst>
-              <a:ext uri="{FF2B5EF4-FFF2-40B4-BE49-F238E27FC236}">
-                <a16:creationId xmlns:a16="http://schemas.microsoft.com/office/drawing/2014/main" id="{D29A8479-0294-31CA-3CBB-978AA0751043}"/>
+          <p:cNvPr id="34" name="CuadroTexto 33">
+            <a:extLst>
+              <a:ext uri="{FF2B5EF4-FFF2-40B4-BE49-F238E27FC236}">
+                <a16:creationId xmlns:a16="http://schemas.microsoft.com/office/drawing/2014/main" id="{268144FA-A18E-B54D-081E-3F01F2B2341F}"/>
               </a:ext>
             </a:extLst>
           </p:cNvPr>
@@ -13744,10 +11995,213 @@
           </a:p>
         </p:txBody>
       </p:sp>
+      <p:sp>
+        <p:nvSpPr>
+          <p:cNvPr id="35" name="Rectángulo: esquinas redondeadas 34">
+            <a:extLst>
+              <a:ext uri="{FF2B5EF4-FFF2-40B4-BE49-F238E27FC236}">
+                <a16:creationId xmlns:a16="http://schemas.microsoft.com/office/drawing/2014/main" id="{37C664B2-CD6F-8095-727E-578BE93B4337}"/>
+              </a:ext>
+            </a:extLst>
+          </p:cNvPr>
+          <p:cNvSpPr/>
+          <p:nvPr/>
+        </p:nvSpPr>
+        <p:spPr>
+          <a:xfrm>
+            <a:off x="4826000" y="5238750"/>
+            <a:ext cx="9398000" cy="711200"/>
+          </a:xfrm>
+          <a:prstGeom prst="roundRect">
+            <a:avLst/>
+          </a:prstGeom>
+          <a:solidFill>
+            <a:srgbClr val="FFFFFF"/>
+          </a:solidFill>
+          <a:ln w="15875">
+            <a:solidFill>
+              <a:srgbClr val="BFD8F2"/>
+            </a:solidFill>
+          </a:ln>
+        </p:spPr>
+        <p:style>
+          <a:lnRef idx="2">
+            <a:schemeClr val="accent1">
+              <a:shade val="15000"/>
+            </a:schemeClr>
+          </a:lnRef>
+          <a:fillRef idx="1">
+            <a:schemeClr val="accent1"/>
+          </a:fillRef>
+          <a:effectRef idx="0">
+            <a:schemeClr val="accent1"/>
+          </a:effectRef>
+          <a:fontRef idx="minor">
+            <a:schemeClr val="lt1"/>
+          </a:fontRef>
+        </p:style>
+        <p:txBody>
+          <a:bodyPr rtlCol="0" anchor="ctr"/>
+          <a:lstStyle/>
+          <a:p>
+            <a:pPr algn="ctr"/>
+            <a:endParaRPr lang="es-GT"/>
+          </a:p>
+        </p:txBody>
+      </p:sp>
+      <p:sp>
+        <p:nvSpPr>
+          <p:cNvPr id="37" name="Rectángulo: esquinas redondeadas 36">
+            <a:extLst>
+              <a:ext uri="{FF2B5EF4-FFF2-40B4-BE49-F238E27FC236}">
+                <a16:creationId xmlns:a16="http://schemas.microsoft.com/office/drawing/2014/main" id="{949B7B44-89D2-8471-A718-DB8D678D0888}"/>
+              </a:ext>
+            </a:extLst>
+          </p:cNvPr>
+          <p:cNvSpPr/>
+          <p:nvPr/>
+        </p:nvSpPr>
+        <p:spPr>
+          <a:xfrm>
+            <a:off x="4953000" y="5327650"/>
+            <a:ext cx="381000" cy="381000"/>
+          </a:xfrm>
+          <a:prstGeom prst="roundRect">
+            <a:avLst/>
+          </a:prstGeom>
+          <a:solidFill>
+            <a:srgbClr val="EB7D00"/>
+          </a:solidFill>
+          <a:ln w="19050" cap="flat" cmpd="sng" algn="ctr">
+            <a:noFill/>
+            <a:prstDash val="solid"/>
+            <a:miter lim="800000"/>
+          </a:ln>
+          <a:effectLst/>
+          <a:extLst>
+            <a:ext uri="{91240B29-F687-4F45-9708-019B960494DF}">
+              <a14:hiddenLine xmlns:a14="http://schemas.microsoft.com/office/drawing/2010/main" w="19050" cap="flat" cmpd="sng" algn="ctr">
+                <a:solidFill>
+                  <a:schemeClr val="accent1">
+                    <a:shade val="15000"/>
+                  </a:schemeClr>
+                </a:solidFill>
+                <a:prstDash val="solid"/>
+                <a:miter lim="800000"/>
+              </a14:hiddenLine>
+            </a:ext>
+          </a:extLst>
+        </p:spPr>
+        <p:style>
+          <a:lnRef idx="2">
+            <a:schemeClr val="accent1">
+              <a:shade val="15000"/>
+            </a:schemeClr>
+          </a:lnRef>
+          <a:fillRef idx="1">
+            <a:schemeClr val="accent1"/>
+          </a:fillRef>
+          <a:effectRef idx="0">
+            <a:schemeClr val="accent1"/>
+          </a:effectRef>
+          <a:fontRef idx="minor">
+            <a:schemeClr val="lt1"/>
+          </a:fontRef>
+        </p:style>
+        <p:txBody>
+          <a:bodyPr rtlCol="0" anchor="ctr"/>
+          <a:lstStyle/>
+          <a:p>
+            <a:pPr algn="ctr"/>
+            <a:endParaRPr lang="es-GT"/>
+          </a:p>
+        </p:txBody>
+      </p:sp>
+      <p:sp>
+        <p:nvSpPr>
+          <p:cNvPr id="39" name="CuadroTexto 38">
+            <a:extLst>
+              <a:ext uri="{FF2B5EF4-FFF2-40B4-BE49-F238E27FC236}">
+                <a16:creationId xmlns:a16="http://schemas.microsoft.com/office/drawing/2014/main" id="{1B5B7CBA-425F-6482-6871-B6D30CBBFCFE}"/>
+              </a:ext>
+            </a:extLst>
+          </p:cNvPr>
+          <p:cNvSpPr txBox="1"/>
+          <p:nvPr/>
+        </p:nvSpPr>
+        <p:spPr>
+          <a:xfrm>
+            <a:off x="5029200" y="5391150"/>
+            <a:ext cx="228600" cy="169277"/>
+          </a:xfrm>
+          <a:prstGeom prst="rect">
+            <a:avLst/>
+          </a:prstGeom>
+          <a:noFill/>
+        </p:spPr>
+        <p:txBody>
+          <a:bodyPr vert="horz" lIns="0" tIns="0" rIns="0" bIns="0" rtlCol="0">
+            <a:spAutoFit/>
+          </a:bodyPr>
+          <a:lstStyle/>
+          <a:p>
+            <a:pPr algn="ctr"/>
+            <a:r>
+              <a:rPr lang="es-GT" sz="1100" b="1">
+                <a:solidFill>
+                  <a:srgbClr val="FFFFFF"/>
+                </a:solidFill>
+                <a:latin typeface="Aptos" panose="020B0004020202020204" pitchFamily="34" charset="0"/>
+              </a:rPr>
+              <a:t>13</a:t>
+            </a:r>
+          </a:p>
+        </p:txBody>
+      </p:sp>
+      <p:sp>
+        <p:nvSpPr>
+          <p:cNvPr id="41" name="CuadroTexto 40">
+            <a:extLst>
+              <a:ext uri="{FF2B5EF4-FFF2-40B4-BE49-F238E27FC236}">
+                <a16:creationId xmlns:a16="http://schemas.microsoft.com/office/drawing/2014/main" id="{E064D682-3426-8311-9784-BE3141C6F207}"/>
+              </a:ext>
+            </a:extLst>
+          </p:cNvPr>
+          <p:cNvSpPr txBox="1"/>
+          <p:nvPr/>
+        </p:nvSpPr>
+        <p:spPr>
+          <a:xfrm>
+            <a:off x="5511800" y="5327650"/>
+            <a:ext cx="8559800" cy="184666"/>
+          </a:xfrm>
+          <a:prstGeom prst="rect">
+            <a:avLst/>
+          </a:prstGeom>
+          <a:noFill/>
+        </p:spPr>
+        <p:txBody>
+          <a:bodyPr vert="horz" lIns="0" tIns="0" rIns="0" bIns="0" rtlCol="0">
+            <a:spAutoFit/>
+          </a:bodyPr>
+          <a:lstStyle/>
+          <a:p>
+            <a:r>
+              <a:rPr lang="es-GT" sz="1200" dirty="0">
+                <a:solidFill>
+                  <a:srgbClr val="002D5A"/>
+                </a:solidFill>
+                <a:latin typeface="Aptos" panose="020B0004020202020204" pitchFamily="34" charset="0"/>
+              </a:rPr>
+              <a:t>Permiso de ingreso a instalaciones del Aeropuerto Internacional La Aurora</a:t>
+            </a:r>
+          </a:p>
+        </p:txBody>
+      </p:sp>
     </p:spTree>
     <p:extLst>
       <p:ext uri="{BB962C8B-B14F-4D97-AF65-F5344CB8AC3E}">
-        <p14:creationId xmlns:p14="http://schemas.microsoft.com/office/powerpoint/2010/main" val="2234435378"/>
+        <p14:creationId xmlns:p14="http://schemas.microsoft.com/office/powerpoint/2010/main" val="3774310172"/>
       </p:ext>
     </p:extLst>
   </p:cSld>
@@ -14201,13 +12655,13 @@
           <a:p>
             <a:pPr algn="ctr"/>
             <a:r>
-              <a:rPr lang="es-GT" sz="1100" b="1">
+              <a:rPr lang="es-GT" sz="1100" b="1" dirty="0">
                 <a:solidFill>
                   <a:srgbClr val="FFFFFF"/>
                 </a:solidFill>
                 <a:latin typeface="Aptos" panose="020B0004020202020204" pitchFamily="34" charset="0"/>
               </a:rPr>
-              <a:t>29% Y 14% DE AVANCE</a:t>
+              <a:t>50% DE AVANCE</a:t>
             </a:r>
           </a:p>
         </p:txBody>
@@ -14226,7 +12680,7 @@
         </p:nvSpPr>
         <p:spPr>
           <a:xfrm>
-            <a:off x="1117600" y="3175000"/>
+            <a:off x="1397000" y="2603500"/>
             <a:ext cx="2159000" cy="2159000"/>
           </a:xfrm>
           <a:prstGeom prst="roundRect">
@@ -14280,7 +12734,7 @@
         </p:nvSpPr>
         <p:spPr>
           <a:xfrm>
-            <a:off x="1397000" y="3454400"/>
+            <a:off x="1676400" y="2882900"/>
             <a:ext cx="1600200" cy="1600200"/>
           </a:xfrm>
           <a:prstGeom prst="ellipse">
@@ -14348,7 +12802,7 @@
         </p:nvSpPr>
         <p:spPr>
           <a:xfrm>
-            <a:off x="1676400" y="3733800"/>
+            <a:off x="1955800" y="3162300"/>
             <a:ext cx="1041400" cy="1041400"/>
           </a:xfrm>
           <a:prstGeom prst="ellipse">
@@ -14416,7 +12870,7 @@
         </p:nvSpPr>
         <p:spPr>
           <a:xfrm>
-            <a:off x="1498600" y="3835400"/>
+            <a:off x="1778000" y="3263900"/>
             <a:ext cx="1397000" cy="461665"/>
           </a:xfrm>
           <a:prstGeom prst="rect">
@@ -14432,13 +12886,13 @@
           <a:p>
             <a:pPr algn="ctr"/>
             <a:r>
-              <a:rPr lang="es-GT" sz="3000" b="1">
+              <a:rPr lang="es-GT" sz="3000" b="1" dirty="0">
                 <a:solidFill>
                   <a:srgbClr val="001F44"/>
                 </a:solidFill>
                 <a:latin typeface="Aptos" panose="020B0004020202020204" pitchFamily="34" charset="0"/>
               </a:rPr>
-              <a:t>5</a:t>
+              <a:t>8</a:t>
             </a:r>
           </a:p>
         </p:txBody>
@@ -14457,7 +12911,7 @@
         </p:nvSpPr>
         <p:spPr>
           <a:xfrm>
-            <a:off x="1435100" y="4445000"/>
+            <a:off x="1714500" y="3873500"/>
             <a:ext cx="1524000" cy="184666"/>
           </a:xfrm>
           <a:prstGeom prst="rect">
@@ -14498,7 +12952,7 @@
         </p:nvSpPr>
         <p:spPr>
           <a:xfrm>
-            <a:off x="4826000" y="2095500"/>
+            <a:off x="5791200" y="1143000"/>
             <a:ext cx="9652000" cy="609600"/>
           </a:xfrm>
           <a:prstGeom prst="roundRect">
@@ -14552,7 +13006,7 @@
         </p:nvSpPr>
         <p:spPr>
           <a:xfrm>
-            <a:off x="4953000" y="2184400"/>
+            <a:off x="5918200" y="1231900"/>
             <a:ext cx="381000" cy="381000"/>
           </a:xfrm>
           <a:prstGeom prst="roundRect">
@@ -14620,7 +13074,7 @@
         </p:nvSpPr>
         <p:spPr>
           <a:xfrm>
-            <a:off x="5029200" y="2247900"/>
+            <a:off x="5994400" y="1295400"/>
             <a:ext cx="228600" cy="169277"/>
           </a:xfrm>
           <a:prstGeom prst="rect">
@@ -14661,7 +13115,7 @@
         </p:nvSpPr>
         <p:spPr>
           <a:xfrm>
-            <a:off x="5511800" y="2184400"/>
+            <a:off x="6477000" y="1231900"/>
             <a:ext cx="8813800" cy="184666"/>
           </a:xfrm>
           <a:prstGeom prst="rect">
@@ -14701,7 +13155,7 @@
         </p:nvSpPr>
         <p:spPr>
           <a:xfrm>
-            <a:off x="4826000" y="2781300"/>
+            <a:off x="5791200" y="1828800"/>
             <a:ext cx="9652000" cy="609600"/>
           </a:xfrm>
           <a:prstGeom prst="roundRect">
@@ -14755,7 +13209,7 @@
         </p:nvSpPr>
         <p:spPr>
           <a:xfrm>
-            <a:off x="4953000" y="2870200"/>
+            <a:off x="5918200" y="1917700"/>
             <a:ext cx="381000" cy="381000"/>
           </a:xfrm>
           <a:prstGeom prst="roundRect">
@@ -14823,7 +13277,7 @@
         </p:nvSpPr>
         <p:spPr>
           <a:xfrm>
-            <a:off x="5029200" y="2933700"/>
+            <a:off x="5994400" y="1981200"/>
             <a:ext cx="228600" cy="169277"/>
           </a:xfrm>
           <a:prstGeom prst="rect">
@@ -14864,7 +13318,7 @@
         </p:nvSpPr>
         <p:spPr>
           <a:xfrm>
-            <a:off x="5511800" y="2870200"/>
+            <a:off x="6477000" y="1917700"/>
             <a:ext cx="8813800" cy="184666"/>
           </a:xfrm>
           <a:prstGeom prst="rect">
@@ -14904,7 +13358,7 @@
         </p:nvSpPr>
         <p:spPr>
           <a:xfrm>
-            <a:off x="4826000" y="3467100"/>
+            <a:off x="5791200" y="2514600"/>
             <a:ext cx="9652000" cy="609600"/>
           </a:xfrm>
           <a:prstGeom prst="roundRect">
@@ -14958,7 +13412,7 @@
         </p:nvSpPr>
         <p:spPr>
           <a:xfrm>
-            <a:off x="4953000" y="3556000"/>
+            <a:off x="5918200" y="2603500"/>
             <a:ext cx="381000" cy="381000"/>
           </a:xfrm>
           <a:prstGeom prst="roundRect">
@@ -15026,7 +13480,7 @@
         </p:nvSpPr>
         <p:spPr>
           <a:xfrm>
-            <a:off x="5029200" y="3619500"/>
+            <a:off x="5994400" y="2667000"/>
             <a:ext cx="228600" cy="169277"/>
           </a:xfrm>
           <a:prstGeom prst="rect">
@@ -15067,7 +13521,7 @@
         </p:nvSpPr>
         <p:spPr>
           <a:xfrm>
-            <a:off x="5511800" y="3556000"/>
+            <a:off x="6477000" y="2603500"/>
             <a:ext cx="8813800" cy="184666"/>
           </a:xfrm>
           <a:prstGeom prst="rect">
@@ -15113,7 +13567,7 @@
         </p:nvSpPr>
         <p:spPr>
           <a:xfrm>
-            <a:off x="4826000" y="4152900"/>
+            <a:off x="5791200" y="3200400"/>
             <a:ext cx="9652000" cy="609600"/>
           </a:xfrm>
           <a:prstGeom prst="roundRect">
@@ -15167,7 +13621,7 @@
         </p:nvSpPr>
         <p:spPr>
           <a:xfrm>
-            <a:off x="4953000" y="4241800"/>
+            <a:off x="5918200" y="3289300"/>
             <a:ext cx="381000" cy="381000"/>
           </a:xfrm>
           <a:prstGeom prst="roundRect">
@@ -15235,7 +13689,7 @@
         </p:nvSpPr>
         <p:spPr>
           <a:xfrm>
-            <a:off x="5029200" y="4305300"/>
+            <a:off x="5994400" y="3352800"/>
             <a:ext cx="228600" cy="169277"/>
           </a:xfrm>
           <a:prstGeom prst="rect">
@@ -15276,7 +13730,7 @@
         </p:nvSpPr>
         <p:spPr>
           <a:xfrm>
-            <a:off x="5511800" y="4241800"/>
+            <a:off x="6477000" y="3289300"/>
             <a:ext cx="8813800" cy="184666"/>
           </a:xfrm>
           <a:prstGeom prst="rect">
@@ -15322,7 +13776,7 @@
         </p:nvSpPr>
         <p:spPr>
           <a:xfrm>
-            <a:off x="4826000" y="4838700"/>
+            <a:off x="5791200" y="3886200"/>
             <a:ext cx="9652000" cy="609600"/>
           </a:xfrm>
           <a:prstGeom prst="roundRect">
@@ -15376,7 +13830,7 @@
         </p:nvSpPr>
         <p:spPr>
           <a:xfrm>
-            <a:off x="4953000" y="4927600"/>
+            <a:off x="5918200" y="3975100"/>
             <a:ext cx="381000" cy="381000"/>
           </a:xfrm>
           <a:prstGeom prst="roundRect">
@@ -15444,7 +13898,7 @@
         </p:nvSpPr>
         <p:spPr>
           <a:xfrm>
-            <a:off x="5029200" y="4991100"/>
+            <a:off x="5994400" y="4038600"/>
             <a:ext cx="228600" cy="169277"/>
           </a:xfrm>
           <a:prstGeom prst="rect">
@@ -15473,46 +13927,6 @@
       </p:sp>
       <p:sp>
         <p:nvSpPr>
-          <p:cNvPr id="35" name="CuadroTexto 34">
-            <a:extLst>
-              <a:ext uri="{FF2B5EF4-FFF2-40B4-BE49-F238E27FC236}">
-                <a16:creationId xmlns:a16="http://schemas.microsoft.com/office/drawing/2014/main" id="{5F519EA3-71D8-3D4D-650D-8DD2845C01F9}"/>
-              </a:ext>
-            </a:extLst>
-          </p:cNvPr>
-          <p:cNvSpPr txBox="1"/>
-          <p:nvPr/>
-        </p:nvSpPr>
-        <p:spPr>
-          <a:xfrm>
-            <a:off x="5511800" y="4927600"/>
-            <a:ext cx="8813800" cy="184666"/>
-          </a:xfrm>
-          <a:prstGeom prst="rect">
-            <a:avLst/>
-          </a:prstGeom>
-          <a:noFill/>
-        </p:spPr>
-        <p:txBody>
-          <a:bodyPr vert="horz" lIns="0" tIns="0" rIns="0" bIns="0" rtlCol="0">
-            <a:spAutoFit/>
-          </a:bodyPr>
-          <a:lstStyle/>
-          <a:p>
-            <a:r>
-              <a:rPr lang="es-GT" sz="1200">
-                <a:solidFill>
-                  <a:srgbClr val="002D5A"/>
-                </a:solidFill>
-                <a:latin typeface="Aptos" panose="020B0004020202020204" pitchFamily="34" charset="0"/>
-              </a:rPr>
-              <a:t>Permiso de ingreso a instalaciones AILA</a:t>
-            </a:r>
-          </a:p>
-        </p:txBody>
-      </p:sp>
-      <p:sp>
-        <p:nvSpPr>
           <p:cNvPr id="36" name="Rectángulo: esquinas redondeadas 35">
             <a:extLst>
               <a:ext uri="{FF2B5EF4-FFF2-40B4-BE49-F238E27FC236}">
@@ -15525,8 +13939,8 @@
         </p:nvSpPr>
         <p:spPr>
           <a:xfrm>
-            <a:off x="1143000" y="5969000"/>
-            <a:ext cx="13081000" cy="1397000"/>
+            <a:off x="698501" y="7207602"/>
+            <a:ext cx="14757400" cy="1238805"/>
           </a:xfrm>
           <a:prstGeom prst="roundRect">
             <a:avLst/>
@@ -15579,8 +13993,8 @@
         </p:nvSpPr>
         <p:spPr>
           <a:xfrm>
-            <a:off x="1143000" y="5969000"/>
-            <a:ext cx="88900" cy="1397000"/>
+            <a:off x="698500" y="7207602"/>
+            <a:ext cx="152159" cy="1238805"/>
           </a:xfrm>
           <a:prstGeom prst="rect">
             <a:avLst/>
@@ -15647,8 +14061,8 @@
         </p:nvSpPr>
         <p:spPr>
           <a:xfrm>
-            <a:off x="1422400" y="6197600"/>
-            <a:ext cx="12573000" cy="261610"/>
+            <a:off x="977901" y="7436202"/>
+            <a:ext cx="14184294" cy="261610"/>
           </a:xfrm>
           <a:prstGeom prst="rect">
             <a:avLst/>
@@ -15656,7 +14070,7 @@
           <a:noFill/>
         </p:spPr>
         <p:txBody>
-          <a:bodyPr vert="horz" lIns="0" tIns="0" rIns="0" bIns="0" rtlCol="0">
+          <a:bodyPr vert="horz" wrap="square" lIns="0" tIns="0" rIns="0" bIns="0" rtlCol="0">
             <a:spAutoFit/>
           </a:bodyPr>
           <a:lstStyle/>
@@ -15687,8 +14101,8 @@
         </p:nvSpPr>
         <p:spPr>
           <a:xfrm>
-            <a:off x="1422400" y="6667500"/>
-            <a:ext cx="12547600" cy="430887"/>
+            <a:off x="977901" y="7906104"/>
+            <a:ext cx="14155640" cy="215444"/>
           </a:xfrm>
           <a:prstGeom prst="rect">
             <a:avLst/>
@@ -15696,21 +14110,21 @@
           <a:noFill/>
         </p:spPr>
         <p:txBody>
-          <a:bodyPr vert="horz" lIns="0" tIns="0" rIns="0" bIns="0" rtlCol="0">
+          <a:bodyPr vert="horz" wrap="square" lIns="0" tIns="0" rIns="0" bIns="0" rtlCol="0">
             <a:spAutoFit/>
           </a:bodyPr>
           <a:lstStyle/>
           <a:p>
             <a:r>
-              <a:rPr lang="es-ES" sz="1400">
+              <a:rPr lang="es-ES" sz="1400" dirty="0">
                 <a:solidFill>
                   <a:srgbClr val="002D5A"/>
                 </a:solidFill>
                 <a:latin typeface="Aptos" panose="020B0004020202020204" pitchFamily="34" charset="0"/>
               </a:rPr>
-              <a:t>Trámites 6 al 9: análisis finalizado y codificación en proceso. Trámite 10: análisis y codificación en proceso. Pruebas, implementación, capacitación y lanzamiento aún no iniciados.</a:t>
-            </a:r>
-            <a:endParaRPr lang="es-GT" sz="1400">
+              <a:t>Trámites 6 al 9: análisis finalizado y codificación en proceso. Trámite 10 al 13: análisis y codificación en proceso. Pruebas, implementación, capacitación y lanzamiento aún no iniciados.</a:t>
+            </a:r>
+            <a:endParaRPr lang="es-GT" sz="1400" dirty="0">
               <a:solidFill>
                 <a:srgbClr val="002D5A"/>
               </a:solidFill>
@@ -15877,6 +14291,870 @@
               </a:solidFill>
               <a:latin typeface="Aptos" panose="020B0004020202020204" pitchFamily="34" charset="0"/>
             </a:endParaRPr>
+          </a:p>
+        </p:txBody>
+      </p:sp>
+      <p:sp>
+        <p:nvSpPr>
+          <p:cNvPr id="43" name="Rectángulo: esquinas redondeadas 42">
+            <a:extLst>
+              <a:ext uri="{FF2B5EF4-FFF2-40B4-BE49-F238E27FC236}">
+                <a16:creationId xmlns:a16="http://schemas.microsoft.com/office/drawing/2014/main" id="{9C8C6D6F-6D0C-BAE7-D287-88569A1680E6}"/>
+              </a:ext>
+            </a:extLst>
+          </p:cNvPr>
+          <p:cNvSpPr/>
+          <p:nvPr/>
+        </p:nvSpPr>
+        <p:spPr>
+          <a:xfrm>
+            <a:off x="5791200" y="4640036"/>
+            <a:ext cx="9652000" cy="609600"/>
+          </a:xfrm>
+          <a:prstGeom prst="roundRect">
+            <a:avLst/>
+          </a:prstGeom>
+          <a:solidFill>
+            <a:srgbClr val="FFFFFF"/>
+          </a:solidFill>
+          <a:ln w="15875">
+            <a:solidFill>
+              <a:srgbClr val="BFD8F2"/>
+            </a:solidFill>
+          </a:ln>
+        </p:spPr>
+        <p:style>
+          <a:lnRef idx="2">
+            <a:schemeClr val="accent1">
+              <a:shade val="15000"/>
+            </a:schemeClr>
+          </a:lnRef>
+          <a:fillRef idx="1">
+            <a:schemeClr val="accent1"/>
+          </a:fillRef>
+          <a:effectRef idx="0">
+            <a:schemeClr val="accent1"/>
+          </a:effectRef>
+          <a:fontRef idx="minor">
+            <a:schemeClr val="lt1"/>
+          </a:fontRef>
+        </p:style>
+        <p:txBody>
+          <a:bodyPr rtlCol="0" anchor="ctr"/>
+          <a:lstStyle/>
+          <a:p>
+            <a:pPr algn="ctr"/>
+            <a:endParaRPr lang="es-GT"/>
+          </a:p>
+        </p:txBody>
+      </p:sp>
+      <p:sp>
+        <p:nvSpPr>
+          <p:cNvPr id="45" name="Rectángulo: esquinas redondeadas 44">
+            <a:extLst>
+              <a:ext uri="{FF2B5EF4-FFF2-40B4-BE49-F238E27FC236}">
+                <a16:creationId xmlns:a16="http://schemas.microsoft.com/office/drawing/2014/main" id="{6E93482E-EB10-F4BD-62CB-857B443A6C18}"/>
+              </a:ext>
+            </a:extLst>
+          </p:cNvPr>
+          <p:cNvSpPr/>
+          <p:nvPr/>
+        </p:nvSpPr>
+        <p:spPr>
+          <a:xfrm>
+            <a:off x="5918200" y="4728936"/>
+            <a:ext cx="371231" cy="326571"/>
+          </a:xfrm>
+          <a:prstGeom prst="roundRect">
+            <a:avLst/>
+          </a:prstGeom>
+          <a:solidFill>
+            <a:srgbClr val="FFC000"/>
+          </a:solidFill>
+          <a:ln w="19050" cap="flat" cmpd="sng" algn="ctr">
+            <a:noFill/>
+            <a:prstDash val="solid"/>
+            <a:miter lim="800000"/>
+          </a:ln>
+          <a:effectLst/>
+        </p:spPr>
+        <p:style>
+          <a:lnRef idx="2">
+            <a:schemeClr val="accent1">
+              <a:shade val="15000"/>
+            </a:schemeClr>
+          </a:lnRef>
+          <a:fillRef idx="1">
+            <a:schemeClr val="accent1"/>
+          </a:fillRef>
+          <a:effectRef idx="0">
+            <a:schemeClr val="accent1"/>
+          </a:effectRef>
+          <a:fontRef idx="minor">
+            <a:schemeClr val="lt1"/>
+          </a:fontRef>
+        </p:style>
+        <p:txBody>
+          <a:bodyPr rtlCol="0" anchor="ctr"/>
+          <a:lstStyle/>
+          <a:p>
+            <a:pPr algn="ctr"/>
+            <a:endParaRPr lang="es-GT">
+              <a:solidFill>
+                <a:srgbClr val="FFC000"/>
+              </a:solidFill>
+            </a:endParaRPr>
+          </a:p>
+        </p:txBody>
+      </p:sp>
+      <p:sp>
+        <p:nvSpPr>
+          <p:cNvPr id="47" name="CuadroTexto 46">
+            <a:extLst>
+              <a:ext uri="{FF2B5EF4-FFF2-40B4-BE49-F238E27FC236}">
+                <a16:creationId xmlns:a16="http://schemas.microsoft.com/office/drawing/2014/main" id="{8BD23445-5F31-1085-3A9D-5E996AFAAEAA}"/>
+              </a:ext>
+            </a:extLst>
+          </p:cNvPr>
+          <p:cNvSpPr txBox="1"/>
+          <p:nvPr/>
+        </p:nvSpPr>
+        <p:spPr>
+          <a:xfrm>
+            <a:off x="5994400" y="4792436"/>
+            <a:ext cx="222738" cy="169277"/>
+          </a:xfrm>
+          <a:prstGeom prst="rect">
+            <a:avLst/>
+          </a:prstGeom>
+          <a:noFill/>
+        </p:spPr>
+        <p:txBody>
+          <a:bodyPr vert="horz" wrap="square" lIns="0" tIns="0" rIns="0" bIns="0" rtlCol="0">
+            <a:spAutoFit/>
+          </a:bodyPr>
+          <a:lstStyle/>
+          <a:p>
+            <a:pPr algn="ctr"/>
+            <a:r>
+              <a:rPr lang="es-GT" sz="1100" b="1" dirty="0">
+                <a:solidFill>
+                  <a:srgbClr val="FFFFFF"/>
+                </a:solidFill>
+                <a:latin typeface="Aptos" panose="020B0004020202020204" pitchFamily="34" charset="0"/>
+              </a:rPr>
+              <a:t>11</a:t>
+            </a:r>
+          </a:p>
+        </p:txBody>
+      </p:sp>
+      <p:sp>
+        <p:nvSpPr>
+          <p:cNvPr id="49" name="CuadroTexto 48">
+            <a:extLst>
+              <a:ext uri="{FF2B5EF4-FFF2-40B4-BE49-F238E27FC236}">
+                <a16:creationId xmlns:a16="http://schemas.microsoft.com/office/drawing/2014/main" id="{2DECB719-E5F7-EC5E-795A-42BC380A7444}"/>
+              </a:ext>
+            </a:extLst>
+          </p:cNvPr>
+          <p:cNvSpPr txBox="1"/>
+          <p:nvPr/>
+        </p:nvSpPr>
+        <p:spPr>
+          <a:xfrm>
+            <a:off x="6477000" y="4728936"/>
+            <a:ext cx="8835292" cy="184666"/>
+          </a:xfrm>
+          <a:prstGeom prst="rect">
+            <a:avLst/>
+          </a:prstGeom>
+          <a:noFill/>
+        </p:spPr>
+        <p:txBody>
+          <a:bodyPr vert="horz" wrap="square" lIns="0" tIns="0" rIns="0" bIns="0" rtlCol="0">
+            <a:spAutoFit/>
+          </a:bodyPr>
+          <a:lstStyle/>
+          <a:p>
+            <a:r>
+              <a:rPr lang="es-ES" sz="1200">
+                <a:solidFill>
+                  <a:srgbClr val="002D5A"/>
+                </a:solidFill>
+                <a:latin typeface="Aptos" panose="020B0004020202020204" pitchFamily="34" charset="0"/>
+              </a:rPr>
+              <a:t>Certificado de Explotación de una Línea Aérea</a:t>
+            </a:r>
+            <a:endParaRPr lang="es-GT" sz="1200">
+              <a:solidFill>
+                <a:srgbClr val="002D5A"/>
+              </a:solidFill>
+              <a:latin typeface="Aptos" panose="020B0004020202020204" pitchFamily="34" charset="0"/>
+            </a:endParaRPr>
+          </a:p>
+        </p:txBody>
+      </p:sp>
+      <p:sp>
+        <p:nvSpPr>
+          <p:cNvPr id="51" name="Rectángulo: esquinas redondeadas 50">
+            <a:extLst>
+              <a:ext uri="{FF2B5EF4-FFF2-40B4-BE49-F238E27FC236}">
+                <a16:creationId xmlns:a16="http://schemas.microsoft.com/office/drawing/2014/main" id="{5C4437E7-E967-E2FC-8E70-607D2C3568B2}"/>
+              </a:ext>
+            </a:extLst>
+          </p:cNvPr>
+          <p:cNvSpPr/>
+          <p:nvPr/>
+        </p:nvSpPr>
+        <p:spPr>
+          <a:xfrm>
+            <a:off x="5791200" y="5388553"/>
+            <a:ext cx="9652000" cy="609600"/>
+          </a:xfrm>
+          <a:prstGeom prst="roundRect">
+            <a:avLst/>
+          </a:prstGeom>
+          <a:solidFill>
+            <a:srgbClr val="FFFFFF"/>
+          </a:solidFill>
+          <a:ln w="15875">
+            <a:solidFill>
+              <a:srgbClr val="BFD8F2"/>
+            </a:solidFill>
+          </a:ln>
+        </p:spPr>
+        <p:style>
+          <a:lnRef idx="2">
+            <a:schemeClr val="accent1">
+              <a:shade val="15000"/>
+            </a:schemeClr>
+          </a:lnRef>
+          <a:fillRef idx="1">
+            <a:schemeClr val="accent1"/>
+          </a:fillRef>
+          <a:effectRef idx="0">
+            <a:schemeClr val="accent1"/>
+          </a:effectRef>
+          <a:fontRef idx="minor">
+            <a:schemeClr val="lt1"/>
+          </a:fontRef>
+        </p:style>
+        <p:txBody>
+          <a:bodyPr rtlCol="0" anchor="ctr"/>
+          <a:lstStyle/>
+          <a:p>
+            <a:pPr algn="ctr"/>
+            <a:endParaRPr lang="es-GT"/>
+          </a:p>
+        </p:txBody>
+      </p:sp>
+      <p:sp>
+        <p:nvSpPr>
+          <p:cNvPr id="53" name="Rectángulo: esquinas redondeadas 52">
+            <a:extLst>
+              <a:ext uri="{FF2B5EF4-FFF2-40B4-BE49-F238E27FC236}">
+                <a16:creationId xmlns:a16="http://schemas.microsoft.com/office/drawing/2014/main" id="{68AF3C5D-B2B2-A9AA-AD1F-24193A474DD1}"/>
+              </a:ext>
+            </a:extLst>
+          </p:cNvPr>
+          <p:cNvSpPr/>
+          <p:nvPr/>
+        </p:nvSpPr>
+        <p:spPr>
+          <a:xfrm>
+            <a:off x="5918200" y="5477453"/>
+            <a:ext cx="371231" cy="326571"/>
+          </a:xfrm>
+          <a:prstGeom prst="roundRect">
+            <a:avLst/>
+          </a:prstGeom>
+          <a:solidFill>
+            <a:srgbClr val="FFC000"/>
+          </a:solidFill>
+          <a:ln w="19050" cap="flat" cmpd="sng" algn="ctr">
+            <a:noFill/>
+            <a:prstDash val="solid"/>
+            <a:miter lim="800000"/>
+          </a:ln>
+          <a:effectLst/>
+        </p:spPr>
+        <p:style>
+          <a:lnRef idx="2">
+            <a:schemeClr val="accent1">
+              <a:shade val="15000"/>
+            </a:schemeClr>
+          </a:lnRef>
+          <a:fillRef idx="1">
+            <a:schemeClr val="accent1"/>
+          </a:fillRef>
+          <a:effectRef idx="0">
+            <a:schemeClr val="accent1"/>
+          </a:effectRef>
+          <a:fontRef idx="minor">
+            <a:schemeClr val="lt1"/>
+          </a:fontRef>
+        </p:style>
+        <p:txBody>
+          <a:bodyPr rtlCol="0" anchor="ctr"/>
+          <a:lstStyle/>
+          <a:p>
+            <a:pPr algn="ctr"/>
+            <a:endParaRPr lang="es-GT"/>
+          </a:p>
+        </p:txBody>
+      </p:sp>
+      <p:sp>
+        <p:nvSpPr>
+          <p:cNvPr id="55" name="CuadroTexto 54">
+            <a:extLst>
+              <a:ext uri="{FF2B5EF4-FFF2-40B4-BE49-F238E27FC236}">
+                <a16:creationId xmlns:a16="http://schemas.microsoft.com/office/drawing/2014/main" id="{C4D5A4F4-6932-E132-0350-559A41D66694}"/>
+              </a:ext>
+            </a:extLst>
+          </p:cNvPr>
+          <p:cNvSpPr txBox="1"/>
+          <p:nvPr/>
+        </p:nvSpPr>
+        <p:spPr>
+          <a:xfrm>
+            <a:off x="5994400" y="5540953"/>
+            <a:ext cx="222738" cy="169277"/>
+          </a:xfrm>
+          <a:prstGeom prst="rect">
+            <a:avLst/>
+          </a:prstGeom>
+          <a:noFill/>
+        </p:spPr>
+        <p:txBody>
+          <a:bodyPr vert="horz" wrap="square" lIns="0" tIns="0" rIns="0" bIns="0" rtlCol="0">
+            <a:spAutoFit/>
+          </a:bodyPr>
+          <a:lstStyle/>
+          <a:p>
+            <a:pPr algn="ctr"/>
+            <a:r>
+              <a:rPr lang="es-GT" sz="1100" b="1" dirty="0">
+                <a:solidFill>
+                  <a:srgbClr val="FFFFFF"/>
+                </a:solidFill>
+                <a:latin typeface="Aptos" panose="020B0004020202020204" pitchFamily="34" charset="0"/>
+              </a:rPr>
+              <a:t>12</a:t>
+            </a:r>
+          </a:p>
+        </p:txBody>
+      </p:sp>
+      <p:sp>
+        <p:nvSpPr>
+          <p:cNvPr id="57" name="CuadroTexto 56">
+            <a:extLst>
+              <a:ext uri="{FF2B5EF4-FFF2-40B4-BE49-F238E27FC236}">
+                <a16:creationId xmlns:a16="http://schemas.microsoft.com/office/drawing/2014/main" id="{C6DF0FE2-6B98-4014-B275-66E5F288C085}"/>
+              </a:ext>
+            </a:extLst>
+          </p:cNvPr>
+          <p:cNvSpPr txBox="1"/>
+          <p:nvPr/>
+        </p:nvSpPr>
+        <p:spPr>
+          <a:xfrm>
+            <a:off x="6477000" y="5477453"/>
+            <a:ext cx="8835292" cy="184666"/>
+          </a:xfrm>
+          <a:prstGeom prst="rect">
+            <a:avLst/>
+          </a:prstGeom>
+          <a:noFill/>
+        </p:spPr>
+        <p:txBody>
+          <a:bodyPr vert="horz" wrap="square" lIns="0" tIns="0" rIns="0" bIns="0" rtlCol="0">
+            <a:spAutoFit/>
+          </a:bodyPr>
+          <a:lstStyle/>
+          <a:p>
+            <a:r>
+              <a:rPr lang="es-ES" sz="1200">
+                <a:solidFill>
+                  <a:srgbClr val="002D5A"/>
+                </a:solidFill>
+                <a:latin typeface="Aptos" panose="020B0004020202020204" pitchFamily="34" charset="0"/>
+              </a:rPr>
+              <a:t>Certificado de Explotación a trabajos aéreos/Servicios Auxiliares</a:t>
+            </a:r>
+            <a:endParaRPr lang="es-GT" sz="1200">
+              <a:solidFill>
+                <a:srgbClr val="002D5A"/>
+              </a:solidFill>
+              <a:latin typeface="Aptos" panose="020B0004020202020204" pitchFamily="34" charset="0"/>
+            </a:endParaRPr>
+          </a:p>
+        </p:txBody>
+      </p:sp>
+      <p:sp>
+        <p:nvSpPr>
+          <p:cNvPr id="59" name="Rectángulo: esquinas redondeadas 58">
+            <a:extLst>
+              <a:ext uri="{FF2B5EF4-FFF2-40B4-BE49-F238E27FC236}">
+                <a16:creationId xmlns:a16="http://schemas.microsoft.com/office/drawing/2014/main" id="{3A558CA0-7CC7-CB1C-29D9-C98B6EBAE431}"/>
+              </a:ext>
+            </a:extLst>
+          </p:cNvPr>
+          <p:cNvSpPr/>
+          <p:nvPr/>
+        </p:nvSpPr>
+        <p:spPr>
+          <a:xfrm>
+            <a:off x="5791200" y="6204466"/>
+            <a:ext cx="9652000" cy="609600"/>
+          </a:xfrm>
+          <a:prstGeom prst="roundRect">
+            <a:avLst/>
+          </a:prstGeom>
+          <a:solidFill>
+            <a:srgbClr val="FFFFFF"/>
+          </a:solidFill>
+          <a:ln w="15875">
+            <a:solidFill>
+              <a:srgbClr val="BFD8F2"/>
+            </a:solidFill>
+          </a:ln>
+        </p:spPr>
+        <p:style>
+          <a:lnRef idx="2">
+            <a:schemeClr val="accent1">
+              <a:shade val="15000"/>
+            </a:schemeClr>
+          </a:lnRef>
+          <a:fillRef idx="1">
+            <a:schemeClr val="accent1"/>
+          </a:fillRef>
+          <a:effectRef idx="0">
+            <a:schemeClr val="accent1"/>
+          </a:effectRef>
+          <a:fontRef idx="minor">
+            <a:schemeClr val="lt1"/>
+          </a:fontRef>
+        </p:style>
+        <p:txBody>
+          <a:bodyPr rtlCol="0" anchor="ctr"/>
+          <a:lstStyle/>
+          <a:p>
+            <a:pPr algn="ctr"/>
+            <a:endParaRPr lang="es-GT"/>
+          </a:p>
+        </p:txBody>
+      </p:sp>
+      <p:sp>
+        <p:nvSpPr>
+          <p:cNvPr id="61" name="Rectángulo: esquinas redondeadas 60">
+            <a:extLst>
+              <a:ext uri="{FF2B5EF4-FFF2-40B4-BE49-F238E27FC236}">
+                <a16:creationId xmlns:a16="http://schemas.microsoft.com/office/drawing/2014/main" id="{B8BC7A3B-0175-02FB-ABC7-F95E703AB450}"/>
+              </a:ext>
+            </a:extLst>
+          </p:cNvPr>
+          <p:cNvSpPr/>
+          <p:nvPr/>
+        </p:nvSpPr>
+        <p:spPr>
+          <a:xfrm>
+            <a:off x="5918200" y="6293366"/>
+            <a:ext cx="371231" cy="326571"/>
+          </a:xfrm>
+          <a:prstGeom prst="roundRect">
+            <a:avLst/>
+          </a:prstGeom>
+          <a:solidFill>
+            <a:srgbClr val="FFC000"/>
+          </a:solidFill>
+          <a:ln w="19050" cap="flat" cmpd="sng" algn="ctr">
+            <a:noFill/>
+            <a:prstDash val="solid"/>
+            <a:miter lim="800000"/>
+          </a:ln>
+          <a:effectLst/>
+        </p:spPr>
+        <p:style>
+          <a:lnRef idx="2">
+            <a:schemeClr val="accent1">
+              <a:shade val="15000"/>
+            </a:schemeClr>
+          </a:lnRef>
+          <a:fillRef idx="1">
+            <a:schemeClr val="accent1"/>
+          </a:fillRef>
+          <a:effectRef idx="0">
+            <a:schemeClr val="accent1"/>
+          </a:effectRef>
+          <a:fontRef idx="minor">
+            <a:schemeClr val="lt1"/>
+          </a:fontRef>
+        </p:style>
+        <p:txBody>
+          <a:bodyPr rtlCol="0" anchor="ctr"/>
+          <a:lstStyle/>
+          <a:p>
+            <a:pPr algn="ctr"/>
+            <a:endParaRPr lang="es-GT"/>
+          </a:p>
+        </p:txBody>
+      </p:sp>
+      <p:sp>
+        <p:nvSpPr>
+          <p:cNvPr id="63" name="CuadroTexto 62">
+            <a:extLst>
+              <a:ext uri="{FF2B5EF4-FFF2-40B4-BE49-F238E27FC236}">
+                <a16:creationId xmlns:a16="http://schemas.microsoft.com/office/drawing/2014/main" id="{0F670AB9-A03E-1446-1AE3-3833F1056502}"/>
+              </a:ext>
+            </a:extLst>
+          </p:cNvPr>
+          <p:cNvSpPr txBox="1"/>
+          <p:nvPr/>
+        </p:nvSpPr>
+        <p:spPr>
+          <a:xfrm>
+            <a:off x="5994400" y="6356866"/>
+            <a:ext cx="222738" cy="169277"/>
+          </a:xfrm>
+          <a:prstGeom prst="rect">
+            <a:avLst/>
+          </a:prstGeom>
+          <a:noFill/>
+        </p:spPr>
+        <p:txBody>
+          <a:bodyPr vert="horz" wrap="square" lIns="0" tIns="0" rIns="0" bIns="0" rtlCol="0">
+            <a:spAutoFit/>
+          </a:bodyPr>
+          <a:lstStyle/>
+          <a:p>
+            <a:pPr algn="ctr"/>
+            <a:r>
+              <a:rPr lang="es-GT" sz="1100" b="1" dirty="0">
+                <a:solidFill>
+                  <a:srgbClr val="FFFFFF"/>
+                </a:solidFill>
+                <a:latin typeface="Aptos" panose="020B0004020202020204" pitchFamily="34" charset="0"/>
+              </a:rPr>
+              <a:t>13</a:t>
+            </a:r>
+          </a:p>
+        </p:txBody>
+      </p:sp>
+      <p:sp>
+        <p:nvSpPr>
+          <p:cNvPr id="65" name="CuadroTexto 64">
+            <a:extLst>
+              <a:ext uri="{FF2B5EF4-FFF2-40B4-BE49-F238E27FC236}">
+                <a16:creationId xmlns:a16="http://schemas.microsoft.com/office/drawing/2014/main" id="{BFF9FF29-F805-3971-4661-3DC34082174E}"/>
+              </a:ext>
+            </a:extLst>
+          </p:cNvPr>
+          <p:cNvSpPr txBox="1"/>
+          <p:nvPr/>
+        </p:nvSpPr>
+        <p:spPr>
+          <a:xfrm>
+            <a:off x="6477000" y="6293366"/>
+            <a:ext cx="8835292" cy="184666"/>
+          </a:xfrm>
+          <a:prstGeom prst="rect">
+            <a:avLst/>
+          </a:prstGeom>
+          <a:noFill/>
+        </p:spPr>
+        <p:txBody>
+          <a:bodyPr vert="horz" wrap="square" lIns="0" tIns="0" rIns="0" bIns="0" rtlCol="0">
+            <a:spAutoFit/>
+          </a:bodyPr>
+          <a:lstStyle/>
+          <a:p>
+            <a:r>
+              <a:rPr lang="es-GT" sz="1200">
+                <a:solidFill>
+                  <a:srgbClr val="002D5A"/>
+                </a:solidFill>
+                <a:latin typeface="Aptos" panose="020B0004020202020204" pitchFamily="34" charset="0"/>
+              </a:rPr>
+              <a:t>Modificación Horario, Ruta, Frecuencias</a:t>
+            </a:r>
+          </a:p>
+        </p:txBody>
+      </p:sp>
+      <p:sp>
+        <p:nvSpPr>
+          <p:cNvPr id="69" name="CuadroTexto 68">
+            <a:extLst>
+              <a:ext uri="{FF2B5EF4-FFF2-40B4-BE49-F238E27FC236}">
+                <a16:creationId xmlns:a16="http://schemas.microsoft.com/office/drawing/2014/main" id="{BCFD1093-A6D2-6FC0-6F6C-CD4F5D27A6EA}"/>
+              </a:ext>
+            </a:extLst>
+          </p:cNvPr>
+          <p:cNvSpPr txBox="1"/>
+          <p:nvPr/>
+        </p:nvSpPr>
+        <p:spPr>
+          <a:xfrm>
+            <a:off x="6477000" y="3978905"/>
+            <a:ext cx="9067800" cy="184666"/>
+          </a:xfrm>
+          <a:prstGeom prst="rect">
+            <a:avLst/>
+          </a:prstGeom>
+          <a:noFill/>
+        </p:spPr>
+        <p:txBody>
+          <a:bodyPr vert="horz" lIns="0" tIns="0" rIns="0" bIns="0" rtlCol="0">
+            <a:spAutoFit/>
+          </a:bodyPr>
+          <a:lstStyle/>
+          <a:p>
+            <a:r>
+              <a:rPr lang="es-ES" sz="1200" dirty="0">
+                <a:solidFill>
+                  <a:srgbClr val="002D5A"/>
+                </a:solidFill>
+                <a:latin typeface="Aptos" panose="020B0004020202020204" pitchFamily="34" charset="0"/>
+              </a:rPr>
+              <a:t>Permiso Temporal de Explotación - Vuelo Comercial No Regular</a:t>
+            </a:r>
+            <a:endParaRPr lang="es-GT" sz="1200" dirty="0">
+              <a:solidFill>
+                <a:srgbClr val="002D5A"/>
+              </a:solidFill>
+              <a:latin typeface="Aptos" panose="020B0004020202020204" pitchFamily="34" charset="0"/>
+            </a:endParaRPr>
+          </a:p>
+        </p:txBody>
+      </p:sp>
+      <p:sp>
+        <p:nvSpPr>
+          <p:cNvPr id="87" name="Rectángulo: esquinas redondeadas 86">
+            <a:extLst>
+              <a:ext uri="{FF2B5EF4-FFF2-40B4-BE49-F238E27FC236}">
+                <a16:creationId xmlns:a16="http://schemas.microsoft.com/office/drawing/2014/main" id="{49874A27-CDF0-0EF0-B256-465ADB4BB3D3}"/>
+              </a:ext>
+            </a:extLst>
+          </p:cNvPr>
+          <p:cNvSpPr/>
+          <p:nvPr/>
+        </p:nvSpPr>
+        <p:spPr>
+          <a:xfrm>
+            <a:off x="698500" y="5012982"/>
+            <a:ext cx="4487374" cy="1465049"/>
+          </a:xfrm>
+          <a:prstGeom prst="roundRect">
+            <a:avLst/>
+          </a:prstGeom>
+          <a:solidFill>
+            <a:srgbClr val="FFFFFF"/>
+          </a:solidFill>
+          <a:ln w="15875">
+            <a:solidFill>
+              <a:srgbClr val="BFD8F2"/>
+            </a:solidFill>
+          </a:ln>
+        </p:spPr>
+        <p:style>
+          <a:lnRef idx="2">
+            <a:schemeClr val="accent1">
+              <a:shade val="15000"/>
+            </a:schemeClr>
+          </a:lnRef>
+          <a:fillRef idx="1">
+            <a:schemeClr val="accent1"/>
+          </a:fillRef>
+          <a:effectRef idx="0">
+            <a:schemeClr val="accent1"/>
+          </a:effectRef>
+          <a:fontRef idx="minor">
+            <a:schemeClr val="lt1"/>
+          </a:fontRef>
+        </p:style>
+        <p:txBody>
+          <a:bodyPr rtlCol="0" anchor="ctr"/>
+          <a:lstStyle/>
+          <a:p>
+            <a:pPr algn="ctr"/>
+            <a:endParaRPr lang="es-GT"/>
+          </a:p>
+        </p:txBody>
+      </p:sp>
+      <p:sp>
+        <p:nvSpPr>
+          <p:cNvPr id="89" name="Rectángulo 88">
+            <a:extLst>
+              <a:ext uri="{FF2B5EF4-FFF2-40B4-BE49-F238E27FC236}">
+                <a16:creationId xmlns:a16="http://schemas.microsoft.com/office/drawing/2014/main" id="{790BF5C2-68D7-5D99-66AA-C985259A1504}"/>
+              </a:ext>
+            </a:extLst>
+          </p:cNvPr>
+          <p:cNvSpPr/>
+          <p:nvPr/>
+        </p:nvSpPr>
+        <p:spPr>
+          <a:xfrm>
+            <a:off x="698500" y="5012982"/>
+            <a:ext cx="45719" cy="1443543"/>
+          </a:xfrm>
+          <a:prstGeom prst="rect">
+            <a:avLst/>
+          </a:prstGeom>
+          <a:solidFill>
+            <a:srgbClr val="F5B400"/>
+          </a:solidFill>
+          <a:ln w="19050" cap="flat" cmpd="sng" algn="ctr">
+            <a:noFill/>
+            <a:prstDash val="solid"/>
+            <a:miter lim="800000"/>
+          </a:ln>
+          <a:effectLst/>
+          <a:extLst>
+            <a:ext uri="{91240B29-F687-4F45-9708-019B960494DF}">
+              <a14:hiddenLine xmlns:a14="http://schemas.microsoft.com/office/drawing/2010/main" w="19050" cap="flat" cmpd="sng" algn="ctr">
+                <a:solidFill>
+                  <a:schemeClr val="accent1">
+                    <a:shade val="15000"/>
+                  </a:schemeClr>
+                </a:solidFill>
+                <a:prstDash val="solid"/>
+                <a:miter lim="800000"/>
+              </a14:hiddenLine>
+            </a:ext>
+          </a:extLst>
+        </p:spPr>
+        <p:style>
+          <a:lnRef idx="2">
+            <a:schemeClr val="accent1">
+              <a:shade val="15000"/>
+            </a:schemeClr>
+          </a:lnRef>
+          <a:fillRef idx="1">
+            <a:schemeClr val="accent1"/>
+          </a:fillRef>
+          <a:effectRef idx="0">
+            <a:schemeClr val="accent1"/>
+          </a:effectRef>
+          <a:fontRef idx="minor">
+            <a:schemeClr val="lt1"/>
+          </a:fontRef>
+        </p:style>
+        <p:txBody>
+          <a:bodyPr rtlCol="0" anchor="ctr"/>
+          <a:lstStyle/>
+          <a:p>
+            <a:pPr algn="ctr"/>
+            <a:endParaRPr lang="es-GT"/>
+          </a:p>
+        </p:txBody>
+      </p:sp>
+      <p:sp>
+        <p:nvSpPr>
+          <p:cNvPr id="91" name="CuadroTexto 90">
+            <a:extLst>
+              <a:ext uri="{FF2B5EF4-FFF2-40B4-BE49-F238E27FC236}">
+                <a16:creationId xmlns:a16="http://schemas.microsoft.com/office/drawing/2014/main" id="{6C1B0D65-8DDE-3AAE-1E44-0542C0BDFF87}"/>
+              </a:ext>
+            </a:extLst>
+          </p:cNvPr>
+          <p:cNvSpPr txBox="1"/>
+          <p:nvPr/>
+        </p:nvSpPr>
+        <p:spPr>
+          <a:xfrm>
+            <a:off x="977900" y="5241582"/>
+            <a:ext cx="4313106" cy="261610"/>
+          </a:xfrm>
+          <a:prstGeom prst="rect">
+            <a:avLst/>
+          </a:prstGeom>
+          <a:noFill/>
+        </p:spPr>
+        <p:txBody>
+          <a:bodyPr vert="horz" wrap="square" lIns="0" tIns="0" rIns="0" bIns="0" rtlCol="0">
+            <a:spAutoFit/>
+          </a:bodyPr>
+          <a:lstStyle/>
+          <a:p>
+            <a:r>
+              <a:rPr lang="es-GT" sz="1700" b="1" dirty="0">
+                <a:solidFill>
+                  <a:srgbClr val="001F44"/>
+                </a:solidFill>
+                <a:latin typeface="Aptos" panose="020B0004020202020204" pitchFamily="34" charset="0"/>
+              </a:rPr>
+              <a:t>Fecha estimada de lanzamiento </a:t>
+            </a:r>
+          </a:p>
+        </p:txBody>
+      </p:sp>
+      <p:sp>
+        <p:nvSpPr>
+          <p:cNvPr id="93" name="CuadroTexto 92">
+            <a:extLst>
+              <a:ext uri="{FF2B5EF4-FFF2-40B4-BE49-F238E27FC236}">
+                <a16:creationId xmlns:a16="http://schemas.microsoft.com/office/drawing/2014/main" id="{893611D0-0BC7-5848-012E-CB32C7EAB9D7}"/>
+              </a:ext>
+            </a:extLst>
+          </p:cNvPr>
+          <p:cNvSpPr txBox="1"/>
+          <p:nvPr/>
+        </p:nvSpPr>
+        <p:spPr>
+          <a:xfrm>
+            <a:off x="955065" y="5569786"/>
+            <a:ext cx="4093730" cy="307777"/>
+          </a:xfrm>
+          <a:prstGeom prst="rect">
+            <a:avLst/>
+          </a:prstGeom>
+          <a:noFill/>
+        </p:spPr>
+        <p:txBody>
+          <a:bodyPr wrap="square" rtlCol="0">
+            <a:spAutoFit/>
+          </a:bodyPr>
+          <a:lstStyle/>
+          <a:p>
+            <a:r>
+              <a:rPr lang="es-GT" sz="1400" dirty="0"/>
+              <a:t>Tramites del 6 al 9: 4 de septiembre 2026</a:t>
+            </a:r>
+          </a:p>
+        </p:txBody>
+      </p:sp>
+      <p:sp>
+        <p:nvSpPr>
+          <p:cNvPr id="95" name="CuadroTexto 94">
+            <a:extLst>
+              <a:ext uri="{FF2B5EF4-FFF2-40B4-BE49-F238E27FC236}">
+                <a16:creationId xmlns:a16="http://schemas.microsoft.com/office/drawing/2014/main" id="{F3319960-229E-EEFF-083D-FAA37E59FF26}"/>
+              </a:ext>
+            </a:extLst>
+          </p:cNvPr>
+          <p:cNvSpPr txBox="1"/>
+          <p:nvPr/>
+        </p:nvSpPr>
+        <p:spPr>
+          <a:xfrm>
+            <a:off x="955065" y="5957889"/>
+            <a:ext cx="4093730" cy="307777"/>
+          </a:xfrm>
+          <a:prstGeom prst="rect">
+            <a:avLst/>
+          </a:prstGeom>
+          <a:noFill/>
+        </p:spPr>
+        <p:txBody>
+          <a:bodyPr wrap="square" rtlCol="0">
+            <a:spAutoFit/>
+          </a:bodyPr>
+          <a:lstStyle/>
+          <a:p>
+            <a:r>
+              <a:rPr lang="es-GT" sz="1400" dirty="0"/>
+              <a:t>Tramites del 10 al 13: 25 de septiembre 2026</a:t>
+            </a:r>
           </a:p>
         </p:txBody>
       </p:sp>
@@ -15923,7 +15201,7 @@
           <p:cNvPr id="2" name="Rectángulo 1">
             <a:extLst>
               <a:ext uri="{FF2B5EF4-FFF2-40B4-BE49-F238E27FC236}">
-                <a16:creationId xmlns:a16="http://schemas.microsoft.com/office/drawing/2014/main" id="{6118D6DF-8B46-39A8-4EC4-C06CBCA1765F}"/>
+                <a16:creationId xmlns:a16="http://schemas.microsoft.com/office/drawing/2014/main" id="{1753EE6A-0C57-258A-B02F-BCD4D98B4320}"/>
               </a:ext>
             </a:extLst>
           </p:cNvPr>
@@ -15991,7 +15269,7 @@
           <p:cNvPr id="4" name="Imagen 3">
             <a:extLst>
               <a:ext uri="{FF2B5EF4-FFF2-40B4-BE49-F238E27FC236}">
-                <a16:creationId xmlns:a16="http://schemas.microsoft.com/office/drawing/2014/main" id="{7A5B7740-510F-F885-FBF9-1BDD0D8324DC}"/>
+                <a16:creationId xmlns:a16="http://schemas.microsoft.com/office/drawing/2014/main" id="{E80E242A-2290-9CB8-C177-197717E3D303}"/>
               </a:ext>
             </a:extLst>
           </p:cNvPr>
@@ -16027,7 +15305,7 @@
           <p:cNvPr id="5" name="CuadroTexto 4">
             <a:extLst>
               <a:ext uri="{FF2B5EF4-FFF2-40B4-BE49-F238E27FC236}">
-                <a16:creationId xmlns:a16="http://schemas.microsoft.com/office/drawing/2014/main" id="{7ED22369-F739-2280-5176-BC9E40ED0B3B}"/>
+                <a16:creationId xmlns:a16="http://schemas.microsoft.com/office/drawing/2014/main" id="{54659114-9E44-D376-560A-AFA921BC7998}"/>
               </a:ext>
             </a:extLst>
           </p:cNvPr>
@@ -16057,7 +15335,7 @@
                 </a:solidFill>
                 <a:latin typeface="Aptos" panose="020B0004020202020204" pitchFamily="34" charset="0"/>
               </a:rPr>
-              <a:t>TRÁMITES EN ANÁLISIS</a:t>
+              <a:t>TRÁMITES CON MAYOR AVANCE</a:t>
             </a:r>
           </a:p>
         </p:txBody>
@@ -16067,7 +15345,7 @@
           <p:cNvPr id="6" name="Rectángulo 5">
             <a:extLst>
               <a:ext uri="{FF2B5EF4-FFF2-40B4-BE49-F238E27FC236}">
-                <a16:creationId xmlns:a16="http://schemas.microsoft.com/office/drawing/2014/main" id="{B197FD60-5E14-B5FE-B10A-74A21C14DEA5}"/>
+                <a16:creationId xmlns:a16="http://schemas.microsoft.com/office/drawing/2014/main" id="{D0FB0BE4-DEBE-FE99-86E4-342B4D03D3CF}"/>
               </a:ext>
             </a:extLst>
           </p:cNvPr>
@@ -16135,7 +15413,7 @@
           <p:cNvPr id="7" name="Rectángulo 6">
             <a:extLst>
               <a:ext uri="{FF2B5EF4-FFF2-40B4-BE49-F238E27FC236}">
-                <a16:creationId xmlns:a16="http://schemas.microsoft.com/office/drawing/2014/main" id="{18D422FD-7F8E-065C-635F-F70853EA540D}"/>
+                <a16:creationId xmlns:a16="http://schemas.microsoft.com/office/drawing/2014/main" id="{C93DDED1-9CDF-5CF1-F427-41512A89B4B2}"/>
               </a:ext>
             </a:extLst>
           </p:cNvPr>
@@ -16203,7 +15481,7 @@
           <p:cNvPr id="8" name="CuadroTexto 7">
             <a:extLst>
               <a:ext uri="{FF2B5EF4-FFF2-40B4-BE49-F238E27FC236}">
-                <a16:creationId xmlns:a16="http://schemas.microsoft.com/office/drawing/2014/main" id="{05DBF217-6889-6C3A-EFAA-389EB082B844}"/>
+                <a16:creationId xmlns:a16="http://schemas.microsoft.com/office/drawing/2014/main" id="{B471A2FD-0B14-18D4-8DBC-B84918AF5E14}"/>
               </a:ext>
             </a:extLst>
           </p:cNvPr>
@@ -16234,7 +15512,7 @@
                 </a:solidFill>
                 <a:latin typeface="Aptos" panose="020B0004020202020204" pitchFamily="34" charset="0"/>
               </a:rPr>
-              <a:t>7</a:t>
+              <a:t>5</a:t>
             </a:r>
           </a:p>
         </p:txBody>
@@ -16244,7 +15522,7 @@
           <p:cNvPr id="9" name="Rectángulo: esquinas redondeadas 8">
             <a:extLst>
               <a:ext uri="{FF2B5EF4-FFF2-40B4-BE49-F238E27FC236}">
-                <a16:creationId xmlns:a16="http://schemas.microsoft.com/office/drawing/2014/main" id="{DA57646B-7544-AC58-7B7F-93C9C26CAA68}"/>
+                <a16:creationId xmlns:a16="http://schemas.microsoft.com/office/drawing/2014/main" id="{C78006CA-7403-8102-6E0F-355B4CD7A121}"/>
               </a:ext>
             </a:extLst>
           </p:cNvPr>
@@ -16254,13 +15532,13 @@
         <p:spPr>
           <a:xfrm>
             <a:off x="1016000" y="2095500"/>
-            <a:ext cx="2032000" cy="381000"/>
+            <a:ext cx="2921000" cy="381000"/>
           </a:xfrm>
           <a:prstGeom prst="roundRect">
             <a:avLst/>
           </a:prstGeom>
           <a:solidFill>
-            <a:srgbClr val="EB7D00"/>
+            <a:srgbClr val="34A853"/>
           </a:solidFill>
           <a:ln w="19050" cap="flat" cmpd="sng" algn="ctr">
             <a:noFill/>
@@ -16312,7 +15590,7 @@
           <p:cNvPr id="10" name="CuadroTexto 9">
             <a:extLst>
               <a:ext uri="{FF2B5EF4-FFF2-40B4-BE49-F238E27FC236}">
-                <a16:creationId xmlns:a16="http://schemas.microsoft.com/office/drawing/2014/main" id="{C47C5792-9AF1-E511-6C62-27B92B6B3B3B}"/>
+                <a16:creationId xmlns:a16="http://schemas.microsoft.com/office/drawing/2014/main" id="{A928F894-BFAB-CC2D-0562-733723A2A775}"/>
               </a:ext>
             </a:extLst>
           </p:cNvPr>
@@ -16322,7 +15600,7 @@
         <p:spPr>
           <a:xfrm>
             <a:off x="1117600" y="2184400"/>
-            <a:ext cx="1828800" cy="169277"/>
+            <a:ext cx="2717800" cy="169277"/>
           </a:xfrm>
           <a:prstGeom prst="rect">
             <a:avLst/>
@@ -16337,13 +15615,13 @@
           <a:p>
             <a:pPr algn="ctr"/>
             <a:r>
-              <a:rPr lang="es-GT" sz="1100" b="1">
+              <a:rPr lang="es-GT" sz="1100" b="1" dirty="0">
                 <a:solidFill>
                   <a:srgbClr val="FFFFFF"/>
                 </a:solidFill>
                 <a:latin typeface="Aptos" panose="020B0004020202020204" pitchFamily="34" charset="0"/>
               </a:rPr>
-              <a:t>8% DE AVANCE</a:t>
+              <a:t>100% DE AVANCE ACUMULADO</a:t>
             </a:r>
           </a:p>
         </p:txBody>
@@ -16353,7 +15631,7 @@
           <p:cNvPr id="11" name="Rectángulo: esquinas redondeadas 10">
             <a:extLst>
               <a:ext uri="{FF2B5EF4-FFF2-40B4-BE49-F238E27FC236}">
-                <a16:creationId xmlns:a16="http://schemas.microsoft.com/office/drawing/2014/main" id="{C50F484C-ED3D-72A1-3754-FF264C31A997}"/>
+                <a16:creationId xmlns:a16="http://schemas.microsoft.com/office/drawing/2014/main" id="{718850EE-C23D-89E4-0B8C-006E7BCD44F8}"/>
               </a:ext>
             </a:extLst>
           </p:cNvPr>
@@ -16362,7 +15640,7 @@
         </p:nvSpPr>
         <p:spPr>
           <a:xfrm>
-            <a:off x="1117600" y="3175000"/>
+            <a:off x="1143000" y="3175000"/>
             <a:ext cx="2159000" cy="2159000"/>
           </a:xfrm>
           <a:prstGeom prst="roundRect">
@@ -16407,7 +15685,7 @@
           <p:cNvPr id="12" name="Elipse 11">
             <a:extLst>
               <a:ext uri="{FF2B5EF4-FFF2-40B4-BE49-F238E27FC236}">
-                <a16:creationId xmlns:a16="http://schemas.microsoft.com/office/drawing/2014/main" id="{D85299EE-4DB6-CA7C-37B9-9001D2D51D86}"/>
+                <a16:creationId xmlns:a16="http://schemas.microsoft.com/office/drawing/2014/main" id="{88B72342-6BC7-0CDA-FB07-EA28C4BA4B4A}"/>
               </a:ext>
             </a:extLst>
           </p:cNvPr>
@@ -16416,14 +15694,14 @@
         </p:nvSpPr>
         <p:spPr>
           <a:xfrm>
-            <a:off x="1397000" y="3454400"/>
+            <a:off x="1422400" y="3454400"/>
             <a:ext cx="1600200" cy="1600200"/>
           </a:xfrm>
           <a:prstGeom prst="ellipse">
             <a:avLst/>
           </a:prstGeom>
           <a:solidFill>
-            <a:srgbClr val="EB7D00"/>
+            <a:srgbClr val="34A853"/>
           </a:solidFill>
           <a:ln w="19050" cap="flat" cmpd="sng" algn="ctr">
             <a:noFill/>
@@ -16475,7 +15753,7 @@
           <p:cNvPr id="13" name="Elipse 12">
             <a:extLst>
               <a:ext uri="{FF2B5EF4-FFF2-40B4-BE49-F238E27FC236}">
-                <a16:creationId xmlns:a16="http://schemas.microsoft.com/office/drawing/2014/main" id="{A548A331-62EE-F731-3CF0-4127C3DE79DF}"/>
+                <a16:creationId xmlns:a16="http://schemas.microsoft.com/office/drawing/2014/main" id="{1965DCF6-DB62-160F-74EB-8A557D58B27A}"/>
               </a:ext>
             </a:extLst>
           </p:cNvPr>
@@ -16484,7 +15762,7 @@
         </p:nvSpPr>
         <p:spPr>
           <a:xfrm>
-            <a:off x="1676400" y="3733800"/>
+            <a:off x="1701800" y="3733800"/>
             <a:ext cx="1041400" cy="1041400"/>
           </a:xfrm>
           <a:prstGeom prst="ellipse">
@@ -16543,7 +15821,7 @@
           <p:cNvPr id="14" name="CuadroTexto 13">
             <a:extLst>
               <a:ext uri="{FF2B5EF4-FFF2-40B4-BE49-F238E27FC236}">
-                <a16:creationId xmlns:a16="http://schemas.microsoft.com/office/drawing/2014/main" id="{4F1FD0DD-E87A-C00C-ACB1-E9288682A687}"/>
+                <a16:creationId xmlns:a16="http://schemas.microsoft.com/office/drawing/2014/main" id="{BACC2D2D-03E2-9454-429E-A01E350EA7FF}"/>
               </a:ext>
             </a:extLst>
           </p:cNvPr>
@@ -16552,7 +15830,7 @@
         </p:nvSpPr>
         <p:spPr>
           <a:xfrm>
-            <a:off x="1498600" y="3835400"/>
+            <a:off x="1524000" y="3835400"/>
             <a:ext cx="1397000" cy="461665"/>
           </a:xfrm>
           <a:prstGeom prst="rect">
@@ -16574,7 +15852,7 @@
                 </a:solidFill>
                 <a:latin typeface="Aptos" panose="020B0004020202020204" pitchFamily="34" charset="0"/>
               </a:rPr>
-              <a:t>3</a:t>
+              <a:t>5</a:t>
             </a:r>
           </a:p>
         </p:txBody>
@@ -16584,7 +15862,7 @@
           <p:cNvPr id="15" name="CuadroTexto 14">
             <a:extLst>
               <a:ext uri="{FF2B5EF4-FFF2-40B4-BE49-F238E27FC236}">
-                <a16:creationId xmlns:a16="http://schemas.microsoft.com/office/drawing/2014/main" id="{173170F5-A2C4-271B-9EC7-89DCF4FABF99}"/>
+                <a16:creationId xmlns:a16="http://schemas.microsoft.com/office/drawing/2014/main" id="{C12F0FA4-FE44-46C3-7BA4-A573CFA327C1}"/>
               </a:ext>
             </a:extLst>
           </p:cNvPr>
@@ -16593,7 +15871,7 @@
         </p:nvSpPr>
         <p:spPr>
           <a:xfrm>
-            <a:off x="1435100" y="4445000"/>
+            <a:off x="1460500" y="4445000"/>
             <a:ext cx="1524000" cy="184666"/>
           </a:xfrm>
           <a:prstGeom prst="rect">
@@ -16625,7 +15903,7 @@
           <p:cNvPr id="16" name="Rectángulo: esquinas redondeadas 15">
             <a:extLst>
               <a:ext uri="{FF2B5EF4-FFF2-40B4-BE49-F238E27FC236}">
-                <a16:creationId xmlns:a16="http://schemas.microsoft.com/office/drawing/2014/main" id="{8987C367-66FC-B56C-2A54-60D4F10480AD}"/>
+                <a16:creationId xmlns:a16="http://schemas.microsoft.com/office/drawing/2014/main" id="{2C8D1785-6573-5916-1CD8-27390B5E147B}"/>
               </a:ext>
             </a:extLst>
           </p:cNvPr>
@@ -16634,8 +15912,8 @@
         </p:nvSpPr>
         <p:spPr>
           <a:xfrm>
-            <a:off x="4826000" y="2794000"/>
-            <a:ext cx="9398000" cy="711200"/>
+            <a:off x="4826000" y="2349500"/>
+            <a:ext cx="8890000" cy="635000"/>
           </a:xfrm>
           <a:prstGeom prst="roundRect">
             <a:avLst/>
@@ -16679,7 +15957,7 @@
           <p:cNvPr id="17" name="Rectángulo: esquinas redondeadas 16">
             <a:extLst>
               <a:ext uri="{FF2B5EF4-FFF2-40B4-BE49-F238E27FC236}">
-                <a16:creationId xmlns:a16="http://schemas.microsoft.com/office/drawing/2014/main" id="{F76ABDD1-B931-BDB7-6041-6CE24D3565B3}"/>
+                <a16:creationId xmlns:a16="http://schemas.microsoft.com/office/drawing/2014/main" id="{06742A57-2C92-B6EC-4C9B-A611FC0248BC}"/>
               </a:ext>
             </a:extLst>
           </p:cNvPr>
@@ -16688,14 +15966,14 @@
         </p:nvSpPr>
         <p:spPr>
           <a:xfrm>
-            <a:off x="4953000" y="2882900"/>
+            <a:off x="4953000" y="2438400"/>
             <a:ext cx="381000" cy="381000"/>
           </a:xfrm>
           <a:prstGeom prst="roundRect">
             <a:avLst/>
           </a:prstGeom>
           <a:solidFill>
-            <a:srgbClr val="EB7D00"/>
+            <a:srgbClr val="34A853"/>
           </a:solidFill>
           <a:ln w="19050" cap="flat" cmpd="sng" algn="ctr">
             <a:noFill/>
@@ -16747,7 +16025,7 @@
           <p:cNvPr id="18" name="CuadroTexto 17">
             <a:extLst>
               <a:ext uri="{FF2B5EF4-FFF2-40B4-BE49-F238E27FC236}">
-                <a16:creationId xmlns:a16="http://schemas.microsoft.com/office/drawing/2014/main" id="{887495D7-7D5F-3AD4-3704-B199D4E68C19}"/>
+                <a16:creationId xmlns:a16="http://schemas.microsoft.com/office/drawing/2014/main" id="{ED22A1D9-147D-AF0D-9797-8127249FBDB2}"/>
               </a:ext>
             </a:extLst>
           </p:cNvPr>
@@ -16756,7 +16034,7 @@
         </p:nvSpPr>
         <p:spPr>
           <a:xfrm>
-            <a:off x="5029200" y="2946400"/>
+            <a:off x="5029200" y="2501900"/>
             <a:ext cx="228600" cy="169277"/>
           </a:xfrm>
           <a:prstGeom prst="rect">
@@ -16778,7 +16056,7 @@
                 </a:solidFill>
                 <a:latin typeface="Aptos" panose="020B0004020202020204" pitchFamily="34" charset="0"/>
               </a:rPr>
-              <a:t>11</a:t>
+              <a:t>1</a:t>
             </a:r>
           </a:p>
         </p:txBody>
@@ -16788,7 +16066,7 @@
           <p:cNvPr id="19" name="CuadroTexto 18">
             <a:extLst>
               <a:ext uri="{FF2B5EF4-FFF2-40B4-BE49-F238E27FC236}">
-                <a16:creationId xmlns:a16="http://schemas.microsoft.com/office/drawing/2014/main" id="{D8897177-01BF-63E2-137C-9F0F69F5AE37}"/>
+                <a16:creationId xmlns:a16="http://schemas.microsoft.com/office/drawing/2014/main" id="{13ADB364-BA2D-B94C-C73A-0CF240BC89E2}"/>
               </a:ext>
             </a:extLst>
           </p:cNvPr>
@@ -16797,8 +16075,8 @@
         </p:nvSpPr>
         <p:spPr>
           <a:xfrm>
-            <a:off x="5511800" y="2882900"/>
-            <a:ext cx="8559800" cy="184666"/>
+            <a:off x="5511800" y="2438400"/>
+            <a:ext cx="8051800" cy="184666"/>
           </a:xfrm>
           <a:prstGeom prst="rect">
             <a:avLst/>
@@ -16812,20 +16090,14 @@
           <a:lstStyle/>
           <a:p>
             <a:r>
-              <a:rPr lang="es-ES" sz="1200">
+              <a:rPr lang="es-GT" sz="1200">
                 <a:solidFill>
                   <a:srgbClr val="002D5A"/>
                 </a:solidFill>
                 <a:latin typeface="Aptos" panose="020B0004020202020204" pitchFamily="34" charset="0"/>
               </a:rPr>
-              <a:t>Autorización de Altura Máxima Permisible</a:t>
-            </a:r>
-            <a:endParaRPr lang="es-GT" sz="1200">
-              <a:solidFill>
-                <a:srgbClr val="002D5A"/>
-              </a:solidFill>
-              <a:latin typeface="Aptos" panose="020B0004020202020204" pitchFamily="34" charset="0"/>
-            </a:endParaRPr>
+              <a:t>Reserva, prórroga o cesión de matrícula</a:t>
+            </a:r>
           </a:p>
         </p:txBody>
       </p:sp>
@@ -16834,7 +16106,7 @@
           <p:cNvPr id="20" name="Rectángulo: esquinas redondeadas 19">
             <a:extLst>
               <a:ext uri="{FF2B5EF4-FFF2-40B4-BE49-F238E27FC236}">
-                <a16:creationId xmlns:a16="http://schemas.microsoft.com/office/drawing/2014/main" id="{A33E449E-6F87-ED2D-AC7A-AD453AF62FE9}"/>
+                <a16:creationId xmlns:a16="http://schemas.microsoft.com/office/drawing/2014/main" id="{8F367CDE-88D8-17FD-6655-935B66164F44}"/>
               </a:ext>
             </a:extLst>
           </p:cNvPr>
@@ -16843,8 +16115,8 @@
         </p:nvSpPr>
         <p:spPr>
           <a:xfrm>
-            <a:off x="4826000" y="3581400"/>
-            <a:ext cx="9398000" cy="711200"/>
+            <a:off x="4826000" y="3060700"/>
+            <a:ext cx="8890000" cy="635000"/>
           </a:xfrm>
           <a:prstGeom prst="roundRect">
             <a:avLst/>
@@ -16888,7 +16160,7 @@
           <p:cNvPr id="21" name="Rectángulo: esquinas redondeadas 20">
             <a:extLst>
               <a:ext uri="{FF2B5EF4-FFF2-40B4-BE49-F238E27FC236}">
-                <a16:creationId xmlns:a16="http://schemas.microsoft.com/office/drawing/2014/main" id="{9B861EC1-281B-7FE6-349A-F68B8E8C6C09}"/>
+                <a16:creationId xmlns:a16="http://schemas.microsoft.com/office/drawing/2014/main" id="{945D6453-677D-1907-5C21-68AE10540B68}"/>
               </a:ext>
             </a:extLst>
           </p:cNvPr>
@@ -16897,14 +16169,14 @@
         </p:nvSpPr>
         <p:spPr>
           <a:xfrm>
-            <a:off x="4953000" y="3670300"/>
+            <a:off x="4953000" y="3149600"/>
             <a:ext cx="381000" cy="381000"/>
           </a:xfrm>
           <a:prstGeom prst="roundRect">
             <a:avLst/>
           </a:prstGeom>
           <a:solidFill>
-            <a:srgbClr val="EB7D00"/>
+            <a:srgbClr val="34A853"/>
           </a:solidFill>
           <a:ln w="19050" cap="flat" cmpd="sng" algn="ctr">
             <a:noFill/>
@@ -16956,7 +16228,7 @@
           <p:cNvPr id="22" name="CuadroTexto 21">
             <a:extLst>
               <a:ext uri="{FF2B5EF4-FFF2-40B4-BE49-F238E27FC236}">
-                <a16:creationId xmlns:a16="http://schemas.microsoft.com/office/drawing/2014/main" id="{1812A334-8E04-4550-6A64-B562699668CA}"/>
+                <a16:creationId xmlns:a16="http://schemas.microsoft.com/office/drawing/2014/main" id="{E8CD330D-66BC-A091-7873-1F6DE67575EB}"/>
               </a:ext>
             </a:extLst>
           </p:cNvPr>
@@ -16965,7 +16237,7 @@
         </p:nvSpPr>
         <p:spPr>
           <a:xfrm>
-            <a:off x="5029200" y="3733800"/>
+            <a:off x="5029200" y="3213100"/>
             <a:ext cx="228600" cy="169277"/>
           </a:xfrm>
           <a:prstGeom prst="rect">
@@ -16987,7 +16259,7 @@
                 </a:solidFill>
                 <a:latin typeface="Aptos" panose="020B0004020202020204" pitchFamily="34" charset="0"/>
               </a:rPr>
-              <a:t>12</a:t>
+              <a:t>2</a:t>
             </a:r>
           </a:p>
         </p:txBody>
@@ -16997,7 +16269,7 @@
           <p:cNvPr id="23" name="CuadroTexto 22">
             <a:extLst>
               <a:ext uri="{FF2B5EF4-FFF2-40B4-BE49-F238E27FC236}">
-                <a16:creationId xmlns:a16="http://schemas.microsoft.com/office/drawing/2014/main" id="{1726ACDB-A4C6-5609-1B98-FEB1D243EC00}"/>
+                <a16:creationId xmlns:a16="http://schemas.microsoft.com/office/drawing/2014/main" id="{48029598-65A0-F0B4-5FB1-5628AFC02842}"/>
               </a:ext>
             </a:extLst>
           </p:cNvPr>
@@ -17006,8 +16278,8 @@
         </p:nvSpPr>
         <p:spPr>
           <a:xfrm>
-            <a:off x="5511800" y="3670300"/>
-            <a:ext cx="8559800" cy="184666"/>
+            <a:off x="5511800" y="3149600"/>
+            <a:ext cx="8051800" cy="184666"/>
           </a:xfrm>
           <a:prstGeom prst="rect">
             <a:avLst/>
@@ -17021,20 +16293,14 @@
           <a:lstStyle/>
           <a:p>
             <a:r>
-              <a:rPr lang="es-ES" sz="1200">
+              <a:rPr lang="es-GT" sz="1200">
                 <a:solidFill>
                   <a:srgbClr val="002D5A"/>
                 </a:solidFill>
                 <a:latin typeface="Aptos" panose="020B0004020202020204" pitchFamily="34" charset="0"/>
               </a:rPr>
-              <a:t>Construcción/Operación/Modificación de Pista</a:t>
-            </a:r>
-            <a:endParaRPr lang="es-GT" sz="1200">
-              <a:solidFill>
-                <a:srgbClr val="002D5A"/>
-              </a:solidFill>
-              <a:latin typeface="Aptos" panose="020B0004020202020204" pitchFamily="34" charset="0"/>
-            </a:endParaRPr>
+              <a:t>Reserva de Distintivo</a:t>
+            </a:r>
           </a:p>
         </p:txBody>
       </p:sp>
@@ -17043,7 +16309,7 @@
           <p:cNvPr id="24" name="Rectángulo: esquinas redondeadas 23">
             <a:extLst>
               <a:ext uri="{FF2B5EF4-FFF2-40B4-BE49-F238E27FC236}">
-                <a16:creationId xmlns:a16="http://schemas.microsoft.com/office/drawing/2014/main" id="{2300EADB-D83D-1716-7159-5D7CB5B3B0E4}"/>
+                <a16:creationId xmlns:a16="http://schemas.microsoft.com/office/drawing/2014/main" id="{A3AE2709-8531-A073-2A7B-76444D916C2E}"/>
               </a:ext>
             </a:extLst>
           </p:cNvPr>
@@ -17052,8 +16318,8 @@
         </p:nvSpPr>
         <p:spPr>
           <a:xfrm>
-            <a:off x="4826000" y="4368800"/>
-            <a:ext cx="9398000" cy="711200"/>
+            <a:off x="4826000" y="3771900"/>
+            <a:ext cx="8890000" cy="635000"/>
           </a:xfrm>
           <a:prstGeom prst="roundRect">
             <a:avLst/>
@@ -17097,7 +16363,7 @@
           <p:cNvPr id="25" name="Rectángulo: esquinas redondeadas 24">
             <a:extLst>
               <a:ext uri="{FF2B5EF4-FFF2-40B4-BE49-F238E27FC236}">
-                <a16:creationId xmlns:a16="http://schemas.microsoft.com/office/drawing/2014/main" id="{F9B3766C-2294-CE3E-CE92-3ED34ABF1255}"/>
+                <a16:creationId xmlns:a16="http://schemas.microsoft.com/office/drawing/2014/main" id="{8BB4AA5B-2166-E479-4BD9-ED282E01DF9E}"/>
               </a:ext>
             </a:extLst>
           </p:cNvPr>
@@ -17106,14 +16372,14 @@
         </p:nvSpPr>
         <p:spPr>
           <a:xfrm>
-            <a:off x="4953000" y="4457700"/>
+            <a:off x="4953000" y="3860800"/>
             <a:ext cx="381000" cy="381000"/>
           </a:xfrm>
           <a:prstGeom prst="roundRect">
             <a:avLst/>
           </a:prstGeom>
           <a:solidFill>
-            <a:srgbClr val="EB7D00"/>
+            <a:srgbClr val="34A853"/>
           </a:solidFill>
           <a:ln w="19050" cap="flat" cmpd="sng" algn="ctr">
             <a:noFill/>
@@ -17165,7 +16431,7 @@
           <p:cNvPr id="26" name="CuadroTexto 25">
             <a:extLst>
               <a:ext uri="{FF2B5EF4-FFF2-40B4-BE49-F238E27FC236}">
-                <a16:creationId xmlns:a16="http://schemas.microsoft.com/office/drawing/2014/main" id="{EB99F3FD-10F3-7744-9623-F7CD53616B48}"/>
+                <a16:creationId xmlns:a16="http://schemas.microsoft.com/office/drawing/2014/main" id="{26B08019-0FB6-5C8E-5018-81534716DD4C}"/>
               </a:ext>
             </a:extLst>
           </p:cNvPr>
@@ -17174,7 +16440,7 @@
         </p:nvSpPr>
         <p:spPr>
           <a:xfrm>
-            <a:off x="5029200" y="4521200"/>
+            <a:off x="5029200" y="3924300"/>
             <a:ext cx="228600" cy="169277"/>
           </a:xfrm>
           <a:prstGeom prst="rect">
@@ -17196,7 +16462,7 @@
                 </a:solidFill>
                 <a:latin typeface="Aptos" panose="020B0004020202020204" pitchFamily="34" charset="0"/>
               </a:rPr>
-              <a:t>13</a:t>
+              <a:t>3</a:t>
             </a:r>
           </a:p>
         </p:txBody>
@@ -17206,7 +16472,7 @@
           <p:cNvPr id="27" name="CuadroTexto 26">
             <a:extLst>
               <a:ext uri="{FF2B5EF4-FFF2-40B4-BE49-F238E27FC236}">
-                <a16:creationId xmlns:a16="http://schemas.microsoft.com/office/drawing/2014/main" id="{FC637689-891E-FD5F-64B1-182256951D85}"/>
+                <a16:creationId xmlns:a16="http://schemas.microsoft.com/office/drawing/2014/main" id="{98862E4E-C3B0-E8CF-E13E-8325E8DA99FE}"/>
               </a:ext>
             </a:extLst>
           </p:cNvPr>
@@ -17215,8 +16481,8 @@
         </p:nvSpPr>
         <p:spPr>
           <a:xfrm>
-            <a:off x="5511800" y="4457700"/>
-            <a:ext cx="8559800" cy="184666"/>
+            <a:off x="5511800" y="3860800"/>
+            <a:ext cx="8051800" cy="184666"/>
           </a:xfrm>
           <a:prstGeom prst="rect">
             <a:avLst/>
@@ -17230,20 +16496,14 @@
           <a:lstStyle/>
           <a:p>
             <a:r>
-              <a:rPr lang="es-ES" sz="1200">
+              <a:rPr lang="es-GT" sz="1200">
                 <a:solidFill>
                   <a:srgbClr val="002D5A"/>
                 </a:solidFill>
                 <a:latin typeface="Aptos" panose="020B0004020202020204" pitchFamily="34" charset="0"/>
               </a:rPr>
-              <a:t>Construcción/Operación/Modificación de Helipuerto</a:t>
-            </a:r>
-            <a:endParaRPr lang="es-GT" sz="1200">
-              <a:solidFill>
-                <a:srgbClr val="002D5A"/>
-              </a:solidFill>
-              <a:latin typeface="Aptos" panose="020B0004020202020204" pitchFamily="34" charset="0"/>
-            </a:endParaRPr>
+              <a:t>Certificación</a:t>
+            </a:r>
           </a:p>
         </p:txBody>
       </p:sp>
@@ -17252,7 +16512,7 @@
           <p:cNvPr id="28" name="Rectángulo: esquinas redondeadas 27">
             <a:extLst>
               <a:ext uri="{FF2B5EF4-FFF2-40B4-BE49-F238E27FC236}">
-                <a16:creationId xmlns:a16="http://schemas.microsoft.com/office/drawing/2014/main" id="{7086B247-FF29-CE34-6FA6-7EFDE76486B9}"/>
+                <a16:creationId xmlns:a16="http://schemas.microsoft.com/office/drawing/2014/main" id="{1426CC89-F484-464B-C95A-442CD7A2196A}"/>
               </a:ext>
             </a:extLst>
           </p:cNvPr>
@@ -17261,8 +16521,8 @@
         </p:nvSpPr>
         <p:spPr>
           <a:xfrm>
-            <a:off x="4826000" y="5715000"/>
-            <a:ext cx="9398000" cy="1397000"/>
+            <a:off x="4826000" y="4483100"/>
+            <a:ext cx="8890000" cy="635000"/>
           </a:xfrm>
           <a:prstGeom prst="roundRect">
             <a:avLst/>
@@ -17303,10 +16563,10 @@
       </p:sp>
       <p:sp>
         <p:nvSpPr>
-          <p:cNvPr id="29" name="Rectángulo 28">
-            <a:extLst>
-              <a:ext uri="{FF2B5EF4-FFF2-40B4-BE49-F238E27FC236}">
-                <a16:creationId xmlns:a16="http://schemas.microsoft.com/office/drawing/2014/main" id="{909F7ACB-F644-01F4-FC89-87240C0B5BB2}"/>
+          <p:cNvPr id="29" name="Rectángulo: esquinas redondeadas 28">
+            <a:extLst>
+              <a:ext uri="{FF2B5EF4-FFF2-40B4-BE49-F238E27FC236}">
+                <a16:creationId xmlns:a16="http://schemas.microsoft.com/office/drawing/2014/main" id="{2A16F0ED-3E0D-8602-53AB-AB58CADCD1F4}"/>
               </a:ext>
             </a:extLst>
           </p:cNvPr>
@@ -17315,14 +16575,14 @@
         </p:nvSpPr>
         <p:spPr>
           <a:xfrm>
-            <a:off x="4826000" y="5715000"/>
-            <a:ext cx="88900" cy="1397000"/>
-          </a:xfrm>
-          <a:prstGeom prst="rect">
+            <a:off x="4953000" y="4572000"/>
+            <a:ext cx="381000" cy="381000"/>
+          </a:xfrm>
+          <a:prstGeom prst="roundRect">
             <a:avLst/>
           </a:prstGeom>
           <a:solidFill>
-            <a:srgbClr val="EB7D00"/>
+            <a:srgbClr val="34A853"/>
           </a:solidFill>
           <a:ln w="19050" cap="flat" cmpd="sng" algn="ctr">
             <a:noFill/>
@@ -17374,7 +16634,7 @@
           <p:cNvPr id="30" name="CuadroTexto 29">
             <a:extLst>
               <a:ext uri="{FF2B5EF4-FFF2-40B4-BE49-F238E27FC236}">
-                <a16:creationId xmlns:a16="http://schemas.microsoft.com/office/drawing/2014/main" id="{96A05745-A4FA-1EDC-9A4A-ABF8D7127276}"/>
+                <a16:creationId xmlns:a16="http://schemas.microsoft.com/office/drawing/2014/main" id="{FCD9AA13-63DC-1FD9-6852-4679FCC5C068}"/>
               </a:ext>
             </a:extLst>
           </p:cNvPr>
@@ -17383,8 +16643,8 @@
         </p:nvSpPr>
         <p:spPr>
           <a:xfrm>
-            <a:off x="5105400" y="5943600"/>
-            <a:ext cx="8890000" cy="261610"/>
+            <a:off x="5029200" y="4635500"/>
+            <a:ext cx="228600" cy="169277"/>
           </a:xfrm>
           <a:prstGeom prst="rect">
             <a:avLst/>
@@ -17397,14 +16657,15 @@
           </a:bodyPr>
           <a:lstStyle/>
           <a:p>
-            <a:r>
-              <a:rPr lang="es-GT" sz="1700" b="1">
-                <a:solidFill>
-                  <a:srgbClr val="001F44"/>
+            <a:pPr algn="ctr"/>
+            <a:r>
+              <a:rPr lang="es-GT" sz="1100" b="1">
+                <a:solidFill>
+                  <a:srgbClr val="FFFFFF"/>
                 </a:solidFill>
                 <a:latin typeface="Aptos" panose="020B0004020202020204" pitchFamily="34" charset="0"/>
               </a:rPr>
-              <a:t>Estado actual</a:t>
+              <a:t>4</a:t>
             </a:r>
           </a:p>
         </p:txBody>
@@ -17414,7 +16675,7 @@
           <p:cNvPr id="31" name="CuadroTexto 30">
             <a:extLst>
               <a:ext uri="{FF2B5EF4-FFF2-40B4-BE49-F238E27FC236}">
-                <a16:creationId xmlns:a16="http://schemas.microsoft.com/office/drawing/2014/main" id="{A866C896-1F26-3F90-336D-F64DE38740A3}"/>
+                <a16:creationId xmlns:a16="http://schemas.microsoft.com/office/drawing/2014/main" id="{F35F6F99-5F4F-8AEC-22BA-17819A1AA8EF}"/>
               </a:ext>
             </a:extLst>
           </p:cNvPr>
@@ -17423,8 +16684,8 @@
         </p:nvSpPr>
         <p:spPr>
           <a:xfrm>
-            <a:off x="5105400" y="6413500"/>
-            <a:ext cx="8864600" cy="430887"/>
+            <a:off x="5511800" y="4572000"/>
+            <a:ext cx="8051800" cy="184666"/>
           </a:xfrm>
           <a:prstGeom prst="rect">
             <a:avLst/>
@@ -17438,15 +16699,15 @@
           <a:lstStyle/>
           <a:p>
             <a:r>
-              <a:rPr lang="es-ES" sz="1400">
+              <a:rPr lang="es-ES" sz="1200">
                 <a:solidFill>
                   <a:srgbClr val="002D5A"/>
                 </a:solidFill>
                 <a:latin typeface="Aptos" panose="020B0004020202020204" pitchFamily="34" charset="0"/>
               </a:rPr>
-              <a:t>Los trámites de infraestructura se encuentran en análisis de requerimientos. Codificación, pruebas, implementación, capacitación y lanzamiento aún no han iniciado.</a:t>
-            </a:r>
-            <a:endParaRPr lang="es-GT" sz="1400">
+              <a:t>Contraseña de pago de otros rubros</a:t>
+            </a:r>
+            <a:endParaRPr lang="es-GT" sz="1200">
               <a:solidFill>
                 <a:srgbClr val="002D5A"/>
               </a:solidFill>
@@ -17457,10 +16718,1255 @@
       </p:sp>
       <p:sp>
         <p:nvSpPr>
-          <p:cNvPr id="32" name="Rectángulo 31">
-            <a:extLst>
-              <a:ext uri="{FF2B5EF4-FFF2-40B4-BE49-F238E27FC236}">
-                <a16:creationId xmlns:a16="http://schemas.microsoft.com/office/drawing/2014/main" id="{49A8465A-ED4A-6F5D-3F0F-338F3312180B}"/>
+          <p:cNvPr id="32" name="Rectángulo: esquinas redondeadas 31">
+            <a:extLst>
+              <a:ext uri="{FF2B5EF4-FFF2-40B4-BE49-F238E27FC236}">
+                <a16:creationId xmlns:a16="http://schemas.microsoft.com/office/drawing/2014/main" id="{3C43C90B-46F5-5B47-9306-3C3757ACFF8A}"/>
+              </a:ext>
+            </a:extLst>
+          </p:cNvPr>
+          <p:cNvSpPr/>
+          <p:nvPr/>
+        </p:nvSpPr>
+        <p:spPr>
+          <a:xfrm>
+            <a:off x="4826000" y="5194300"/>
+            <a:ext cx="8890000" cy="635000"/>
+          </a:xfrm>
+          <a:prstGeom prst="roundRect">
+            <a:avLst/>
+          </a:prstGeom>
+          <a:solidFill>
+            <a:srgbClr val="FFFFFF"/>
+          </a:solidFill>
+          <a:ln w="15875">
+            <a:solidFill>
+              <a:srgbClr val="BFD8F2"/>
+            </a:solidFill>
+          </a:ln>
+        </p:spPr>
+        <p:style>
+          <a:lnRef idx="2">
+            <a:schemeClr val="accent1">
+              <a:shade val="15000"/>
+            </a:schemeClr>
+          </a:lnRef>
+          <a:fillRef idx="1">
+            <a:schemeClr val="accent1"/>
+          </a:fillRef>
+          <a:effectRef idx="0">
+            <a:schemeClr val="accent1"/>
+          </a:effectRef>
+          <a:fontRef idx="minor">
+            <a:schemeClr val="lt1"/>
+          </a:fontRef>
+        </p:style>
+        <p:txBody>
+          <a:bodyPr rtlCol="0" anchor="ctr"/>
+          <a:lstStyle/>
+          <a:p>
+            <a:pPr algn="ctr"/>
+            <a:endParaRPr lang="es-GT"/>
+          </a:p>
+        </p:txBody>
+      </p:sp>
+      <p:sp>
+        <p:nvSpPr>
+          <p:cNvPr id="33" name="Rectángulo: esquinas redondeadas 32">
+            <a:extLst>
+              <a:ext uri="{FF2B5EF4-FFF2-40B4-BE49-F238E27FC236}">
+                <a16:creationId xmlns:a16="http://schemas.microsoft.com/office/drawing/2014/main" id="{2CF4A84F-C113-241A-567E-0CE7264F2E97}"/>
+              </a:ext>
+            </a:extLst>
+          </p:cNvPr>
+          <p:cNvSpPr/>
+          <p:nvPr/>
+        </p:nvSpPr>
+        <p:spPr>
+          <a:xfrm>
+            <a:off x="4953000" y="5283200"/>
+            <a:ext cx="381000" cy="381000"/>
+          </a:xfrm>
+          <a:prstGeom prst="roundRect">
+            <a:avLst/>
+          </a:prstGeom>
+          <a:solidFill>
+            <a:srgbClr val="34A853"/>
+          </a:solidFill>
+          <a:ln w="19050" cap="flat" cmpd="sng" algn="ctr">
+            <a:noFill/>
+            <a:prstDash val="solid"/>
+            <a:miter lim="800000"/>
+          </a:ln>
+          <a:effectLst/>
+          <a:extLst>
+            <a:ext uri="{91240B29-F687-4F45-9708-019B960494DF}">
+              <a14:hiddenLine xmlns:a14="http://schemas.microsoft.com/office/drawing/2010/main" w="19050" cap="flat" cmpd="sng" algn="ctr">
+                <a:solidFill>
+                  <a:schemeClr val="accent1">
+                    <a:shade val="15000"/>
+                  </a:schemeClr>
+                </a:solidFill>
+                <a:prstDash val="solid"/>
+                <a:miter lim="800000"/>
+              </a14:hiddenLine>
+            </a:ext>
+          </a:extLst>
+        </p:spPr>
+        <p:style>
+          <a:lnRef idx="2">
+            <a:schemeClr val="accent1">
+              <a:shade val="15000"/>
+            </a:schemeClr>
+          </a:lnRef>
+          <a:fillRef idx="1">
+            <a:schemeClr val="accent1"/>
+          </a:fillRef>
+          <a:effectRef idx="0">
+            <a:schemeClr val="accent1"/>
+          </a:effectRef>
+          <a:fontRef idx="minor">
+            <a:schemeClr val="lt1"/>
+          </a:fontRef>
+        </p:style>
+        <p:txBody>
+          <a:bodyPr rtlCol="0" anchor="ctr"/>
+          <a:lstStyle/>
+          <a:p>
+            <a:pPr algn="ctr"/>
+            <a:endParaRPr lang="es-GT"/>
+          </a:p>
+        </p:txBody>
+      </p:sp>
+      <p:sp>
+        <p:nvSpPr>
+          <p:cNvPr id="34" name="CuadroTexto 33">
+            <a:extLst>
+              <a:ext uri="{FF2B5EF4-FFF2-40B4-BE49-F238E27FC236}">
+                <a16:creationId xmlns:a16="http://schemas.microsoft.com/office/drawing/2014/main" id="{EC6A85F6-C3DB-EE7E-BB48-9AD1AF0AA84B}"/>
+              </a:ext>
+            </a:extLst>
+          </p:cNvPr>
+          <p:cNvSpPr txBox="1"/>
+          <p:nvPr/>
+        </p:nvSpPr>
+        <p:spPr>
+          <a:xfrm>
+            <a:off x="5029200" y="5346700"/>
+            <a:ext cx="228600" cy="169277"/>
+          </a:xfrm>
+          <a:prstGeom prst="rect">
+            <a:avLst/>
+          </a:prstGeom>
+          <a:noFill/>
+        </p:spPr>
+        <p:txBody>
+          <a:bodyPr vert="horz" lIns="0" tIns="0" rIns="0" bIns="0" rtlCol="0">
+            <a:spAutoFit/>
+          </a:bodyPr>
+          <a:lstStyle/>
+          <a:p>
+            <a:pPr algn="ctr"/>
+            <a:r>
+              <a:rPr lang="es-GT" sz="1100" b="1">
+                <a:solidFill>
+                  <a:srgbClr val="FFFFFF"/>
+                </a:solidFill>
+                <a:latin typeface="Aptos" panose="020B0004020202020204" pitchFamily="34" charset="0"/>
+              </a:rPr>
+              <a:t>5</a:t>
+            </a:r>
+          </a:p>
+        </p:txBody>
+      </p:sp>
+      <p:sp>
+        <p:nvSpPr>
+          <p:cNvPr id="35" name="CuadroTexto 34">
+            <a:extLst>
+              <a:ext uri="{FF2B5EF4-FFF2-40B4-BE49-F238E27FC236}">
+                <a16:creationId xmlns:a16="http://schemas.microsoft.com/office/drawing/2014/main" id="{0F3C51B1-CD81-1E75-E9D0-A47CBD89FD96}"/>
+              </a:ext>
+            </a:extLst>
+          </p:cNvPr>
+          <p:cNvSpPr txBox="1"/>
+          <p:nvPr/>
+        </p:nvSpPr>
+        <p:spPr>
+          <a:xfrm>
+            <a:off x="5511800" y="5283200"/>
+            <a:ext cx="8051800" cy="184666"/>
+          </a:xfrm>
+          <a:prstGeom prst="rect">
+            <a:avLst/>
+          </a:prstGeom>
+          <a:noFill/>
+        </p:spPr>
+        <p:txBody>
+          <a:bodyPr vert="horz" lIns="0" tIns="0" rIns="0" bIns="0" rtlCol="0">
+            <a:spAutoFit/>
+          </a:bodyPr>
+          <a:lstStyle/>
+          <a:p>
+            <a:r>
+              <a:rPr lang="es-GT" sz="1200">
+                <a:solidFill>
+                  <a:srgbClr val="002D5A"/>
+                </a:solidFill>
+                <a:latin typeface="Aptos" panose="020B0004020202020204" pitchFamily="34" charset="0"/>
+              </a:rPr>
+              <a:t>Solvencia financiera</a:t>
+            </a:r>
+          </a:p>
+        </p:txBody>
+      </p:sp>
+      <p:sp>
+        <p:nvSpPr>
+          <p:cNvPr id="36" name="Elipse 35">
+            <a:extLst>
+              <a:ext uri="{FF2B5EF4-FFF2-40B4-BE49-F238E27FC236}">
+                <a16:creationId xmlns:a16="http://schemas.microsoft.com/office/drawing/2014/main" id="{6C521214-1EBB-8C58-C8BB-FF722FB79C55}"/>
+              </a:ext>
+            </a:extLst>
+          </p:cNvPr>
+          <p:cNvSpPr/>
+          <p:nvPr/>
+        </p:nvSpPr>
+        <p:spPr>
+          <a:xfrm>
+            <a:off x="1841500" y="6540500"/>
+            <a:ext cx="660400" cy="660400"/>
+          </a:xfrm>
+          <a:prstGeom prst="ellipse">
+            <a:avLst/>
+          </a:prstGeom>
+          <a:solidFill>
+            <a:srgbClr val="34A853"/>
+          </a:solidFill>
+          <a:ln w="19050" cap="flat" cmpd="sng" algn="ctr">
+            <a:noFill/>
+            <a:prstDash val="solid"/>
+            <a:miter lim="800000"/>
+          </a:ln>
+          <a:effectLst/>
+          <a:extLst>
+            <a:ext uri="{91240B29-F687-4F45-9708-019B960494DF}">
+              <a14:hiddenLine xmlns:a14="http://schemas.microsoft.com/office/drawing/2010/main" w="19050" cap="flat" cmpd="sng" algn="ctr">
+                <a:solidFill>
+                  <a:schemeClr val="accent1">
+                    <a:shade val="15000"/>
+                  </a:schemeClr>
+                </a:solidFill>
+                <a:prstDash val="solid"/>
+                <a:miter lim="800000"/>
+              </a14:hiddenLine>
+            </a:ext>
+          </a:extLst>
+        </p:spPr>
+        <p:style>
+          <a:lnRef idx="2">
+            <a:schemeClr val="accent1">
+              <a:shade val="15000"/>
+            </a:schemeClr>
+          </a:lnRef>
+          <a:fillRef idx="1">
+            <a:schemeClr val="accent1"/>
+          </a:fillRef>
+          <a:effectRef idx="0">
+            <a:schemeClr val="accent1"/>
+          </a:effectRef>
+          <a:fontRef idx="minor">
+            <a:schemeClr val="lt1"/>
+          </a:fontRef>
+        </p:style>
+        <p:txBody>
+          <a:bodyPr rtlCol="0" anchor="ctr"/>
+          <a:lstStyle/>
+          <a:p>
+            <a:pPr algn="ctr"/>
+            <a:endParaRPr lang="es-GT"/>
+          </a:p>
+        </p:txBody>
+      </p:sp>
+      <p:sp>
+        <p:nvSpPr>
+          <p:cNvPr id="37" name="CuadroTexto 36">
+            <a:extLst>
+              <a:ext uri="{FF2B5EF4-FFF2-40B4-BE49-F238E27FC236}">
+                <a16:creationId xmlns:a16="http://schemas.microsoft.com/office/drawing/2014/main" id="{0DCCAA3E-FC07-FE18-CE82-50BADADD2941}"/>
+              </a:ext>
+            </a:extLst>
+          </p:cNvPr>
+          <p:cNvSpPr txBox="1"/>
+          <p:nvPr/>
+        </p:nvSpPr>
+        <p:spPr>
+          <a:xfrm>
+            <a:off x="2006600" y="6642100"/>
+            <a:ext cx="330200" cy="369332"/>
+          </a:xfrm>
+          <a:prstGeom prst="rect">
+            <a:avLst/>
+          </a:prstGeom>
+          <a:noFill/>
+        </p:spPr>
+        <p:txBody>
+          <a:bodyPr vert="horz" lIns="0" tIns="0" rIns="0" bIns="0" rtlCol="0">
+            <a:spAutoFit/>
+          </a:bodyPr>
+          <a:lstStyle/>
+          <a:p>
+            <a:pPr algn="ctr"/>
+            <a:r>
+              <a:rPr lang="es-GT" sz="2400" b="1">
+                <a:solidFill>
+                  <a:srgbClr val="FFFFFF"/>
+                </a:solidFill>
+                <a:latin typeface="Aptos" panose="020B0004020202020204" pitchFamily="34" charset="0"/>
+              </a:rPr>
+              <a:t>✓</a:t>
+            </a:r>
+          </a:p>
+        </p:txBody>
+      </p:sp>
+      <p:sp>
+        <p:nvSpPr>
+          <p:cNvPr id="38" name="CuadroTexto 37">
+            <a:extLst>
+              <a:ext uri="{FF2B5EF4-FFF2-40B4-BE49-F238E27FC236}">
+                <a16:creationId xmlns:a16="http://schemas.microsoft.com/office/drawing/2014/main" id="{C0F8E4F0-48D7-9467-0FDD-E2FBE4AB59CB}"/>
+              </a:ext>
+            </a:extLst>
+          </p:cNvPr>
+          <p:cNvSpPr txBox="1"/>
+          <p:nvPr/>
+        </p:nvSpPr>
+        <p:spPr>
+          <a:xfrm>
+            <a:off x="1587500" y="7302500"/>
+            <a:ext cx="1168400" cy="153888"/>
+          </a:xfrm>
+          <a:prstGeom prst="rect">
+            <a:avLst/>
+          </a:prstGeom>
+          <a:noFill/>
+        </p:spPr>
+        <p:txBody>
+          <a:bodyPr vert="horz" lIns="0" tIns="0" rIns="0" bIns="0" rtlCol="0">
+            <a:spAutoFit/>
+          </a:bodyPr>
+          <a:lstStyle/>
+          <a:p>
+            <a:pPr algn="ctr"/>
+            <a:r>
+              <a:rPr lang="es-GT" sz="1000">
+                <a:solidFill>
+                  <a:srgbClr val="002D5A"/>
+                </a:solidFill>
+                <a:latin typeface="Aptos" panose="020B0004020202020204" pitchFamily="34" charset="0"/>
+              </a:rPr>
+              <a:t>Análisis finalizado</a:t>
+            </a:r>
+          </a:p>
+        </p:txBody>
+      </p:sp>
+      <p:cxnSp>
+        <p:nvCxnSpPr>
+          <p:cNvPr id="39" name="Conector recto 38">
+            <a:extLst>
+              <a:ext uri="{FF2B5EF4-FFF2-40B4-BE49-F238E27FC236}">
+                <a16:creationId xmlns:a16="http://schemas.microsoft.com/office/drawing/2014/main" id="{B9FDA448-C800-58E1-CE6F-F8E9B4F8DF6A}"/>
+              </a:ext>
+            </a:extLst>
+          </p:cNvPr>
+          <p:cNvCxnSpPr/>
+          <p:nvPr/>
+        </p:nvCxnSpPr>
+        <p:spPr>
+          <a:xfrm>
+            <a:off x="2603500" y="6870700"/>
+            <a:ext cx="1016000" cy="0"/>
+          </a:xfrm>
+          <a:prstGeom prst="line">
+            <a:avLst/>
+          </a:prstGeom>
+          <a:ln w="25400">
+            <a:solidFill>
+              <a:srgbClr val="BFD8F2"/>
+            </a:solidFill>
+            <a:tailEnd type="arrow"/>
+          </a:ln>
+        </p:spPr>
+        <p:style>
+          <a:lnRef idx="2">
+            <a:schemeClr val="accent1"/>
+          </a:lnRef>
+          <a:fillRef idx="0">
+            <a:schemeClr val="accent1"/>
+          </a:fillRef>
+          <a:effectRef idx="1">
+            <a:schemeClr val="accent1"/>
+          </a:effectRef>
+          <a:fontRef idx="minor">
+            <a:schemeClr val="tx1"/>
+          </a:fontRef>
+        </p:style>
+      </p:cxnSp>
+      <p:sp>
+        <p:nvSpPr>
+          <p:cNvPr id="40" name="Elipse 39">
+            <a:extLst>
+              <a:ext uri="{FF2B5EF4-FFF2-40B4-BE49-F238E27FC236}">
+                <a16:creationId xmlns:a16="http://schemas.microsoft.com/office/drawing/2014/main" id="{A2C64A50-2DAE-9E17-45BF-B6404FA72826}"/>
+              </a:ext>
+            </a:extLst>
+          </p:cNvPr>
+          <p:cNvSpPr/>
+          <p:nvPr/>
+        </p:nvSpPr>
+        <p:spPr>
+          <a:xfrm>
+            <a:off x="3810000" y="6540500"/>
+            <a:ext cx="660400" cy="660400"/>
+          </a:xfrm>
+          <a:prstGeom prst="ellipse">
+            <a:avLst/>
+          </a:prstGeom>
+          <a:solidFill>
+            <a:srgbClr val="34A853"/>
+          </a:solidFill>
+          <a:ln w="19050" cap="flat" cmpd="sng" algn="ctr">
+            <a:noFill/>
+            <a:prstDash val="solid"/>
+            <a:miter lim="800000"/>
+          </a:ln>
+          <a:effectLst/>
+          <a:extLst>
+            <a:ext uri="{91240B29-F687-4F45-9708-019B960494DF}">
+              <a14:hiddenLine xmlns:a14="http://schemas.microsoft.com/office/drawing/2010/main" w="19050" cap="flat" cmpd="sng" algn="ctr">
+                <a:solidFill>
+                  <a:schemeClr val="accent1">
+                    <a:shade val="15000"/>
+                  </a:schemeClr>
+                </a:solidFill>
+                <a:prstDash val="solid"/>
+                <a:miter lim="800000"/>
+              </a14:hiddenLine>
+            </a:ext>
+          </a:extLst>
+        </p:spPr>
+        <p:style>
+          <a:lnRef idx="2">
+            <a:schemeClr val="accent1">
+              <a:shade val="15000"/>
+            </a:schemeClr>
+          </a:lnRef>
+          <a:fillRef idx="1">
+            <a:schemeClr val="accent1"/>
+          </a:fillRef>
+          <a:effectRef idx="0">
+            <a:schemeClr val="accent1"/>
+          </a:effectRef>
+          <a:fontRef idx="minor">
+            <a:schemeClr val="lt1"/>
+          </a:fontRef>
+        </p:style>
+        <p:txBody>
+          <a:bodyPr rtlCol="0" anchor="ctr"/>
+          <a:lstStyle/>
+          <a:p>
+            <a:pPr algn="ctr"/>
+            <a:endParaRPr lang="es-GT"/>
+          </a:p>
+        </p:txBody>
+      </p:sp>
+      <p:sp>
+        <p:nvSpPr>
+          <p:cNvPr id="41" name="CuadroTexto 40">
+            <a:extLst>
+              <a:ext uri="{FF2B5EF4-FFF2-40B4-BE49-F238E27FC236}">
+                <a16:creationId xmlns:a16="http://schemas.microsoft.com/office/drawing/2014/main" id="{0D887198-1FF2-059F-C793-3A8C92A2A346}"/>
+              </a:ext>
+            </a:extLst>
+          </p:cNvPr>
+          <p:cNvSpPr txBox="1"/>
+          <p:nvPr/>
+        </p:nvSpPr>
+        <p:spPr>
+          <a:xfrm>
+            <a:off x="3975100" y="6642100"/>
+            <a:ext cx="330200" cy="369332"/>
+          </a:xfrm>
+          <a:prstGeom prst="rect">
+            <a:avLst/>
+          </a:prstGeom>
+          <a:noFill/>
+        </p:spPr>
+        <p:txBody>
+          <a:bodyPr vert="horz" lIns="0" tIns="0" rIns="0" bIns="0" rtlCol="0">
+            <a:spAutoFit/>
+          </a:bodyPr>
+          <a:lstStyle/>
+          <a:p>
+            <a:pPr algn="ctr"/>
+            <a:r>
+              <a:rPr lang="es-GT" sz="2400" b="1">
+                <a:solidFill>
+                  <a:srgbClr val="FFFFFF"/>
+                </a:solidFill>
+                <a:latin typeface="Aptos" panose="020B0004020202020204" pitchFamily="34" charset="0"/>
+              </a:rPr>
+              <a:t>✓</a:t>
+            </a:r>
+          </a:p>
+        </p:txBody>
+      </p:sp>
+      <p:sp>
+        <p:nvSpPr>
+          <p:cNvPr id="42" name="CuadroTexto 41">
+            <a:extLst>
+              <a:ext uri="{FF2B5EF4-FFF2-40B4-BE49-F238E27FC236}">
+                <a16:creationId xmlns:a16="http://schemas.microsoft.com/office/drawing/2014/main" id="{B81C4E9E-D320-57DD-C09A-5D3F9C76D992}"/>
+              </a:ext>
+            </a:extLst>
+          </p:cNvPr>
+          <p:cNvSpPr txBox="1"/>
+          <p:nvPr/>
+        </p:nvSpPr>
+        <p:spPr>
+          <a:xfrm>
+            <a:off x="3556000" y="7302500"/>
+            <a:ext cx="1168400" cy="153888"/>
+          </a:xfrm>
+          <a:prstGeom prst="rect">
+            <a:avLst/>
+          </a:prstGeom>
+          <a:noFill/>
+        </p:spPr>
+        <p:txBody>
+          <a:bodyPr vert="horz" lIns="0" tIns="0" rIns="0" bIns="0" rtlCol="0">
+            <a:spAutoFit/>
+          </a:bodyPr>
+          <a:lstStyle/>
+          <a:p>
+            <a:pPr algn="ctr"/>
+            <a:r>
+              <a:rPr lang="es-GT" sz="1000">
+                <a:solidFill>
+                  <a:srgbClr val="002D5A"/>
+                </a:solidFill>
+                <a:latin typeface="Aptos" panose="020B0004020202020204" pitchFamily="34" charset="0"/>
+              </a:rPr>
+              <a:t>Desarrollo finalizado</a:t>
+            </a:r>
+          </a:p>
+        </p:txBody>
+      </p:sp>
+      <p:cxnSp>
+        <p:nvCxnSpPr>
+          <p:cNvPr id="43" name="Conector recto 42">
+            <a:extLst>
+              <a:ext uri="{FF2B5EF4-FFF2-40B4-BE49-F238E27FC236}">
+                <a16:creationId xmlns:a16="http://schemas.microsoft.com/office/drawing/2014/main" id="{95EC6155-42D8-7643-E340-C5FF075BA49E}"/>
+              </a:ext>
+            </a:extLst>
+          </p:cNvPr>
+          <p:cNvCxnSpPr/>
+          <p:nvPr/>
+        </p:nvCxnSpPr>
+        <p:spPr>
+          <a:xfrm>
+            <a:off x="4572000" y="6870700"/>
+            <a:ext cx="1016000" cy="0"/>
+          </a:xfrm>
+          <a:prstGeom prst="line">
+            <a:avLst/>
+          </a:prstGeom>
+          <a:ln w="25400">
+            <a:solidFill>
+              <a:srgbClr val="BFD8F2"/>
+            </a:solidFill>
+            <a:tailEnd type="arrow"/>
+          </a:ln>
+        </p:spPr>
+        <p:style>
+          <a:lnRef idx="2">
+            <a:schemeClr val="accent1"/>
+          </a:lnRef>
+          <a:fillRef idx="0">
+            <a:schemeClr val="accent1"/>
+          </a:fillRef>
+          <a:effectRef idx="1">
+            <a:schemeClr val="accent1"/>
+          </a:effectRef>
+          <a:fontRef idx="minor">
+            <a:schemeClr val="tx1"/>
+          </a:fontRef>
+        </p:style>
+      </p:cxnSp>
+      <p:sp>
+        <p:nvSpPr>
+          <p:cNvPr id="44" name="Elipse 43">
+            <a:extLst>
+              <a:ext uri="{FF2B5EF4-FFF2-40B4-BE49-F238E27FC236}">
+                <a16:creationId xmlns:a16="http://schemas.microsoft.com/office/drawing/2014/main" id="{74D8CF7F-944D-EB05-9ACB-4F99CDF07EB1}"/>
+              </a:ext>
+            </a:extLst>
+          </p:cNvPr>
+          <p:cNvSpPr/>
+          <p:nvPr/>
+        </p:nvSpPr>
+        <p:spPr>
+          <a:xfrm>
+            <a:off x="5778500" y="6540500"/>
+            <a:ext cx="660400" cy="660400"/>
+          </a:xfrm>
+          <a:prstGeom prst="ellipse">
+            <a:avLst/>
+          </a:prstGeom>
+          <a:solidFill>
+            <a:srgbClr val="34A853"/>
+          </a:solidFill>
+          <a:ln w="19050" cap="flat" cmpd="sng" algn="ctr">
+            <a:noFill/>
+            <a:prstDash val="solid"/>
+            <a:miter lim="800000"/>
+          </a:ln>
+          <a:effectLst/>
+          <a:extLst>
+            <a:ext uri="{91240B29-F687-4F45-9708-019B960494DF}">
+              <a14:hiddenLine xmlns:a14="http://schemas.microsoft.com/office/drawing/2010/main" w="19050" cap="flat" cmpd="sng" algn="ctr">
+                <a:solidFill>
+                  <a:schemeClr val="accent1">
+                    <a:shade val="15000"/>
+                  </a:schemeClr>
+                </a:solidFill>
+                <a:prstDash val="solid"/>
+                <a:miter lim="800000"/>
+              </a14:hiddenLine>
+            </a:ext>
+          </a:extLst>
+        </p:spPr>
+        <p:style>
+          <a:lnRef idx="2">
+            <a:schemeClr val="accent1">
+              <a:shade val="15000"/>
+            </a:schemeClr>
+          </a:lnRef>
+          <a:fillRef idx="1">
+            <a:schemeClr val="accent1"/>
+          </a:fillRef>
+          <a:effectRef idx="0">
+            <a:schemeClr val="accent1"/>
+          </a:effectRef>
+          <a:fontRef idx="minor">
+            <a:schemeClr val="lt1"/>
+          </a:fontRef>
+        </p:style>
+        <p:txBody>
+          <a:bodyPr rtlCol="0" anchor="ctr"/>
+          <a:lstStyle/>
+          <a:p>
+            <a:pPr algn="ctr"/>
+            <a:endParaRPr lang="es-GT"/>
+          </a:p>
+        </p:txBody>
+      </p:sp>
+      <p:sp>
+        <p:nvSpPr>
+          <p:cNvPr id="45" name="CuadroTexto 44">
+            <a:extLst>
+              <a:ext uri="{FF2B5EF4-FFF2-40B4-BE49-F238E27FC236}">
+                <a16:creationId xmlns:a16="http://schemas.microsoft.com/office/drawing/2014/main" id="{6E85B5A3-EC3F-11B9-FB6C-5CAAF3580C0D}"/>
+              </a:ext>
+            </a:extLst>
+          </p:cNvPr>
+          <p:cNvSpPr txBox="1"/>
+          <p:nvPr/>
+        </p:nvSpPr>
+        <p:spPr>
+          <a:xfrm>
+            <a:off x="5943600" y="6642100"/>
+            <a:ext cx="330200" cy="369332"/>
+          </a:xfrm>
+          <a:prstGeom prst="rect">
+            <a:avLst/>
+          </a:prstGeom>
+          <a:noFill/>
+        </p:spPr>
+        <p:txBody>
+          <a:bodyPr vert="horz" lIns="0" tIns="0" rIns="0" bIns="0" rtlCol="0">
+            <a:spAutoFit/>
+          </a:bodyPr>
+          <a:lstStyle/>
+          <a:p>
+            <a:pPr algn="ctr"/>
+            <a:r>
+              <a:rPr lang="es-GT" sz="2400" b="1">
+                <a:solidFill>
+                  <a:srgbClr val="FFFFFF"/>
+                </a:solidFill>
+                <a:latin typeface="Aptos" panose="020B0004020202020204" pitchFamily="34" charset="0"/>
+              </a:rPr>
+              <a:t>✓</a:t>
+            </a:r>
+          </a:p>
+        </p:txBody>
+      </p:sp>
+      <p:sp>
+        <p:nvSpPr>
+          <p:cNvPr id="46" name="CuadroTexto 45">
+            <a:extLst>
+              <a:ext uri="{FF2B5EF4-FFF2-40B4-BE49-F238E27FC236}">
+                <a16:creationId xmlns:a16="http://schemas.microsoft.com/office/drawing/2014/main" id="{8FE83884-537A-CB7B-F7E9-1D065F231C0C}"/>
+              </a:ext>
+            </a:extLst>
+          </p:cNvPr>
+          <p:cNvSpPr txBox="1"/>
+          <p:nvPr/>
+        </p:nvSpPr>
+        <p:spPr>
+          <a:xfrm>
+            <a:off x="5524500" y="7302500"/>
+            <a:ext cx="1168400" cy="153888"/>
+          </a:xfrm>
+          <a:prstGeom prst="rect">
+            <a:avLst/>
+          </a:prstGeom>
+          <a:noFill/>
+        </p:spPr>
+        <p:txBody>
+          <a:bodyPr vert="horz" lIns="0" tIns="0" rIns="0" bIns="0" rtlCol="0">
+            <a:spAutoFit/>
+          </a:bodyPr>
+          <a:lstStyle/>
+          <a:p>
+            <a:pPr algn="ctr"/>
+            <a:r>
+              <a:rPr lang="es-GT" sz="1000">
+                <a:solidFill>
+                  <a:srgbClr val="002D5A"/>
+                </a:solidFill>
+                <a:latin typeface="Aptos" panose="020B0004020202020204" pitchFamily="34" charset="0"/>
+              </a:rPr>
+              <a:t>Pruebas finalizadas</a:t>
+            </a:r>
+          </a:p>
+        </p:txBody>
+      </p:sp>
+      <p:cxnSp>
+        <p:nvCxnSpPr>
+          <p:cNvPr id="47" name="Conector recto 46">
+            <a:extLst>
+              <a:ext uri="{FF2B5EF4-FFF2-40B4-BE49-F238E27FC236}">
+                <a16:creationId xmlns:a16="http://schemas.microsoft.com/office/drawing/2014/main" id="{7CC80C5B-CE30-F0CA-6609-9C09BD8F92C3}"/>
+              </a:ext>
+            </a:extLst>
+          </p:cNvPr>
+          <p:cNvCxnSpPr/>
+          <p:nvPr/>
+        </p:nvCxnSpPr>
+        <p:spPr>
+          <a:xfrm>
+            <a:off x="6540500" y="6870700"/>
+            <a:ext cx="1016000" cy="0"/>
+          </a:xfrm>
+          <a:prstGeom prst="line">
+            <a:avLst/>
+          </a:prstGeom>
+          <a:ln w="25400">
+            <a:solidFill>
+              <a:srgbClr val="BFD8F2"/>
+            </a:solidFill>
+            <a:tailEnd type="arrow"/>
+          </a:ln>
+        </p:spPr>
+        <p:style>
+          <a:lnRef idx="2">
+            <a:schemeClr val="accent1"/>
+          </a:lnRef>
+          <a:fillRef idx="0">
+            <a:schemeClr val="accent1"/>
+          </a:fillRef>
+          <a:effectRef idx="1">
+            <a:schemeClr val="accent1"/>
+          </a:effectRef>
+          <a:fontRef idx="minor">
+            <a:schemeClr val="tx1"/>
+          </a:fontRef>
+        </p:style>
+      </p:cxnSp>
+      <p:sp>
+        <p:nvSpPr>
+          <p:cNvPr id="48" name="Elipse 47">
+            <a:extLst>
+              <a:ext uri="{FF2B5EF4-FFF2-40B4-BE49-F238E27FC236}">
+                <a16:creationId xmlns:a16="http://schemas.microsoft.com/office/drawing/2014/main" id="{5E610E26-E265-79A7-FBCF-FC88DA7092F0}"/>
+              </a:ext>
+            </a:extLst>
+          </p:cNvPr>
+          <p:cNvSpPr/>
+          <p:nvPr/>
+        </p:nvSpPr>
+        <p:spPr>
+          <a:xfrm>
+            <a:off x="7747000" y="6540500"/>
+            <a:ext cx="660400" cy="660400"/>
+          </a:xfrm>
+          <a:prstGeom prst="ellipse">
+            <a:avLst/>
+          </a:prstGeom>
+          <a:solidFill>
+            <a:srgbClr val="34A853"/>
+          </a:solidFill>
+          <a:ln w="19050" cap="flat" cmpd="sng" algn="ctr">
+            <a:noFill/>
+            <a:prstDash val="solid"/>
+            <a:miter lim="800000"/>
+          </a:ln>
+          <a:effectLst/>
+          <a:extLst>
+            <a:ext uri="{91240B29-F687-4F45-9708-019B960494DF}">
+              <a14:hiddenLine xmlns:a14="http://schemas.microsoft.com/office/drawing/2010/main" w="19050" cap="flat" cmpd="sng" algn="ctr">
+                <a:solidFill>
+                  <a:schemeClr val="accent1">
+                    <a:shade val="15000"/>
+                  </a:schemeClr>
+                </a:solidFill>
+                <a:prstDash val="solid"/>
+                <a:miter lim="800000"/>
+              </a14:hiddenLine>
+            </a:ext>
+          </a:extLst>
+        </p:spPr>
+        <p:style>
+          <a:lnRef idx="2">
+            <a:schemeClr val="accent1">
+              <a:shade val="15000"/>
+            </a:schemeClr>
+          </a:lnRef>
+          <a:fillRef idx="1">
+            <a:schemeClr val="accent1"/>
+          </a:fillRef>
+          <a:effectRef idx="0">
+            <a:schemeClr val="accent1"/>
+          </a:effectRef>
+          <a:fontRef idx="minor">
+            <a:schemeClr val="lt1"/>
+          </a:fontRef>
+        </p:style>
+        <p:txBody>
+          <a:bodyPr rtlCol="0" anchor="ctr"/>
+          <a:lstStyle/>
+          <a:p>
+            <a:pPr algn="ctr"/>
+            <a:endParaRPr lang="es-GT"/>
+          </a:p>
+        </p:txBody>
+      </p:sp>
+      <p:sp>
+        <p:nvSpPr>
+          <p:cNvPr id="49" name="CuadroTexto 48">
+            <a:extLst>
+              <a:ext uri="{FF2B5EF4-FFF2-40B4-BE49-F238E27FC236}">
+                <a16:creationId xmlns:a16="http://schemas.microsoft.com/office/drawing/2014/main" id="{4ED4C1B1-E22D-63EF-685B-A16FCCE470F8}"/>
+              </a:ext>
+            </a:extLst>
+          </p:cNvPr>
+          <p:cNvSpPr txBox="1"/>
+          <p:nvPr/>
+        </p:nvSpPr>
+        <p:spPr>
+          <a:xfrm>
+            <a:off x="7912100" y="6642100"/>
+            <a:ext cx="330200" cy="369332"/>
+          </a:xfrm>
+          <a:prstGeom prst="rect">
+            <a:avLst/>
+          </a:prstGeom>
+          <a:noFill/>
+        </p:spPr>
+        <p:txBody>
+          <a:bodyPr vert="horz" lIns="0" tIns="0" rIns="0" bIns="0" rtlCol="0">
+            <a:spAutoFit/>
+          </a:bodyPr>
+          <a:lstStyle/>
+          <a:p>
+            <a:pPr algn="ctr"/>
+            <a:r>
+              <a:rPr lang="es-GT" sz="2400" b="1" dirty="0">
+                <a:solidFill>
+                  <a:srgbClr val="FFFFFF"/>
+                </a:solidFill>
+                <a:latin typeface="Aptos" panose="020B0004020202020204" pitchFamily="34" charset="0"/>
+              </a:rPr>
+              <a:t>✓</a:t>
+            </a:r>
+          </a:p>
+        </p:txBody>
+      </p:sp>
+      <p:sp>
+        <p:nvSpPr>
+          <p:cNvPr id="50" name="CuadroTexto 49">
+            <a:extLst>
+              <a:ext uri="{FF2B5EF4-FFF2-40B4-BE49-F238E27FC236}">
+                <a16:creationId xmlns:a16="http://schemas.microsoft.com/office/drawing/2014/main" id="{BB1419AB-80E1-4375-470B-B8E0C5CE3CFA}"/>
+              </a:ext>
+            </a:extLst>
+          </p:cNvPr>
+          <p:cNvSpPr txBox="1"/>
+          <p:nvPr/>
+        </p:nvSpPr>
+        <p:spPr>
+          <a:xfrm>
+            <a:off x="7493000" y="7302500"/>
+            <a:ext cx="1168400" cy="307777"/>
+          </a:xfrm>
+          <a:prstGeom prst="rect">
+            <a:avLst/>
+          </a:prstGeom>
+          <a:noFill/>
+        </p:spPr>
+        <p:txBody>
+          <a:bodyPr vert="horz" lIns="0" tIns="0" rIns="0" bIns="0" rtlCol="0">
+            <a:spAutoFit/>
+          </a:bodyPr>
+          <a:lstStyle/>
+          <a:p>
+            <a:pPr algn="ctr"/>
+            <a:r>
+              <a:rPr lang="es-GT" sz="1000">
+                <a:solidFill>
+                  <a:srgbClr val="002D5A"/>
+                </a:solidFill>
+                <a:latin typeface="Aptos" panose="020B0004020202020204" pitchFamily="34" charset="0"/>
+              </a:rPr>
+              <a:t>Implementación finalizada</a:t>
+            </a:r>
+          </a:p>
+        </p:txBody>
+      </p:sp>
+      <p:cxnSp>
+        <p:nvCxnSpPr>
+          <p:cNvPr id="51" name="Conector recto 50">
+            <a:extLst>
+              <a:ext uri="{FF2B5EF4-FFF2-40B4-BE49-F238E27FC236}">
+                <a16:creationId xmlns:a16="http://schemas.microsoft.com/office/drawing/2014/main" id="{DE5F7272-E849-4E77-2366-BFD1B52500EA}"/>
+              </a:ext>
+            </a:extLst>
+          </p:cNvPr>
+          <p:cNvCxnSpPr/>
+          <p:nvPr/>
+        </p:nvCxnSpPr>
+        <p:spPr>
+          <a:xfrm>
+            <a:off x="8509000" y="6870700"/>
+            <a:ext cx="1016000" cy="0"/>
+          </a:xfrm>
+          <a:prstGeom prst="line">
+            <a:avLst/>
+          </a:prstGeom>
+          <a:ln w="25400">
+            <a:solidFill>
+              <a:srgbClr val="BFD8F2"/>
+            </a:solidFill>
+            <a:tailEnd type="arrow"/>
+          </a:ln>
+        </p:spPr>
+        <p:style>
+          <a:lnRef idx="2">
+            <a:schemeClr val="accent1"/>
+          </a:lnRef>
+          <a:fillRef idx="0">
+            <a:schemeClr val="accent1"/>
+          </a:fillRef>
+          <a:effectRef idx="1">
+            <a:schemeClr val="accent1"/>
+          </a:effectRef>
+          <a:fontRef idx="minor">
+            <a:schemeClr val="tx1"/>
+          </a:fontRef>
+        </p:style>
+      </p:cxnSp>
+      <p:sp>
+        <p:nvSpPr>
+          <p:cNvPr id="53" name="CuadroTexto 52">
+            <a:extLst>
+              <a:ext uri="{FF2B5EF4-FFF2-40B4-BE49-F238E27FC236}">
+                <a16:creationId xmlns:a16="http://schemas.microsoft.com/office/drawing/2014/main" id="{4623490A-4DDD-459F-9B2C-83F8EDC415DA}"/>
+              </a:ext>
+            </a:extLst>
+          </p:cNvPr>
+          <p:cNvSpPr txBox="1"/>
+          <p:nvPr/>
+        </p:nvSpPr>
+        <p:spPr>
+          <a:xfrm>
+            <a:off x="9931400" y="6604000"/>
+            <a:ext cx="228600" cy="430887"/>
+          </a:xfrm>
+          <a:prstGeom prst="rect">
+            <a:avLst/>
+          </a:prstGeom>
+          <a:noFill/>
+        </p:spPr>
+        <p:txBody>
+          <a:bodyPr vert="horz" lIns="0" tIns="0" rIns="0" bIns="0" rtlCol="0">
+            <a:spAutoFit/>
+          </a:bodyPr>
+          <a:lstStyle/>
+          <a:p>
+            <a:pPr algn="ctr"/>
+            <a:r>
+              <a:rPr lang="es-GT" sz="2800" b="1">
+                <a:solidFill>
+                  <a:srgbClr val="FFFFFF"/>
+                </a:solidFill>
+                <a:latin typeface="Aptos" panose="020B0004020202020204" pitchFamily="34" charset="0"/>
+              </a:rPr>
+              <a:t>•</a:t>
+            </a:r>
+          </a:p>
+        </p:txBody>
+      </p:sp>
+      <p:sp>
+        <p:nvSpPr>
+          <p:cNvPr id="54" name="CuadroTexto 53">
+            <a:extLst>
+              <a:ext uri="{FF2B5EF4-FFF2-40B4-BE49-F238E27FC236}">
+                <a16:creationId xmlns:a16="http://schemas.microsoft.com/office/drawing/2014/main" id="{5E0A6326-3EFC-5CE4-9482-67787B6F5374}"/>
+              </a:ext>
+            </a:extLst>
+          </p:cNvPr>
+          <p:cNvSpPr txBox="1"/>
+          <p:nvPr/>
+        </p:nvSpPr>
+        <p:spPr>
+          <a:xfrm>
+            <a:off x="9461500" y="7302500"/>
+            <a:ext cx="1168400" cy="307777"/>
+          </a:xfrm>
+          <a:prstGeom prst="rect">
+            <a:avLst/>
+          </a:prstGeom>
+          <a:noFill/>
+        </p:spPr>
+        <p:txBody>
+          <a:bodyPr vert="horz" lIns="0" tIns="0" rIns="0" bIns="0" rtlCol="0">
+            <a:spAutoFit/>
+          </a:bodyPr>
+          <a:lstStyle/>
+          <a:p>
+            <a:pPr algn="ctr"/>
+            <a:r>
+              <a:rPr lang="es-GT" sz="1000">
+                <a:solidFill>
+                  <a:srgbClr val="002D5A"/>
+                </a:solidFill>
+                <a:latin typeface="Aptos" panose="020B0004020202020204" pitchFamily="34" charset="0"/>
+              </a:rPr>
+              <a:t>Capacitación en proceso</a:t>
+            </a:r>
+          </a:p>
+        </p:txBody>
+      </p:sp>
+      <p:cxnSp>
+        <p:nvCxnSpPr>
+          <p:cNvPr id="55" name="Conector recto 54">
+            <a:extLst>
+              <a:ext uri="{FF2B5EF4-FFF2-40B4-BE49-F238E27FC236}">
+                <a16:creationId xmlns:a16="http://schemas.microsoft.com/office/drawing/2014/main" id="{52DBA3B4-84C9-17A0-8673-F3D7BC4CE180}"/>
+              </a:ext>
+            </a:extLst>
+          </p:cNvPr>
+          <p:cNvCxnSpPr/>
+          <p:nvPr/>
+        </p:nvCxnSpPr>
+        <p:spPr>
+          <a:xfrm>
+            <a:off x="10477500" y="6870700"/>
+            <a:ext cx="1016000" cy="0"/>
+          </a:xfrm>
+          <a:prstGeom prst="line">
+            <a:avLst/>
+          </a:prstGeom>
+          <a:ln w="25400">
+            <a:solidFill>
+              <a:srgbClr val="BFD8F2"/>
+            </a:solidFill>
+            <a:tailEnd type="arrow"/>
+          </a:ln>
+        </p:spPr>
+        <p:style>
+          <a:lnRef idx="2">
+            <a:schemeClr val="accent1"/>
+          </a:lnRef>
+          <a:fillRef idx="0">
+            <a:schemeClr val="accent1"/>
+          </a:fillRef>
+          <a:effectRef idx="1">
+            <a:schemeClr val="accent1"/>
+          </a:effectRef>
+          <a:fontRef idx="minor">
+            <a:schemeClr val="tx1"/>
+          </a:fontRef>
+        </p:style>
+      </p:cxnSp>
+      <p:sp>
+        <p:nvSpPr>
+          <p:cNvPr id="56" name="Elipse 55">
+            <a:extLst>
+              <a:ext uri="{FF2B5EF4-FFF2-40B4-BE49-F238E27FC236}">
+                <a16:creationId xmlns:a16="http://schemas.microsoft.com/office/drawing/2014/main" id="{04BA0994-D398-BE9A-6A7D-2FF03B966A61}"/>
+              </a:ext>
+            </a:extLst>
+          </p:cNvPr>
+          <p:cNvSpPr/>
+          <p:nvPr/>
+        </p:nvSpPr>
+        <p:spPr>
+          <a:xfrm>
+            <a:off x="11684000" y="6540500"/>
+            <a:ext cx="660400" cy="660400"/>
+          </a:xfrm>
+          <a:prstGeom prst="ellipse">
+            <a:avLst/>
+          </a:prstGeom>
+          <a:solidFill>
+            <a:srgbClr val="F5B400"/>
+          </a:solidFill>
+          <a:ln w="19050" cap="flat" cmpd="sng" algn="ctr">
+            <a:noFill/>
+            <a:prstDash val="solid"/>
+            <a:miter lim="800000"/>
+          </a:ln>
+          <a:effectLst/>
+          <a:extLst>
+            <a:ext uri="{91240B29-F687-4F45-9708-019B960494DF}">
+              <a14:hiddenLine xmlns:a14="http://schemas.microsoft.com/office/drawing/2010/main" w="19050" cap="flat" cmpd="sng" algn="ctr">
+                <a:solidFill>
+                  <a:schemeClr val="accent1">
+                    <a:shade val="15000"/>
+                  </a:schemeClr>
+                </a:solidFill>
+                <a:prstDash val="solid"/>
+                <a:miter lim="800000"/>
+              </a14:hiddenLine>
+            </a:ext>
+          </a:extLst>
+        </p:spPr>
+        <p:style>
+          <a:lnRef idx="2">
+            <a:schemeClr val="accent1">
+              <a:shade val="15000"/>
+            </a:schemeClr>
+          </a:lnRef>
+          <a:fillRef idx="1">
+            <a:schemeClr val="accent1"/>
+          </a:fillRef>
+          <a:effectRef idx="0">
+            <a:schemeClr val="accent1"/>
+          </a:effectRef>
+          <a:fontRef idx="minor">
+            <a:schemeClr val="lt1"/>
+          </a:fontRef>
+        </p:style>
+        <p:txBody>
+          <a:bodyPr rtlCol="0" anchor="ctr"/>
+          <a:lstStyle/>
+          <a:p>
+            <a:pPr algn="ctr"/>
+            <a:endParaRPr lang="es-GT"/>
+          </a:p>
+        </p:txBody>
+      </p:sp>
+      <p:sp>
+        <p:nvSpPr>
+          <p:cNvPr id="57" name="CuadroTexto 56">
+            <a:extLst>
+              <a:ext uri="{FF2B5EF4-FFF2-40B4-BE49-F238E27FC236}">
+                <a16:creationId xmlns:a16="http://schemas.microsoft.com/office/drawing/2014/main" id="{69F8D466-712F-7F0A-BB4C-5522D885E6A3}"/>
+              </a:ext>
+            </a:extLst>
+          </p:cNvPr>
+          <p:cNvSpPr txBox="1"/>
+          <p:nvPr/>
+        </p:nvSpPr>
+        <p:spPr>
+          <a:xfrm>
+            <a:off x="11899900" y="6604000"/>
+            <a:ext cx="228600" cy="430887"/>
+          </a:xfrm>
+          <a:prstGeom prst="rect">
+            <a:avLst/>
+          </a:prstGeom>
+          <a:noFill/>
+        </p:spPr>
+        <p:txBody>
+          <a:bodyPr vert="horz" lIns="0" tIns="0" rIns="0" bIns="0" rtlCol="0">
+            <a:spAutoFit/>
+          </a:bodyPr>
+          <a:lstStyle/>
+          <a:p>
+            <a:pPr algn="ctr"/>
+            <a:r>
+              <a:rPr lang="es-GT" sz="2800" b="1">
+                <a:solidFill>
+                  <a:srgbClr val="FFFFFF"/>
+                </a:solidFill>
+                <a:latin typeface="Aptos" panose="020B0004020202020204" pitchFamily="34" charset="0"/>
+              </a:rPr>
+              <a:t>•</a:t>
+            </a:r>
+          </a:p>
+        </p:txBody>
+      </p:sp>
+      <p:sp>
+        <p:nvSpPr>
+          <p:cNvPr id="58" name="CuadroTexto 57">
+            <a:extLst>
+              <a:ext uri="{FF2B5EF4-FFF2-40B4-BE49-F238E27FC236}">
+                <a16:creationId xmlns:a16="http://schemas.microsoft.com/office/drawing/2014/main" id="{74EFD71E-1546-BE11-C0DB-2E259F7411D7}"/>
+              </a:ext>
+            </a:extLst>
+          </p:cNvPr>
+          <p:cNvSpPr txBox="1"/>
+          <p:nvPr/>
+        </p:nvSpPr>
+        <p:spPr>
+          <a:xfrm>
+            <a:off x="11430000" y="7302500"/>
+            <a:ext cx="1168400" cy="307777"/>
+          </a:xfrm>
+          <a:prstGeom prst="rect">
+            <a:avLst/>
+          </a:prstGeom>
+          <a:noFill/>
+        </p:spPr>
+        <p:txBody>
+          <a:bodyPr vert="horz" lIns="0" tIns="0" rIns="0" bIns="0" rtlCol="0">
+            <a:spAutoFit/>
+          </a:bodyPr>
+          <a:lstStyle/>
+          <a:p>
+            <a:pPr algn="ctr"/>
+            <a:r>
+              <a:rPr lang="es-GT" sz="1000">
+                <a:solidFill>
+                  <a:srgbClr val="002D5A"/>
+                </a:solidFill>
+                <a:latin typeface="Aptos" panose="020B0004020202020204" pitchFamily="34" charset="0"/>
+              </a:rPr>
+              <a:t>Lanzamiento en proceso</a:t>
+            </a:r>
+          </a:p>
+        </p:txBody>
+      </p:sp>
+      <p:sp>
+        <p:nvSpPr>
+          <p:cNvPr id="59" name="Rectángulo 58">
+            <a:extLst>
+              <a:ext uri="{FF2B5EF4-FFF2-40B4-BE49-F238E27FC236}">
+                <a16:creationId xmlns:a16="http://schemas.microsoft.com/office/drawing/2014/main" id="{FADD20BB-03EE-3931-DAE0-2A26DA7150A2}"/>
               </a:ext>
             </a:extLst>
           </p:cNvPr>
@@ -17525,10 +18031,10 @@
       </p:sp>
       <p:sp>
         <p:nvSpPr>
-          <p:cNvPr id="33" name="CuadroTexto 32">
-            <a:extLst>
-              <a:ext uri="{FF2B5EF4-FFF2-40B4-BE49-F238E27FC236}">
-                <a16:creationId xmlns:a16="http://schemas.microsoft.com/office/drawing/2014/main" id="{4EDCB799-EE0C-C7EB-677F-6297922249B8}"/>
+          <p:cNvPr id="60" name="CuadroTexto 59">
+            <a:extLst>
+              <a:ext uri="{FF2B5EF4-FFF2-40B4-BE49-F238E27FC236}">
+                <a16:creationId xmlns:a16="http://schemas.microsoft.com/office/drawing/2014/main" id="{397CC213-D255-F48F-E354-BE5D9FC7928C}"/>
               </a:ext>
             </a:extLst>
           </p:cNvPr>
@@ -17571,10 +18077,10 @@
       </p:sp>
       <p:sp>
         <p:nvSpPr>
-          <p:cNvPr id="34" name="CuadroTexto 33">
-            <a:extLst>
-              <a:ext uri="{FF2B5EF4-FFF2-40B4-BE49-F238E27FC236}">
-                <a16:creationId xmlns:a16="http://schemas.microsoft.com/office/drawing/2014/main" id="{268144FA-A18E-B54D-081E-3F01F2B2341F}"/>
+          <p:cNvPr id="61" name="CuadroTexto 60">
+            <a:extLst>
+              <a:ext uri="{FF2B5EF4-FFF2-40B4-BE49-F238E27FC236}">
+                <a16:creationId xmlns:a16="http://schemas.microsoft.com/office/drawing/2014/main" id="{D29A8479-0294-31CA-3CBB-978AA0751043}"/>
               </a:ext>
             </a:extLst>
           </p:cNvPr>
@@ -17616,10 +18122,119 @@
           </a:p>
         </p:txBody>
       </p:sp>
+      <p:sp>
+        <p:nvSpPr>
+          <p:cNvPr id="62" name="Elipse 61">
+            <a:extLst>
+              <a:ext uri="{FF2B5EF4-FFF2-40B4-BE49-F238E27FC236}">
+                <a16:creationId xmlns:a16="http://schemas.microsoft.com/office/drawing/2014/main" id="{258659ED-1EFF-CD59-BA18-0DB0B8A3F5AB}"/>
+              </a:ext>
+            </a:extLst>
+          </p:cNvPr>
+          <p:cNvSpPr/>
+          <p:nvPr/>
+        </p:nvSpPr>
+        <p:spPr>
+          <a:xfrm>
+            <a:off x="9658350" y="6577818"/>
+            <a:ext cx="660400" cy="660400"/>
+          </a:xfrm>
+          <a:prstGeom prst="ellipse">
+            <a:avLst/>
+          </a:prstGeom>
+          <a:solidFill>
+            <a:srgbClr val="34A853"/>
+          </a:solidFill>
+          <a:ln w="19050" cap="flat" cmpd="sng" algn="ctr">
+            <a:noFill/>
+            <a:prstDash val="solid"/>
+            <a:miter lim="800000"/>
+          </a:ln>
+          <a:effectLst/>
+          <a:extLst>
+            <a:ext uri="{91240B29-F687-4F45-9708-019B960494DF}">
+              <a14:hiddenLine xmlns:a14="http://schemas.microsoft.com/office/drawing/2010/main" w="19050" cap="flat" cmpd="sng" algn="ctr">
+                <a:solidFill>
+                  <a:schemeClr val="accent1">
+                    <a:shade val="15000"/>
+                  </a:schemeClr>
+                </a:solidFill>
+                <a:prstDash val="solid"/>
+                <a:miter lim="800000"/>
+              </a14:hiddenLine>
+            </a:ext>
+          </a:extLst>
+        </p:spPr>
+        <p:style>
+          <a:lnRef idx="2">
+            <a:schemeClr val="accent1">
+              <a:shade val="15000"/>
+            </a:schemeClr>
+          </a:lnRef>
+          <a:fillRef idx="1">
+            <a:schemeClr val="accent1"/>
+          </a:fillRef>
+          <a:effectRef idx="0">
+            <a:schemeClr val="accent1"/>
+          </a:effectRef>
+          <a:fontRef idx="minor">
+            <a:schemeClr val="lt1"/>
+          </a:fontRef>
+        </p:style>
+        <p:txBody>
+          <a:bodyPr rtlCol="0" anchor="ctr"/>
+          <a:lstStyle/>
+          <a:p>
+            <a:pPr algn="ctr"/>
+            <a:endParaRPr lang="es-GT"/>
+          </a:p>
+        </p:txBody>
+      </p:sp>
+      <p:sp>
+        <p:nvSpPr>
+          <p:cNvPr id="66" name="CuadroTexto 65">
+            <a:extLst>
+              <a:ext uri="{FF2B5EF4-FFF2-40B4-BE49-F238E27FC236}">
+                <a16:creationId xmlns:a16="http://schemas.microsoft.com/office/drawing/2014/main" id="{5366077A-9982-06BF-0D16-FFD2770BD7FC}"/>
+              </a:ext>
+            </a:extLst>
+          </p:cNvPr>
+          <p:cNvSpPr txBox="1"/>
+          <p:nvPr/>
+        </p:nvSpPr>
+        <p:spPr>
+          <a:xfrm>
+            <a:off x="9829800" y="6717269"/>
+            <a:ext cx="330200" cy="369332"/>
+          </a:xfrm>
+          <a:prstGeom prst="rect">
+            <a:avLst/>
+          </a:prstGeom>
+          <a:noFill/>
+        </p:spPr>
+        <p:txBody>
+          <a:bodyPr vert="horz" lIns="0" tIns="0" rIns="0" bIns="0" rtlCol="0">
+            <a:spAutoFit/>
+          </a:bodyPr>
+          <a:lstStyle/>
+          <a:p>
+            <a:pPr algn="ctr"/>
+            <a:r>
+              <a:rPr lang="es-GT" sz="2400" b="1" dirty="0">
+                <a:solidFill>
+                  <a:srgbClr val="FFFFFF"/>
+                </a:solidFill>
+                <a:latin typeface="Aptos" panose="020B0004020202020204" pitchFamily="34" charset="0"/>
+              </a:rPr>
+              <a:t>✓</a:t>
+            </a:r>
+          </a:p>
+        </p:txBody>
+      </p:sp>
     </p:spTree>
     <p:extLst>
       <p:ext uri="{BB962C8B-B14F-4D97-AF65-F5344CB8AC3E}">
-        <p14:creationId xmlns:p14="http://schemas.microsoft.com/office/powerpoint/2010/main" val="3774310172"/>
+        <p14:creationId xmlns:p14="http://schemas.microsoft.com/office/powerpoint/2010/main" val="2234435378"/>
       </p:ext>
     </p:extLst>
   </p:cSld>
@@ -17787,13 +18402,13 @@
           <a:lstStyle/>
           <a:p>
             <a:r>
-              <a:rPr lang="es-GT" sz="2900" b="1">
+              <a:rPr lang="es-GT" sz="2900" b="1" dirty="0">
                 <a:solidFill>
                   <a:srgbClr val="001F44"/>
                 </a:solidFill>
                 <a:latin typeface="Aptos" panose="020B0004020202020204" pitchFamily="34" charset="0"/>
               </a:rPr>
-              <a:t>TRÁMITES PENDIENTES DE INICIAR</a:t>
+              <a:t>Propuesta de lanzamiento </a:t>
             </a:r>
           </a:p>
         </p:txBody>
@@ -17972,1425 +18587,6 @@
               </a:rPr>
               <a:t>8</a:t>
             </a:r>
-          </a:p>
-        </p:txBody>
-      </p:sp>
-      <p:sp>
-        <p:nvSpPr>
-          <p:cNvPr id="9" name="Rectángulo: esquinas redondeadas 8">
-            <a:extLst>
-              <a:ext uri="{FF2B5EF4-FFF2-40B4-BE49-F238E27FC236}">
-                <a16:creationId xmlns:a16="http://schemas.microsoft.com/office/drawing/2014/main" id="{7BF6C97A-B5CB-278B-CCDF-3C2B847F4238}"/>
-              </a:ext>
-            </a:extLst>
-          </p:cNvPr>
-          <p:cNvSpPr/>
-          <p:nvPr/>
-        </p:nvSpPr>
-        <p:spPr>
-          <a:xfrm>
-            <a:off x="1016000" y="2095500"/>
-            <a:ext cx="2032000" cy="381000"/>
-          </a:xfrm>
-          <a:prstGeom prst="roundRect">
-            <a:avLst/>
-          </a:prstGeom>
-          <a:solidFill>
-            <a:srgbClr val="DF3636"/>
-          </a:solidFill>
-          <a:ln w="19050" cap="flat" cmpd="sng" algn="ctr">
-            <a:noFill/>
-            <a:prstDash val="solid"/>
-            <a:miter lim="800000"/>
-          </a:ln>
-          <a:effectLst/>
-          <a:extLst>
-            <a:ext uri="{91240B29-F687-4F45-9708-019B960494DF}">
-              <a14:hiddenLine xmlns:a14="http://schemas.microsoft.com/office/drawing/2010/main" w="19050" cap="flat" cmpd="sng" algn="ctr">
-                <a:solidFill>
-                  <a:schemeClr val="accent1">
-                    <a:shade val="15000"/>
-                  </a:schemeClr>
-                </a:solidFill>
-                <a:prstDash val="solid"/>
-                <a:miter lim="800000"/>
-              </a14:hiddenLine>
-            </a:ext>
-          </a:extLst>
-        </p:spPr>
-        <p:style>
-          <a:lnRef idx="2">
-            <a:schemeClr val="accent1">
-              <a:shade val="15000"/>
-            </a:schemeClr>
-          </a:lnRef>
-          <a:fillRef idx="1">
-            <a:schemeClr val="accent1"/>
-          </a:fillRef>
-          <a:effectRef idx="0">
-            <a:schemeClr val="accent1"/>
-          </a:effectRef>
-          <a:fontRef idx="minor">
-            <a:schemeClr val="lt1"/>
-          </a:fontRef>
-        </p:style>
-        <p:txBody>
-          <a:bodyPr rtlCol="0" anchor="ctr"/>
-          <a:lstStyle/>
-          <a:p>
-            <a:pPr algn="ctr"/>
-            <a:endParaRPr lang="es-GT"/>
-          </a:p>
-        </p:txBody>
-      </p:sp>
-      <p:sp>
-        <p:nvSpPr>
-          <p:cNvPr id="10" name="CuadroTexto 9">
-            <a:extLst>
-              <a:ext uri="{FF2B5EF4-FFF2-40B4-BE49-F238E27FC236}">
-                <a16:creationId xmlns:a16="http://schemas.microsoft.com/office/drawing/2014/main" id="{F97500AF-1C34-AC4A-BC57-BA9A101BA51E}"/>
-              </a:ext>
-            </a:extLst>
-          </p:cNvPr>
-          <p:cNvSpPr txBox="1"/>
-          <p:nvPr/>
-        </p:nvSpPr>
-        <p:spPr>
-          <a:xfrm>
-            <a:off x="1117600" y="2184400"/>
-            <a:ext cx="1828800" cy="169277"/>
-          </a:xfrm>
-          <a:prstGeom prst="rect">
-            <a:avLst/>
-          </a:prstGeom>
-          <a:noFill/>
-        </p:spPr>
-        <p:txBody>
-          <a:bodyPr vert="horz" lIns="0" tIns="0" rIns="0" bIns="0" rtlCol="0">
-            <a:spAutoFit/>
-          </a:bodyPr>
-          <a:lstStyle/>
-          <a:p>
-            <a:pPr algn="ctr"/>
-            <a:r>
-              <a:rPr lang="es-GT" sz="1100" b="1">
-                <a:solidFill>
-                  <a:srgbClr val="FFFFFF"/>
-                </a:solidFill>
-                <a:latin typeface="Aptos" panose="020B0004020202020204" pitchFamily="34" charset="0"/>
-              </a:rPr>
-              <a:t>0% DE AVANCE</a:t>
-            </a:r>
-          </a:p>
-        </p:txBody>
-      </p:sp>
-      <p:sp>
-        <p:nvSpPr>
-          <p:cNvPr id="11" name="Rectángulo: esquinas redondeadas 10">
-            <a:extLst>
-              <a:ext uri="{FF2B5EF4-FFF2-40B4-BE49-F238E27FC236}">
-                <a16:creationId xmlns:a16="http://schemas.microsoft.com/office/drawing/2014/main" id="{0B49112C-C7E5-0BBD-CFF3-BC400B145C86}"/>
-              </a:ext>
-            </a:extLst>
-          </p:cNvPr>
-          <p:cNvSpPr/>
-          <p:nvPr/>
-        </p:nvSpPr>
-        <p:spPr>
-          <a:xfrm>
-            <a:off x="1117600" y="3175000"/>
-            <a:ext cx="2159000" cy="2159000"/>
-          </a:xfrm>
-          <a:prstGeom prst="roundRect">
-            <a:avLst/>
-          </a:prstGeom>
-          <a:solidFill>
-            <a:srgbClr val="FFFFFF"/>
-          </a:solidFill>
-          <a:ln w="15875">
-            <a:solidFill>
-              <a:srgbClr val="BFD8F2"/>
-            </a:solidFill>
-          </a:ln>
-        </p:spPr>
-        <p:style>
-          <a:lnRef idx="2">
-            <a:schemeClr val="accent1">
-              <a:shade val="15000"/>
-            </a:schemeClr>
-          </a:lnRef>
-          <a:fillRef idx="1">
-            <a:schemeClr val="accent1"/>
-          </a:fillRef>
-          <a:effectRef idx="0">
-            <a:schemeClr val="accent1"/>
-          </a:effectRef>
-          <a:fontRef idx="minor">
-            <a:schemeClr val="lt1"/>
-          </a:fontRef>
-        </p:style>
-        <p:txBody>
-          <a:bodyPr rtlCol="0" anchor="ctr"/>
-          <a:lstStyle/>
-          <a:p>
-            <a:pPr algn="ctr"/>
-            <a:endParaRPr lang="es-GT"/>
-          </a:p>
-        </p:txBody>
-      </p:sp>
-      <p:sp>
-        <p:nvSpPr>
-          <p:cNvPr id="12" name="Elipse 11">
-            <a:extLst>
-              <a:ext uri="{FF2B5EF4-FFF2-40B4-BE49-F238E27FC236}">
-                <a16:creationId xmlns:a16="http://schemas.microsoft.com/office/drawing/2014/main" id="{B5A4F8BC-8894-3FFB-46B0-5B96B9B311C3}"/>
-              </a:ext>
-            </a:extLst>
-          </p:cNvPr>
-          <p:cNvSpPr/>
-          <p:nvPr/>
-        </p:nvSpPr>
-        <p:spPr>
-          <a:xfrm>
-            <a:off x="1397000" y="3454400"/>
-            <a:ext cx="1600200" cy="1600200"/>
-          </a:xfrm>
-          <a:prstGeom prst="ellipse">
-            <a:avLst/>
-          </a:prstGeom>
-          <a:solidFill>
-            <a:srgbClr val="DF3636"/>
-          </a:solidFill>
-          <a:ln w="19050" cap="flat" cmpd="sng" algn="ctr">
-            <a:noFill/>
-            <a:prstDash val="solid"/>
-            <a:miter lim="800000"/>
-          </a:ln>
-          <a:effectLst/>
-          <a:extLst>
-            <a:ext uri="{91240B29-F687-4F45-9708-019B960494DF}">
-              <a14:hiddenLine xmlns:a14="http://schemas.microsoft.com/office/drawing/2010/main" w="19050" cap="flat" cmpd="sng" algn="ctr">
-                <a:solidFill>
-                  <a:schemeClr val="accent1">
-                    <a:shade val="15000"/>
-                  </a:schemeClr>
-                </a:solidFill>
-                <a:prstDash val="solid"/>
-                <a:miter lim="800000"/>
-              </a14:hiddenLine>
-            </a:ext>
-          </a:extLst>
-        </p:spPr>
-        <p:style>
-          <a:lnRef idx="2">
-            <a:schemeClr val="accent1">
-              <a:shade val="15000"/>
-            </a:schemeClr>
-          </a:lnRef>
-          <a:fillRef idx="1">
-            <a:schemeClr val="accent1"/>
-          </a:fillRef>
-          <a:effectRef idx="0">
-            <a:schemeClr val="accent1"/>
-          </a:effectRef>
-          <a:fontRef idx="minor">
-            <a:schemeClr val="lt1"/>
-          </a:fontRef>
-        </p:style>
-        <p:txBody>
-          <a:bodyPr rtlCol="0" anchor="ctr"/>
-          <a:lstStyle/>
-          <a:p>
-            <a:pPr algn="ctr"/>
-            <a:endParaRPr lang="es-GT"/>
-          </a:p>
-        </p:txBody>
-      </p:sp>
-      <p:sp>
-        <p:nvSpPr>
-          <p:cNvPr id="13" name="Elipse 12">
-            <a:extLst>
-              <a:ext uri="{FF2B5EF4-FFF2-40B4-BE49-F238E27FC236}">
-                <a16:creationId xmlns:a16="http://schemas.microsoft.com/office/drawing/2014/main" id="{55B059AF-4F85-7C6B-E0F0-6BB50B88B8E7}"/>
-              </a:ext>
-            </a:extLst>
-          </p:cNvPr>
-          <p:cNvSpPr/>
-          <p:nvPr/>
-        </p:nvSpPr>
-        <p:spPr>
-          <a:xfrm>
-            <a:off x="1676400" y="3733800"/>
-            <a:ext cx="1041400" cy="1041400"/>
-          </a:xfrm>
-          <a:prstGeom prst="ellipse">
-            <a:avLst/>
-          </a:prstGeom>
-          <a:solidFill>
-            <a:srgbClr val="FFFFFF"/>
-          </a:solidFill>
-          <a:ln w="19050" cap="flat" cmpd="sng" algn="ctr">
-            <a:noFill/>
-            <a:prstDash val="solid"/>
-            <a:miter lim="800000"/>
-          </a:ln>
-          <a:effectLst/>
-          <a:extLst>
-            <a:ext uri="{91240B29-F687-4F45-9708-019B960494DF}">
-              <a14:hiddenLine xmlns:a14="http://schemas.microsoft.com/office/drawing/2010/main" w="19050" cap="flat" cmpd="sng" algn="ctr">
-                <a:solidFill>
-                  <a:schemeClr val="accent1">
-                    <a:shade val="15000"/>
-                  </a:schemeClr>
-                </a:solidFill>
-                <a:prstDash val="solid"/>
-                <a:miter lim="800000"/>
-              </a14:hiddenLine>
-            </a:ext>
-          </a:extLst>
-        </p:spPr>
-        <p:style>
-          <a:lnRef idx="2">
-            <a:schemeClr val="accent1">
-              <a:shade val="15000"/>
-            </a:schemeClr>
-          </a:lnRef>
-          <a:fillRef idx="1">
-            <a:schemeClr val="accent1"/>
-          </a:fillRef>
-          <a:effectRef idx="0">
-            <a:schemeClr val="accent1"/>
-          </a:effectRef>
-          <a:fontRef idx="minor">
-            <a:schemeClr val="lt1"/>
-          </a:fontRef>
-        </p:style>
-        <p:txBody>
-          <a:bodyPr rtlCol="0" anchor="ctr"/>
-          <a:lstStyle/>
-          <a:p>
-            <a:pPr algn="ctr"/>
-            <a:endParaRPr lang="es-GT"/>
-          </a:p>
-        </p:txBody>
-      </p:sp>
-      <p:sp>
-        <p:nvSpPr>
-          <p:cNvPr id="14" name="CuadroTexto 13">
-            <a:extLst>
-              <a:ext uri="{FF2B5EF4-FFF2-40B4-BE49-F238E27FC236}">
-                <a16:creationId xmlns:a16="http://schemas.microsoft.com/office/drawing/2014/main" id="{AC534F10-C0CC-DF82-5030-40F3E83D945B}"/>
-              </a:ext>
-            </a:extLst>
-          </p:cNvPr>
-          <p:cNvSpPr txBox="1"/>
-          <p:nvPr/>
-        </p:nvSpPr>
-        <p:spPr>
-          <a:xfrm>
-            <a:off x="1498600" y="3835400"/>
-            <a:ext cx="1397000" cy="461665"/>
-          </a:xfrm>
-          <a:prstGeom prst="rect">
-            <a:avLst/>
-          </a:prstGeom>
-          <a:noFill/>
-        </p:spPr>
-        <p:txBody>
-          <a:bodyPr vert="horz" lIns="0" tIns="0" rIns="0" bIns="0" rtlCol="0">
-            <a:spAutoFit/>
-          </a:bodyPr>
-          <a:lstStyle/>
-          <a:p>
-            <a:pPr algn="ctr"/>
-            <a:r>
-              <a:rPr lang="es-GT" sz="3000" b="1">
-                <a:solidFill>
-                  <a:srgbClr val="001F44"/>
-                </a:solidFill>
-                <a:latin typeface="Aptos" panose="020B0004020202020204" pitchFamily="34" charset="0"/>
-              </a:rPr>
-              <a:t>4</a:t>
-            </a:r>
-          </a:p>
-        </p:txBody>
-      </p:sp>
-      <p:sp>
-        <p:nvSpPr>
-          <p:cNvPr id="15" name="CuadroTexto 14">
-            <a:extLst>
-              <a:ext uri="{FF2B5EF4-FFF2-40B4-BE49-F238E27FC236}">
-                <a16:creationId xmlns:a16="http://schemas.microsoft.com/office/drawing/2014/main" id="{337E2318-FB58-BC6E-3C73-C544AF55941D}"/>
-              </a:ext>
-            </a:extLst>
-          </p:cNvPr>
-          <p:cNvSpPr txBox="1"/>
-          <p:nvPr/>
-        </p:nvSpPr>
-        <p:spPr>
-          <a:xfrm>
-            <a:off x="1435100" y="4445000"/>
-            <a:ext cx="1524000" cy="184666"/>
-          </a:xfrm>
-          <a:prstGeom prst="rect">
-            <a:avLst/>
-          </a:prstGeom>
-          <a:noFill/>
-        </p:spPr>
-        <p:txBody>
-          <a:bodyPr vert="horz" lIns="0" tIns="0" rIns="0" bIns="0" rtlCol="0">
-            <a:spAutoFit/>
-          </a:bodyPr>
-          <a:lstStyle/>
-          <a:p>
-            <a:pPr algn="ctr"/>
-            <a:r>
-              <a:rPr lang="es-GT" sz="1200" b="1">
-                <a:solidFill>
-                  <a:srgbClr val="001F44"/>
-                </a:solidFill>
-                <a:latin typeface="Aptos" panose="020B0004020202020204" pitchFamily="34" charset="0"/>
-              </a:rPr>
-              <a:t>Trámites</a:t>
-            </a:r>
-          </a:p>
-        </p:txBody>
-      </p:sp>
-      <p:sp>
-        <p:nvSpPr>
-          <p:cNvPr id="16" name="Rectángulo: esquinas redondeadas 15">
-            <a:extLst>
-              <a:ext uri="{FF2B5EF4-FFF2-40B4-BE49-F238E27FC236}">
-                <a16:creationId xmlns:a16="http://schemas.microsoft.com/office/drawing/2014/main" id="{2FB1EA63-5AE1-BB05-8DC8-674060E5934A}"/>
-              </a:ext>
-            </a:extLst>
-          </p:cNvPr>
-          <p:cNvSpPr/>
-          <p:nvPr/>
-        </p:nvSpPr>
-        <p:spPr>
-          <a:xfrm>
-            <a:off x="4826000" y="2286000"/>
-            <a:ext cx="9906000" cy="711200"/>
-          </a:xfrm>
-          <a:prstGeom prst="roundRect">
-            <a:avLst/>
-          </a:prstGeom>
-          <a:solidFill>
-            <a:srgbClr val="FFFFFF"/>
-          </a:solidFill>
-          <a:ln w="15875">
-            <a:solidFill>
-              <a:srgbClr val="BFD8F2"/>
-            </a:solidFill>
-          </a:ln>
-        </p:spPr>
-        <p:style>
-          <a:lnRef idx="2">
-            <a:schemeClr val="accent1">
-              <a:shade val="15000"/>
-            </a:schemeClr>
-          </a:lnRef>
-          <a:fillRef idx="1">
-            <a:schemeClr val="accent1"/>
-          </a:fillRef>
-          <a:effectRef idx="0">
-            <a:schemeClr val="accent1"/>
-          </a:effectRef>
-          <a:fontRef idx="minor">
-            <a:schemeClr val="lt1"/>
-          </a:fontRef>
-        </p:style>
-        <p:txBody>
-          <a:bodyPr rtlCol="0" anchor="ctr"/>
-          <a:lstStyle/>
-          <a:p>
-            <a:pPr algn="ctr"/>
-            <a:endParaRPr lang="es-GT"/>
-          </a:p>
-        </p:txBody>
-      </p:sp>
-      <p:sp>
-        <p:nvSpPr>
-          <p:cNvPr id="17" name="Rectángulo: esquinas redondeadas 16">
-            <a:extLst>
-              <a:ext uri="{FF2B5EF4-FFF2-40B4-BE49-F238E27FC236}">
-                <a16:creationId xmlns:a16="http://schemas.microsoft.com/office/drawing/2014/main" id="{77DD7501-295E-4586-DB66-96CEBB8574C9}"/>
-              </a:ext>
-            </a:extLst>
-          </p:cNvPr>
-          <p:cNvSpPr/>
-          <p:nvPr/>
-        </p:nvSpPr>
-        <p:spPr>
-          <a:xfrm>
-            <a:off x="4953000" y="2374900"/>
-            <a:ext cx="381000" cy="381000"/>
-          </a:xfrm>
-          <a:prstGeom prst="roundRect">
-            <a:avLst/>
-          </a:prstGeom>
-          <a:solidFill>
-            <a:srgbClr val="DF3636"/>
-          </a:solidFill>
-          <a:ln w="19050" cap="flat" cmpd="sng" algn="ctr">
-            <a:noFill/>
-            <a:prstDash val="solid"/>
-            <a:miter lim="800000"/>
-          </a:ln>
-          <a:effectLst/>
-          <a:extLst>
-            <a:ext uri="{91240B29-F687-4F45-9708-019B960494DF}">
-              <a14:hiddenLine xmlns:a14="http://schemas.microsoft.com/office/drawing/2010/main" w="19050" cap="flat" cmpd="sng" algn="ctr">
-                <a:solidFill>
-                  <a:schemeClr val="accent1">
-                    <a:shade val="15000"/>
-                  </a:schemeClr>
-                </a:solidFill>
-                <a:prstDash val="solid"/>
-                <a:miter lim="800000"/>
-              </a14:hiddenLine>
-            </a:ext>
-          </a:extLst>
-        </p:spPr>
-        <p:style>
-          <a:lnRef idx="2">
-            <a:schemeClr val="accent1">
-              <a:shade val="15000"/>
-            </a:schemeClr>
-          </a:lnRef>
-          <a:fillRef idx="1">
-            <a:schemeClr val="accent1"/>
-          </a:fillRef>
-          <a:effectRef idx="0">
-            <a:schemeClr val="accent1"/>
-          </a:effectRef>
-          <a:fontRef idx="minor">
-            <a:schemeClr val="lt1"/>
-          </a:fontRef>
-        </p:style>
-        <p:txBody>
-          <a:bodyPr rtlCol="0" anchor="ctr"/>
-          <a:lstStyle/>
-          <a:p>
-            <a:pPr algn="ctr"/>
-            <a:endParaRPr lang="es-GT"/>
-          </a:p>
-        </p:txBody>
-      </p:sp>
-      <p:sp>
-        <p:nvSpPr>
-          <p:cNvPr id="18" name="CuadroTexto 17">
-            <a:extLst>
-              <a:ext uri="{FF2B5EF4-FFF2-40B4-BE49-F238E27FC236}">
-                <a16:creationId xmlns:a16="http://schemas.microsoft.com/office/drawing/2014/main" id="{24ED0839-20FA-94F6-B16F-11677812D209}"/>
-              </a:ext>
-            </a:extLst>
-          </p:cNvPr>
-          <p:cNvSpPr txBox="1"/>
-          <p:nvPr/>
-        </p:nvSpPr>
-        <p:spPr>
-          <a:xfrm>
-            <a:off x="5029200" y="2438400"/>
-            <a:ext cx="228600" cy="169277"/>
-          </a:xfrm>
-          <a:prstGeom prst="rect">
-            <a:avLst/>
-          </a:prstGeom>
-          <a:noFill/>
-        </p:spPr>
-        <p:txBody>
-          <a:bodyPr vert="horz" lIns="0" tIns="0" rIns="0" bIns="0" rtlCol="0">
-            <a:spAutoFit/>
-          </a:bodyPr>
-          <a:lstStyle/>
-          <a:p>
-            <a:pPr algn="ctr"/>
-            <a:r>
-              <a:rPr lang="es-GT" sz="1100" b="1">
-                <a:solidFill>
-                  <a:srgbClr val="FFFFFF"/>
-                </a:solidFill>
-                <a:latin typeface="Aptos" panose="020B0004020202020204" pitchFamily="34" charset="0"/>
-              </a:rPr>
-              <a:t>14</a:t>
-            </a:r>
-          </a:p>
-        </p:txBody>
-      </p:sp>
-      <p:sp>
-        <p:nvSpPr>
-          <p:cNvPr id="19" name="CuadroTexto 18">
-            <a:extLst>
-              <a:ext uri="{FF2B5EF4-FFF2-40B4-BE49-F238E27FC236}">
-                <a16:creationId xmlns:a16="http://schemas.microsoft.com/office/drawing/2014/main" id="{BE448A1F-8373-6D33-82BF-79D01171810D}"/>
-              </a:ext>
-            </a:extLst>
-          </p:cNvPr>
-          <p:cNvSpPr txBox="1"/>
-          <p:nvPr/>
-        </p:nvSpPr>
-        <p:spPr>
-          <a:xfrm>
-            <a:off x="5511800" y="2374900"/>
-            <a:ext cx="9067800" cy="184666"/>
-          </a:xfrm>
-          <a:prstGeom prst="rect">
-            <a:avLst/>
-          </a:prstGeom>
-          <a:noFill/>
-        </p:spPr>
-        <p:txBody>
-          <a:bodyPr vert="horz" lIns="0" tIns="0" rIns="0" bIns="0" rtlCol="0">
-            <a:spAutoFit/>
-          </a:bodyPr>
-          <a:lstStyle/>
-          <a:p>
-            <a:r>
-              <a:rPr lang="es-ES" sz="1200">
-                <a:solidFill>
-                  <a:srgbClr val="002D5A"/>
-                </a:solidFill>
-                <a:latin typeface="Aptos" panose="020B0004020202020204" pitchFamily="34" charset="0"/>
-              </a:rPr>
-              <a:t>Certificado de Explotación de una Línea Aérea</a:t>
-            </a:r>
-            <a:endParaRPr lang="es-GT" sz="1200">
-              <a:solidFill>
-                <a:srgbClr val="002D5A"/>
-              </a:solidFill>
-              <a:latin typeface="Aptos" panose="020B0004020202020204" pitchFamily="34" charset="0"/>
-            </a:endParaRPr>
-          </a:p>
-        </p:txBody>
-      </p:sp>
-      <p:sp>
-        <p:nvSpPr>
-          <p:cNvPr id="20" name="Rectángulo: esquinas redondeadas 19">
-            <a:extLst>
-              <a:ext uri="{FF2B5EF4-FFF2-40B4-BE49-F238E27FC236}">
-                <a16:creationId xmlns:a16="http://schemas.microsoft.com/office/drawing/2014/main" id="{E6C0DAD7-420A-24CF-80E2-4A55205F2AD4}"/>
-              </a:ext>
-            </a:extLst>
-          </p:cNvPr>
-          <p:cNvSpPr/>
-          <p:nvPr/>
-        </p:nvSpPr>
-        <p:spPr>
-          <a:xfrm>
-            <a:off x="4826000" y="3073400"/>
-            <a:ext cx="9906000" cy="711200"/>
-          </a:xfrm>
-          <a:prstGeom prst="roundRect">
-            <a:avLst/>
-          </a:prstGeom>
-          <a:solidFill>
-            <a:srgbClr val="FFFFFF"/>
-          </a:solidFill>
-          <a:ln w="15875">
-            <a:solidFill>
-              <a:srgbClr val="BFD8F2"/>
-            </a:solidFill>
-          </a:ln>
-        </p:spPr>
-        <p:style>
-          <a:lnRef idx="2">
-            <a:schemeClr val="accent1">
-              <a:shade val="15000"/>
-            </a:schemeClr>
-          </a:lnRef>
-          <a:fillRef idx="1">
-            <a:schemeClr val="accent1"/>
-          </a:fillRef>
-          <a:effectRef idx="0">
-            <a:schemeClr val="accent1"/>
-          </a:effectRef>
-          <a:fontRef idx="minor">
-            <a:schemeClr val="lt1"/>
-          </a:fontRef>
-        </p:style>
-        <p:txBody>
-          <a:bodyPr rtlCol="0" anchor="ctr"/>
-          <a:lstStyle/>
-          <a:p>
-            <a:pPr algn="ctr"/>
-            <a:endParaRPr lang="es-GT"/>
-          </a:p>
-        </p:txBody>
-      </p:sp>
-      <p:sp>
-        <p:nvSpPr>
-          <p:cNvPr id="21" name="Rectángulo: esquinas redondeadas 20">
-            <a:extLst>
-              <a:ext uri="{FF2B5EF4-FFF2-40B4-BE49-F238E27FC236}">
-                <a16:creationId xmlns:a16="http://schemas.microsoft.com/office/drawing/2014/main" id="{56754D03-535C-9823-AB57-47879292985E}"/>
-              </a:ext>
-            </a:extLst>
-          </p:cNvPr>
-          <p:cNvSpPr/>
-          <p:nvPr/>
-        </p:nvSpPr>
-        <p:spPr>
-          <a:xfrm>
-            <a:off x="4953000" y="3162300"/>
-            <a:ext cx="381000" cy="381000"/>
-          </a:xfrm>
-          <a:prstGeom prst="roundRect">
-            <a:avLst/>
-          </a:prstGeom>
-          <a:solidFill>
-            <a:srgbClr val="DF3636"/>
-          </a:solidFill>
-          <a:ln w="19050" cap="flat" cmpd="sng" algn="ctr">
-            <a:noFill/>
-            <a:prstDash val="solid"/>
-            <a:miter lim="800000"/>
-          </a:ln>
-          <a:effectLst/>
-          <a:extLst>
-            <a:ext uri="{91240B29-F687-4F45-9708-019B960494DF}">
-              <a14:hiddenLine xmlns:a14="http://schemas.microsoft.com/office/drawing/2010/main" w="19050" cap="flat" cmpd="sng" algn="ctr">
-                <a:solidFill>
-                  <a:schemeClr val="accent1">
-                    <a:shade val="15000"/>
-                  </a:schemeClr>
-                </a:solidFill>
-                <a:prstDash val="solid"/>
-                <a:miter lim="800000"/>
-              </a14:hiddenLine>
-            </a:ext>
-          </a:extLst>
-        </p:spPr>
-        <p:style>
-          <a:lnRef idx="2">
-            <a:schemeClr val="accent1">
-              <a:shade val="15000"/>
-            </a:schemeClr>
-          </a:lnRef>
-          <a:fillRef idx="1">
-            <a:schemeClr val="accent1"/>
-          </a:fillRef>
-          <a:effectRef idx="0">
-            <a:schemeClr val="accent1"/>
-          </a:effectRef>
-          <a:fontRef idx="minor">
-            <a:schemeClr val="lt1"/>
-          </a:fontRef>
-        </p:style>
-        <p:txBody>
-          <a:bodyPr rtlCol="0" anchor="ctr"/>
-          <a:lstStyle/>
-          <a:p>
-            <a:pPr algn="ctr"/>
-            <a:endParaRPr lang="es-GT"/>
-          </a:p>
-        </p:txBody>
-      </p:sp>
-      <p:sp>
-        <p:nvSpPr>
-          <p:cNvPr id="22" name="CuadroTexto 21">
-            <a:extLst>
-              <a:ext uri="{FF2B5EF4-FFF2-40B4-BE49-F238E27FC236}">
-                <a16:creationId xmlns:a16="http://schemas.microsoft.com/office/drawing/2014/main" id="{748DC9ED-6274-BEA5-15BB-C1727A0223A4}"/>
-              </a:ext>
-            </a:extLst>
-          </p:cNvPr>
-          <p:cNvSpPr txBox="1"/>
-          <p:nvPr/>
-        </p:nvSpPr>
-        <p:spPr>
-          <a:xfrm>
-            <a:off x="5029200" y="3225800"/>
-            <a:ext cx="228600" cy="169277"/>
-          </a:xfrm>
-          <a:prstGeom prst="rect">
-            <a:avLst/>
-          </a:prstGeom>
-          <a:noFill/>
-        </p:spPr>
-        <p:txBody>
-          <a:bodyPr vert="horz" lIns="0" tIns="0" rIns="0" bIns="0" rtlCol="0">
-            <a:spAutoFit/>
-          </a:bodyPr>
-          <a:lstStyle/>
-          <a:p>
-            <a:pPr algn="ctr"/>
-            <a:r>
-              <a:rPr lang="es-GT" sz="1100" b="1">
-                <a:solidFill>
-                  <a:srgbClr val="FFFFFF"/>
-                </a:solidFill>
-                <a:latin typeface="Aptos" panose="020B0004020202020204" pitchFamily="34" charset="0"/>
-              </a:rPr>
-              <a:t>15</a:t>
-            </a:r>
-          </a:p>
-        </p:txBody>
-      </p:sp>
-      <p:sp>
-        <p:nvSpPr>
-          <p:cNvPr id="23" name="CuadroTexto 22">
-            <a:extLst>
-              <a:ext uri="{FF2B5EF4-FFF2-40B4-BE49-F238E27FC236}">
-                <a16:creationId xmlns:a16="http://schemas.microsoft.com/office/drawing/2014/main" id="{19F76871-CD91-05F6-4739-680920FDDA6F}"/>
-              </a:ext>
-            </a:extLst>
-          </p:cNvPr>
-          <p:cNvSpPr txBox="1"/>
-          <p:nvPr/>
-        </p:nvSpPr>
-        <p:spPr>
-          <a:xfrm>
-            <a:off x="5511800" y="3162300"/>
-            <a:ext cx="9067800" cy="184666"/>
-          </a:xfrm>
-          <a:prstGeom prst="rect">
-            <a:avLst/>
-          </a:prstGeom>
-          <a:noFill/>
-        </p:spPr>
-        <p:txBody>
-          <a:bodyPr vert="horz" lIns="0" tIns="0" rIns="0" bIns="0" rtlCol="0">
-            <a:spAutoFit/>
-          </a:bodyPr>
-          <a:lstStyle/>
-          <a:p>
-            <a:r>
-              <a:rPr lang="es-ES" sz="1200">
-                <a:solidFill>
-                  <a:srgbClr val="002D5A"/>
-                </a:solidFill>
-                <a:latin typeface="Aptos" panose="020B0004020202020204" pitchFamily="34" charset="0"/>
-              </a:rPr>
-              <a:t>Certificado de Explotación a trabajos aéreos/Servicios Auxiliares</a:t>
-            </a:r>
-            <a:endParaRPr lang="es-GT" sz="1200">
-              <a:solidFill>
-                <a:srgbClr val="002D5A"/>
-              </a:solidFill>
-              <a:latin typeface="Aptos" panose="020B0004020202020204" pitchFamily="34" charset="0"/>
-            </a:endParaRPr>
-          </a:p>
-        </p:txBody>
-      </p:sp>
-      <p:sp>
-        <p:nvSpPr>
-          <p:cNvPr id="24" name="Rectángulo: esquinas redondeadas 23">
-            <a:extLst>
-              <a:ext uri="{FF2B5EF4-FFF2-40B4-BE49-F238E27FC236}">
-                <a16:creationId xmlns:a16="http://schemas.microsoft.com/office/drawing/2014/main" id="{89E4B11F-9039-5176-A696-7E54E085C1FD}"/>
-              </a:ext>
-            </a:extLst>
-          </p:cNvPr>
-          <p:cNvSpPr/>
-          <p:nvPr/>
-        </p:nvSpPr>
-        <p:spPr>
-          <a:xfrm>
-            <a:off x="4826000" y="3860800"/>
-            <a:ext cx="9906000" cy="711200"/>
-          </a:xfrm>
-          <a:prstGeom prst="roundRect">
-            <a:avLst/>
-          </a:prstGeom>
-          <a:solidFill>
-            <a:srgbClr val="FFFFFF"/>
-          </a:solidFill>
-          <a:ln w="15875">
-            <a:solidFill>
-              <a:srgbClr val="BFD8F2"/>
-            </a:solidFill>
-          </a:ln>
-        </p:spPr>
-        <p:style>
-          <a:lnRef idx="2">
-            <a:schemeClr val="accent1">
-              <a:shade val="15000"/>
-            </a:schemeClr>
-          </a:lnRef>
-          <a:fillRef idx="1">
-            <a:schemeClr val="accent1"/>
-          </a:fillRef>
-          <a:effectRef idx="0">
-            <a:schemeClr val="accent1"/>
-          </a:effectRef>
-          <a:fontRef idx="minor">
-            <a:schemeClr val="lt1"/>
-          </a:fontRef>
-        </p:style>
-        <p:txBody>
-          <a:bodyPr rtlCol="0" anchor="ctr"/>
-          <a:lstStyle/>
-          <a:p>
-            <a:pPr algn="ctr"/>
-            <a:endParaRPr lang="es-GT"/>
-          </a:p>
-        </p:txBody>
-      </p:sp>
-      <p:sp>
-        <p:nvSpPr>
-          <p:cNvPr id="25" name="Rectángulo: esquinas redondeadas 24">
-            <a:extLst>
-              <a:ext uri="{FF2B5EF4-FFF2-40B4-BE49-F238E27FC236}">
-                <a16:creationId xmlns:a16="http://schemas.microsoft.com/office/drawing/2014/main" id="{1AF81674-724D-0A50-2BC3-4A1F52CFDC79}"/>
-              </a:ext>
-            </a:extLst>
-          </p:cNvPr>
-          <p:cNvSpPr/>
-          <p:nvPr/>
-        </p:nvSpPr>
-        <p:spPr>
-          <a:xfrm>
-            <a:off x="4953000" y="3949700"/>
-            <a:ext cx="381000" cy="381000"/>
-          </a:xfrm>
-          <a:prstGeom prst="roundRect">
-            <a:avLst/>
-          </a:prstGeom>
-          <a:solidFill>
-            <a:srgbClr val="DF3636"/>
-          </a:solidFill>
-          <a:ln w="19050" cap="flat" cmpd="sng" algn="ctr">
-            <a:noFill/>
-            <a:prstDash val="solid"/>
-            <a:miter lim="800000"/>
-          </a:ln>
-          <a:effectLst/>
-          <a:extLst>
-            <a:ext uri="{91240B29-F687-4F45-9708-019B960494DF}">
-              <a14:hiddenLine xmlns:a14="http://schemas.microsoft.com/office/drawing/2010/main" w="19050" cap="flat" cmpd="sng" algn="ctr">
-                <a:solidFill>
-                  <a:schemeClr val="accent1">
-                    <a:shade val="15000"/>
-                  </a:schemeClr>
-                </a:solidFill>
-                <a:prstDash val="solid"/>
-                <a:miter lim="800000"/>
-              </a14:hiddenLine>
-            </a:ext>
-          </a:extLst>
-        </p:spPr>
-        <p:style>
-          <a:lnRef idx="2">
-            <a:schemeClr val="accent1">
-              <a:shade val="15000"/>
-            </a:schemeClr>
-          </a:lnRef>
-          <a:fillRef idx="1">
-            <a:schemeClr val="accent1"/>
-          </a:fillRef>
-          <a:effectRef idx="0">
-            <a:schemeClr val="accent1"/>
-          </a:effectRef>
-          <a:fontRef idx="minor">
-            <a:schemeClr val="lt1"/>
-          </a:fontRef>
-        </p:style>
-        <p:txBody>
-          <a:bodyPr rtlCol="0" anchor="ctr"/>
-          <a:lstStyle/>
-          <a:p>
-            <a:pPr algn="ctr"/>
-            <a:endParaRPr lang="es-GT"/>
-          </a:p>
-        </p:txBody>
-      </p:sp>
-      <p:sp>
-        <p:nvSpPr>
-          <p:cNvPr id="26" name="CuadroTexto 25">
-            <a:extLst>
-              <a:ext uri="{FF2B5EF4-FFF2-40B4-BE49-F238E27FC236}">
-                <a16:creationId xmlns:a16="http://schemas.microsoft.com/office/drawing/2014/main" id="{4DC9F336-84F5-C174-4736-7B252B9943F1}"/>
-              </a:ext>
-            </a:extLst>
-          </p:cNvPr>
-          <p:cNvSpPr txBox="1"/>
-          <p:nvPr/>
-        </p:nvSpPr>
-        <p:spPr>
-          <a:xfrm>
-            <a:off x="5029200" y="4013200"/>
-            <a:ext cx="228600" cy="169277"/>
-          </a:xfrm>
-          <a:prstGeom prst="rect">
-            <a:avLst/>
-          </a:prstGeom>
-          <a:noFill/>
-        </p:spPr>
-        <p:txBody>
-          <a:bodyPr vert="horz" lIns="0" tIns="0" rIns="0" bIns="0" rtlCol="0">
-            <a:spAutoFit/>
-          </a:bodyPr>
-          <a:lstStyle/>
-          <a:p>
-            <a:pPr algn="ctr"/>
-            <a:r>
-              <a:rPr lang="es-GT" sz="1100" b="1">
-                <a:solidFill>
-                  <a:srgbClr val="FFFFFF"/>
-                </a:solidFill>
-                <a:latin typeface="Aptos" panose="020B0004020202020204" pitchFamily="34" charset="0"/>
-              </a:rPr>
-              <a:t>16</a:t>
-            </a:r>
-          </a:p>
-        </p:txBody>
-      </p:sp>
-      <p:sp>
-        <p:nvSpPr>
-          <p:cNvPr id="27" name="CuadroTexto 26">
-            <a:extLst>
-              <a:ext uri="{FF2B5EF4-FFF2-40B4-BE49-F238E27FC236}">
-                <a16:creationId xmlns:a16="http://schemas.microsoft.com/office/drawing/2014/main" id="{4B359BBF-D18F-32FE-F8DC-ACDE775784D0}"/>
-              </a:ext>
-            </a:extLst>
-          </p:cNvPr>
-          <p:cNvSpPr txBox="1"/>
-          <p:nvPr/>
-        </p:nvSpPr>
-        <p:spPr>
-          <a:xfrm>
-            <a:off x="5511800" y="3949700"/>
-            <a:ext cx="9067800" cy="184666"/>
-          </a:xfrm>
-          <a:prstGeom prst="rect">
-            <a:avLst/>
-          </a:prstGeom>
-          <a:noFill/>
-        </p:spPr>
-        <p:txBody>
-          <a:bodyPr vert="horz" lIns="0" tIns="0" rIns="0" bIns="0" rtlCol="0">
-            <a:spAutoFit/>
-          </a:bodyPr>
-          <a:lstStyle/>
-          <a:p>
-            <a:r>
-              <a:rPr lang="es-GT" sz="1200">
-                <a:solidFill>
-                  <a:srgbClr val="002D5A"/>
-                </a:solidFill>
-                <a:latin typeface="Aptos" panose="020B0004020202020204" pitchFamily="34" charset="0"/>
-              </a:rPr>
-              <a:t>Modificación Horario, Ruta, Frecuencias</a:t>
-            </a:r>
-          </a:p>
-        </p:txBody>
-      </p:sp>
-      <p:sp>
-        <p:nvSpPr>
-          <p:cNvPr id="28" name="Rectángulo: esquinas redondeadas 27">
-            <a:extLst>
-              <a:ext uri="{FF2B5EF4-FFF2-40B4-BE49-F238E27FC236}">
-                <a16:creationId xmlns:a16="http://schemas.microsoft.com/office/drawing/2014/main" id="{D1CBC9ED-65D5-65FF-B9CE-5798DBCEF6AE}"/>
-              </a:ext>
-            </a:extLst>
-          </p:cNvPr>
-          <p:cNvSpPr/>
-          <p:nvPr/>
-        </p:nvSpPr>
-        <p:spPr>
-          <a:xfrm>
-            <a:off x="4826000" y="4648200"/>
-            <a:ext cx="9906000" cy="711200"/>
-          </a:xfrm>
-          <a:prstGeom prst="roundRect">
-            <a:avLst/>
-          </a:prstGeom>
-          <a:solidFill>
-            <a:srgbClr val="FFFFFF"/>
-          </a:solidFill>
-          <a:ln w="15875">
-            <a:solidFill>
-              <a:srgbClr val="BFD8F2"/>
-            </a:solidFill>
-          </a:ln>
-        </p:spPr>
-        <p:style>
-          <a:lnRef idx="2">
-            <a:schemeClr val="accent1">
-              <a:shade val="15000"/>
-            </a:schemeClr>
-          </a:lnRef>
-          <a:fillRef idx="1">
-            <a:schemeClr val="accent1"/>
-          </a:fillRef>
-          <a:effectRef idx="0">
-            <a:schemeClr val="accent1"/>
-          </a:effectRef>
-          <a:fontRef idx="minor">
-            <a:schemeClr val="lt1"/>
-          </a:fontRef>
-        </p:style>
-        <p:txBody>
-          <a:bodyPr rtlCol="0" anchor="ctr"/>
-          <a:lstStyle/>
-          <a:p>
-            <a:pPr algn="ctr"/>
-            <a:endParaRPr lang="es-GT"/>
-          </a:p>
-        </p:txBody>
-      </p:sp>
-      <p:sp>
-        <p:nvSpPr>
-          <p:cNvPr id="29" name="Rectángulo: esquinas redondeadas 28">
-            <a:extLst>
-              <a:ext uri="{FF2B5EF4-FFF2-40B4-BE49-F238E27FC236}">
-                <a16:creationId xmlns:a16="http://schemas.microsoft.com/office/drawing/2014/main" id="{0E01C997-7334-21EE-4DA9-4309F0C206E3}"/>
-              </a:ext>
-            </a:extLst>
-          </p:cNvPr>
-          <p:cNvSpPr/>
-          <p:nvPr/>
-        </p:nvSpPr>
-        <p:spPr>
-          <a:xfrm>
-            <a:off x="4953000" y="4737100"/>
-            <a:ext cx="381000" cy="381000"/>
-          </a:xfrm>
-          <a:prstGeom prst="roundRect">
-            <a:avLst/>
-          </a:prstGeom>
-          <a:solidFill>
-            <a:srgbClr val="DF3636"/>
-          </a:solidFill>
-          <a:ln w="19050" cap="flat" cmpd="sng" algn="ctr">
-            <a:noFill/>
-            <a:prstDash val="solid"/>
-            <a:miter lim="800000"/>
-          </a:ln>
-          <a:effectLst/>
-          <a:extLst>
-            <a:ext uri="{91240B29-F687-4F45-9708-019B960494DF}">
-              <a14:hiddenLine xmlns:a14="http://schemas.microsoft.com/office/drawing/2010/main" w="19050" cap="flat" cmpd="sng" algn="ctr">
-                <a:solidFill>
-                  <a:schemeClr val="accent1">
-                    <a:shade val="15000"/>
-                  </a:schemeClr>
-                </a:solidFill>
-                <a:prstDash val="solid"/>
-                <a:miter lim="800000"/>
-              </a14:hiddenLine>
-            </a:ext>
-          </a:extLst>
-        </p:spPr>
-        <p:style>
-          <a:lnRef idx="2">
-            <a:schemeClr val="accent1">
-              <a:shade val="15000"/>
-            </a:schemeClr>
-          </a:lnRef>
-          <a:fillRef idx="1">
-            <a:schemeClr val="accent1"/>
-          </a:fillRef>
-          <a:effectRef idx="0">
-            <a:schemeClr val="accent1"/>
-          </a:effectRef>
-          <a:fontRef idx="minor">
-            <a:schemeClr val="lt1"/>
-          </a:fontRef>
-        </p:style>
-        <p:txBody>
-          <a:bodyPr rtlCol="0" anchor="ctr"/>
-          <a:lstStyle/>
-          <a:p>
-            <a:pPr algn="ctr"/>
-            <a:endParaRPr lang="es-GT"/>
-          </a:p>
-        </p:txBody>
-      </p:sp>
-      <p:sp>
-        <p:nvSpPr>
-          <p:cNvPr id="30" name="CuadroTexto 29">
-            <a:extLst>
-              <a:ext uri="{FF2B5EF4-FFF2-40B4-BE49-F238E27FC236}">
-                <a16:creationId xmlns:a16="http://schemas.microsoft.com/office/drawing/2014/main" id="{4A38B7FD-61A4-5DFC-EC8C-782BCAEB1673}"/>
-              </a:ext>
-            </a:extLst>
-          </p:cNvPr>
-          <p:cNvSpPr txBox="1"/>
-          <p:nvPr/>
-        </p:nvSpPr>
-        <p:spPr>
-          <a:xfrm>
-            <a:off x="5029200" y="4800600"/>
-            <a:ext cx="228600" cy="169277"/>
-          </a:xfrm>
-          <a:prstGeom prst="rect">
-            <a:avLst/>
-          </a:prstGeom>
-          <a:noFill/>
-        </p:spPr>
-        <p:txBody>
-          <a:bodyPr vert="horz" lIns="0" tIns="0" rIns="0" bIns="0" rtlCol="0">
-            <a:spAutoFit/>
-          </a:bodyPr>
-          <a:lstStyle/>
-          <a:p>
-            <a:pPr algn="ctr"/>
-            <a:r>
-              <a:rPr lang="es-GT" sz="1100" b="1">
-                <a:solidFill>
-                  <a:srgbClr val="FFFFFF"/>
-                </a:solidFill>
-                <a:latin typeface="Aptos" panose="020B0004020202020204" pitchFamily="34" charset="0"/>
-              </a:rPr>
-              <a:t>17</a:t>
-            </a:r>
-          </a:p>
-        </p:txBody>
-      </p:sp>
-      <p:sp>
-        <p:nvSpPr>
-          <p:cNvPr id="31" name="CuadroTexto 30">
-            <a:extLst>
-              <a:ext uri="{FF2B5EF4-FFF2-40B4-BE49-F238E27FC236}">
-                <a16:creationId xmlns:a16="http://schemas.microsoft.com/office/drawing/2014/main" id="{D2B22422-AC08-755A-AC14-F1F04C6BD5C1}"/>
-              </a:ext>
-            </a:extLst>
-          </p:cNvPr>
-          <p:cNvSpPr txBox="1"/>
-          <p:nvPr/>
-        </p:nvSpPr>
-        <p:spPr>
-          <a:xfrm>
-            <a:off x="5511800" y="4737100"/>
-            <a:ext cx="9067800" cy="184666"/>
-          </a:xfrm>
-          <a:prstGeom prst="rect">
-            <a:avLst/>
-          </a:prstGeom>
-          <a:noFill/>
-        </p:spPr>
-        <p:txBody>
-          <a:bodyPr vert="horz" lIns="0" tIns="0" rIns="0" bIns="0" rtlCol="0">
-            <a:spAutoFit/>
-          </a:bodyPr>
-          <a:lstStyle/>
-          <a:p>
-            <a:r>
-              <a:rPr lang="es-ES" sz="1200">
-                <a:solidFill>
-                  <a:srgbClr val="002D5A"/>
-                </a:solidFill>
-                <a:latin typeface="Aptos" panose="020B0004020202020204" pitchFamily="34" charset="0"/>
-              </a:rPr>
-              <a:t>Permiso Temporal de Explotación - Vuelo Comercial No Regular</a:t>
-            </a:r>
-            <a:endParaRPr lang="es-GT" sz="1200">
-              <a:solidFill>
-                <a:srgbClr val="002D5A"/>
-              </a:solidFill>
-              <a:latin typeface="Aptos" panose="020B0004020202020204" pitchFamily="34" charset="0"/>
-            </a:endParaRPr>
-          </a:p>
-        </p:txBody>
-      </p:sp>
-      <p:sp>
-        <p:nvSpPr>
-          <p:cNvPr id="32" name="Rectángulo: esquinas redondeadas 31">
-            <a:extLst>
-              <a:ext uri="{FF2B5EF4-FFF2-40B4-BE49-F238E27FC236}">
-                <a16:creationId xmlns:a16="http://schemas.microsoft.com/office/drawing/2014/main" id="{FB43093D-8959-B1B6-C6A2-200BCAC503A2}"/>
-              </a:ext>
-            </a:extLst>
-          </p:cNvPr>
-          <p:cNvSpPr/>
-          <p:nvPr/>
-        </p:nvSpPr>
-        <p:spPr>
-          <a:xfrm>
-            <a:off x="4826000" y="6286500"/>
-            <a:ext cx="9906000" cy="1143000"/>
-          </a:xfrm>
-          <a:prstGeom prst="roundRect">
-            <a:avLst/>
-          </a:prstGeom>
-          <a:solidFill>
-            <a:srgbClr val="FFFFFF"/>
-          </a:solidFill>
-          <a:ln w="15875">
-            <a:solidFill>
-              <a:srgbClr val="BFD8F2"/>
-            </a:solidFill>
-          </a:ln>
-        </p:spPr>
-        <p:style>
-          <a:lnRef idx="2">
-            <a:schemeClr val="accent1">
-              <a:shade val="15000"/>
-            </a:schemeClr>
-          </a:lnRef>
-          <a:fillRef idx="1">
-            <a:schemeClr val="accent1"/>
-          </a:fillRef>
-          <a:effectRef idx="0">
-            <a:schemeClr val="accent1"/>
-          </a:effectRef>
-          <a:fontRef idx="minor">
-            <a:schemeClr val="lt1"/>
-          </a:fontRef>
-        </p:style>
-        <p:txBody>
-          <a:bodyPr rtlCol="0" anchor="ctr"/>
-          <a:lstStyle/>
-          <a:p>
-            <a:pPr algn="ctr"/>
-            <a:endParaRPr lang="es-GT"/>
-          </a:p>
-        </p:txBody>
-      </p:sp>
-      <p:sp>
-        <p:nvSpPr>
-          <p:cNvPr id="33" name="Rectángulo 32">
-            <a:extLst>
-              <a:ext uri="{FF2B5EF4-FFF2-40B4-BE49-F238E27FC236}">
-                <a16:creationId xmlns:a16="http://schemas.microsoft.com/office/drawing/2014/main" id="{C76E8A63-30E5-C051-ADB4-AF9EC48EA9DE}"/>
-              </a:ext>
-            </a:extLst>
-          </p:cNvPr>
-          <p:cNvSpPr/>
-          <p:nvPr/>
-        </p:nvSpPr>
-        <p:spPr>
-          <a:xfrm>
-            <a:off x="4826000" y="6286500"/>
-            <a:ext cx="88900" cy="1143000"/>
-          </a:xfrm>
-          <a:prstGeom prst="rect">
-            <a:avLst/>
-          </a:prstGeom>
-          <a:solidFill>
-            <a:srgbClr val="DF3636"/>
-          </a:solidFill>
-          <a:ln w="19050" cap="flat" cmpd="sng" algn="ctr">
-            <a:noFill/>
-            <a:prstDash val="solid"/>
-            <a:miter lim="800000"/>
-          </a:ln>
-          <a:effectLst/>
-          <a:extLst>
-            <a:ext uri="{91240B29-F687-4F45-9708-019B960494DF}">
-              <a14:hiddenLine xmlns:a14="http://schemas.microsoft.com/office/drawing/2010/main" w="19050" cap="flat" cmpd="sng" algn="ctr">
-                <a:solidFill>
-                  <a:schemeClr val="accent1">
-                    <a:shade val="15000"/>
-                  </a:schemeClr>
-                </a:solidFill>
-                <a:prstDash val="solid"/>
-                <a:miter lim="800000"/>
-              </a14:hiddenLine>
-            </a:ext>
-          </a:extLst>
-        </p:spPr>
-        <p:style>
-          <a:lnRef idx="2">
-            <a:schemeClr val="accent1">
-              <a:shade val="15000"/>
-            </a:schemeClr>
-          </a:lnRef>
-          <a:fillRef idx="1">
-            <a:schemeClr val="accent1"/>
-          </a:fillRef>
-          <a:effectRef idx="0">
-            <a:schemeClr val="accent1"/>
-          </a:effectRef>
-          <a:fontRef idx="minor">
-            <a:schemeClr val="lt1"/>
-          </a:fontRef>
-        </p:style>
-        <p:txBody>
-          <a:bodyPr rtlCol="0" anchor="ctr"/>
-          <a:lstStyle/>
-          <a:p>
-            <a:pPr algn="ctr"/>
-            <a:endParaRPr lang="es-GT"/>
-          </a:p>
-        </p:txBody>
-      </p:sp>
-      <p:sp>
-        <p:nvSpPr>
-          <p:cNvPr id="34" name="CuadroTexto 33">
-            <a:extLst>
-              <a:ext uri="{FF2B5EF4-FFF2-40B4-BE49-F238E27FC236}">
-                <a16:creationId xmlns:a16="http://schemas.microsoft.com/office/drawing/2014/main" id="{AA8CC379-9348-660D-3F1F-15CA1550E638}"/>
-              </a:ext>
-            </a:extLst>
-          </p:cNvPr>
-          <p:cNvSpPr txBox="1"/>
-          <p:nvPr/>
-        </p:nvSpPr>
-        <p:spPr>
-          <a:xfrm>
-            <a:off x="5105400" y="6515100"/>
-            <a:ext cx="9398000" cy="261610"/>
-          </a:xfrm>
-          <a:prstGeom prst="rect">
-            <a:avLst/>
-          </a:prstGeom>
-          <a:noFill/>
-        </p:spPr>
-        <p:txBody>
-          <a:bodyPr vert="horz" lIns="0" tIns="0" rIns="0" bIns="0" rtlCol="0">
-            <a:spAutoFit/>
-          </a:bodyPr>
-          <a:lstStyle/>
-          <a:p>
-            <a:r>
-              <a:rPr lang="es-GT" sz="1700" b="1">
-                <a:solidFill>
-                  <a:srgbClr val="001F44"/>
-                </a:solidFill>
-                <a:latin typeface="Aptos" panose="020B0004020202020204" pitchFamily="34" charset="0"/>
-              </a:rPr>
-              <a:t>Próximo a iniciar</a:t>
-            </a:r>
-          </a:p>
-        </p:txBody>
-      </p:sp>
-      <p:sp>
-        <p:nvSpPr>
-          <p:cNvPr id="35" name="CuadroTexto 34">
-            <a:extLst>
-              <a:ext uri="{FF2B5EF4-FFF2-40B4-BE49-F238E27FC236}">
-                <a16:creationId xmlns:a16="http://schemas.microsoft.com/office/drawing/2014/main" id="{32896630-954B-2E27-21ED-2790F9388CC2}"/>
-              </a:ext>
-            </a:extLst>
-          </p:cNvPr>
-          <p:cNvSpPr txBox="1"/>
-          <p:nvPr/>
-        </p:nvSpPr>
-        <p:spPr>
-          <a:xfrm>
-            <a:off x="5105400" y="6985000"/>
-            <a:ext cx="9372600" cy="430887"/>
-          </a:xfrm>
-          <a:prstGeom prst="rect">
-            <a:avLst/>
-          </a:prstGeom>
-          <a:noFill/>
-        </p:spPr>
-        <p:txBody>
-          <a:bodyPr vert="horz" lIns="0" tIns="0" rIns="0" bIns="0" rtlCol="0">
-            <a:spAutoFit/>
-          </a:bodyPr>
-          <a:lstStyle/>
-          <a:p>
-            <a:r>
-              <a:rPr lang="es-ES" sz="1400">
-                <a:solidFill>
-                  <a:srgbClr val="002D5A"/>
-                </a:solidFill>
-                <a:latin typeface="Aptos" panose="020B0004020202020204" pitchFamily="34" charset="0"/>
-              </a:rPr>
-              <a:t>Estos trámites requieren iniciar análisis de requerimientos, definición de flujo, diseño de formulario, programación, pruebas y planificación de lanzamiento.</a:t>
-            </a:r>
-            <a:endParaRPr lang="es-GT" sz="1400">
-              <a:solidFill>
-                <a:srgbClr val="002D5A"/>
-              </a:solidFill>
-              <a:latin typeface="Aptos" panose="020B0004020202020204" pitchFamily="34" charset="0"/>
-            </a:endParaRPr>
           </a:p>
         </p:txBody>
       </p:sp>
@@ -19657,7 +18853,7 @@
           <a:lstStyle/>
           <a:p>
             <a:pPr algn="ctr"/>
-            <a:endParaRPr lang="es-GT"/>
+            <a:endParaRPr lang="es-GT" dirty="0"/>
           </a:p>
         </p:txBody>
       </p:sp>
